--- a/project_47_classroom_engagement_analysis/presentations/project_presentation.pptx
+++ b/project_47_classroom_engagement_analysis/presentations/project_presentation.pptx
@@ -13,6 +13,13 @@
     <p:sldId id="261" r:id="rId12"/>
     <p:sldId id="262" r:id="rId13"/>
     <p:sldId id="263" r:id="rId14"/>
+    <p:sldId id="264" r:id="rId15"/>
+    <p:sldId id="265" r:id="rId16"/>
+    <p:sldId id="266" r:id="rId17"/>
+    <p:sldId id="267" r:id="rId18"/>
+    <p:sldId id="268" r:id="rId19"/>
+    <p:sldId id="269" r:id="rId20"/>
+    <p:sldId id="270" r:id="rId21"/>
   </p:sldIdLst>
   <p:sldSz cx="12191695" cy="6858000" type="screen4x3"/>
   <p:notesSz cx="6858000" cy="9144000"/>
@@ -3146,8 +3153,8 @@
         </p:nvSpPr>
         <p:spPr>
           <a:xfrm>
-            <a:off x="1097280" y="1645920"/>
-            <a:ext cx="10058400" cy="3474720"/>
+            <a:off x="914400" y="1645920"/>
+            <a:ext cx="10362895" cy="3657600"/>
           </a:xfrm>
           <a:prstGeom prst="rect">
             <a:avLst/>
@@ -3161,44 +3168,2348 @@
           <a:lstStyle/>
           <a:p>
             <a:pPr>
-              <a:defRPr sz="1400" b="1">
-                <a:solidFill>
-                  <a:srgbClr val="38BDF8"/>
-                </a:solidFill>
-              </a:defRPr>
-            </a:pPr>
-            <a:r>
-              <a:t>PROJECT 47 OF 55  •  RESEARCH &amp; IMPLEMENTATION DECK</a:t>
-            </a:r>
-          </a:p>
-          <a:p>
-            <a:pPr>
-              <a:spcBef>
+              <a:spcAft>
                 <a:spcPts val="1400"/>
-              </a:spcBef>
-              <a:defRPr sz="3200" b="1">
+              </a:spcAft>
+            </a:pPr>
+            <a:r>
+              <a:rPr b="1" sz="1200">
+                <a:solidFill>
+                  <a:srgbClr val="06B6D4"/>
+                </a:solidFill>
+              </a:rPr>
+              <a:t>CAPSTONE VERIFICATION PORTFOLIO • PROJECT-047</a:t>
+            </a:r>
+          </a:p>
+          <a:p>
+            <a:pPr>
+              <a:spcAft>
+                <a:spcPts val="1600"/>
+              </a:spcAft>
+            </a:pPr>
+            <a:r>
+              <a:rPr b="1" sz="3600">
                 <a:solidFill>
                   <a:srgbClr val="FFFFFF"/>
                 </a:solidFill>
-              </a:defRPr>
-            </a:pPr>
-            <a:r>
-              <a:t>Intelligent Classroom Engagement Analysis Using Facial Expression and Activity Recognition</a:t>
-            </a:r>
-          </a:p>
-          <a:p>
-            <a:pPr>
-              <a:spcBef>
-                <a:spcPts val="1200"/>
-              </a:spcBef>
-              <a:defRPr sz="1600">
+              </a:rPr>
+              <a:t>Automated Classroom Student Engagement
+&amp; Attention Analysis Using Computer Vision</a:t>
+            </a:r>
+          </a:p>
+          <a:p>
+            <a:pPr>
+              <a:spcAft>
+                <a:spcPts val="2400"/>
+              </a:spcAft>
+            </a:pPr>
+            <a:r>
+              <a:rPr sz="1400">
                 <a:solidFill>
                   <a:srgbClr val="CBD5E1"/>
                 </a:solidFill>
-              </a:defRPr>
-            </a:pPr>
-            <a:r>
-              <a:t>Enterprise-Grade AI Architecture, Machine Learning Pipeline &amp; Deployment Framework</a:t>
+              </a:rPr>
+              <a:t>A Privacy-Preserving Multimodal Ed-Tech Platform Integrating 3D Gaze Tracking, Facial Action Units,
+Multi-Target Neural Attention Regression, and Cryptographic SHA-256 Audit Chaining.</a:t>
+            </a:r>
+          </a:p>
+          <a:p>
+            <a:r>
+              <a:rPr b="1" sz="1100">
+                <a:solidFill>
+                  <a:srgbClr val="06B6D4"/>
+                </a:solidFill>
+              </a:rPr>
+              <a:t>Port Allocation: 5047 | Architecture: PyTorch Dual-Engine (MPS/CUDA) | DB: SQLite WAL | Tests: 35/35 Passing</a:t>
+            </a:r>
+          </a:p>
+        </p:txBody>
+      </p:sp>
+    </p:spTree>
+  </p:cSld>
+  <p:clrMapOvr>
+    <a:masterClrMapping/>
+  </p:clrMapOvr>
+</p:sld>
+</file>
+
+<file path=ppt/slides/slide10.xml><?xml version="1.0" encoding="utf-8"?>
+<p:sld xmlns:a="http://schemas.openxmlformats.org/drawingml/2006/main" xmlns:p="http://schemas.openxmlformats.org/presentationml/2006/main" xmlns:r="http://schemas.openxmlformats.org/officeDocument/2006/relationships">
+  <p:cSld>
+    <p:spTree>
+      <p:nvGrpSpPr>
+        <p:cNvPr id="1" name=""/>
+        <p:cNvGrpSpPr/>
+        <p:nvPr/>
+      </p:nvGrpSpPr>
+      <p:grpSpPr/>
+      <p:sp>
+        <p:nvSpPr>
+          <p:cNvPr id="2" name="TextBox 1"/>
+          <p:cNvSpPr txBox="1"/>
+          <p:nvPr/>
+        </p:nvSpPr>
+        <p:spPr>
+          <a:xfrm>
+            <a:off x="731520" y="365760"/>
+            <a:ext cx="10728655" cy="822960"/>
+          </a:xfrm>
+          <a:prstGeom prst="rect">
+            <a:avLst/>
+          </a:prstGeom>
+          <a:noFill/>
+        </p:spPr>
+        <p:txBody>
+          <a:bodyPr wrap="square" lIns="0" tIns="0" rIns="0" bIns="0">
+            <a:spAutoFit/>
+          </a:bodyPr>
+          <a:lstStyle/>
+          <a:p>
+            <a:r>
+              <a:rPr b="1" sz="1000">
+                <a:solidFill>
+                  <a:srgbClr val="06B6D4"/>
+                </a:solidFill>
+              </a:rPr>
+              <a:t>OPERATOR INTERFACE • PROJECT-047</a:t>
+            </a:r>
+          </a:p>
+          <a:p>
+            <a:r>
+              <a:rPr b="1" sz="2000">
+                <a:solidFill>
+                  <a:srgbClr val="0F172A"/>
+                </a:solidFill>
+              </a:rPr>
+              <a:t>Live Platform Demonstration: Classroom Dashboard</a:t>
+            </a:r>
+          </a:p>
+        </p:txBody>
+      </p:sp>
+      <p:pic>
+        <p:nvPicPr>
+          <p:cNvPr id="3" name="Picture 2" descr="01_classroom_dashboard.png"/>
+          <p:cNvPicPr>
+            <a:picLocks noChangeAspect="1"/>
+          </p:cNvPicPr>
+          <p:nvPr/>
+        </p:nvPicPr>
+        <p:blipFill>
+          <a:blip r:embed="rId2"/>
+          <a:stretch>
+            <a:fillRect/>
+          </a:stretch>
+        </p:blipFill>
+        <p:spPr>
+          <a:xfrm>
+            <a:off x="731520" y="1371600"/>
+            <a:ext cx="6217920" cy="3886200"/>
+          </a:xfrm>
+          <a:prstGeom prst="rect">
+            <a:avLst/>
+          </a:prstGeom>
+        </p:spPr>
+      </p:pic>
+      <p:sp>
+        <p:nvSpPr>
+          <p:cNvPr id="4" name="Rectangle 3"/>
+          <p:cNvSpPr/>
+          <p:nvPr/>
+        </p:nvSpPr>
+        <p:spPr>
+          <a:xfrm>
+            <a:off x="7223760" y="1371600"/>
+            <a:ext cx="4206240" cy="4937760"/>
+          </a:xfrm>
+          <a:prstGeom prst="rect">
+            <a:avLst/>
+          </a:prstGeom>
+          <a:solidFill>
+            <a:srgbClr val="FFFFFF"/>
+          </a:solidFill>
+          <a:ln w="12700">
+            <a:solidFill>
+              <a:srgbClr val="E2E8F0"/>
+            </a:solidFill>
+          </a:ln>
+        </p:spPr>
+        <p:style>
+          <a:lnRef idx="1">
+            <a:schemeClr val="accent1"/>
+          </a:lnRef>
+          <a:fillRef idx="3">
+            <a:schemeClr val="accent1"/>
+          </a:fillRef>
+          <a:effectRef idx="2">
+            <a:schemeClr val="accent1"/>
+          </a:effectRef>
+          <a:fontRef idx="minor">
+            <a:schemeClr val="lt1"/>
+          </a:fontRef>
+        </p:style>
+        <p:txBody>
+          <a:bodyPr rtlCol="0" anchor="ctr"/>
+          <a:lstStyle/>
+          <a:p>
+            <a:pPr algn="ctr"/>
+          </a:p>
+        </p:txBody>
+      </p:sp>
+      <p:sp>
+        <p:nvSpPr>
+          <p:cNvPr id="5" name="TextBox 4"/>
+          <p:cNvSpPr txBox="1"/>
+          <p:nvPr/>
+        </p:nvSpPr>
+        <p:spPr>
+          <a:xfrm>
+            <a:off x="7406640" y="1554480"/>
+            <a:ext cx="3840480" cy="4572000"/>
+          </a:xfrm>
+          <a:prstGeom prst="rect">
+            <a:avLst/>
+          </a:prstGeom>
+          <a:noFill/>
+        </p:spPr>
+        <p:txBody>
+          <a:bodyPr wrap="square" lIns="0" tIns="0" rIns="0" bIns="0">
+            <a:spAutoFit/>
+          </a:bodyPr>
+          <a:lstStyle/>
+          <a:p>
+            <a:pPr>
+              <a:spcAft>
+                <a:spcPts val="800"/>
+              </a:spcAft>
+            </a:pPr>
+            <a:r>
+              <a:rPr b="1" sz="1200">
+                <a:solidFill>
+                  <a:srgbClr val="06B6D4"/>
+                </a:solidFill>
+              </a:rPr>
+              <a:t>UI Architecture &amp; Key Widgets</a:t>
+            </a:r>
+          </a:p>
+          <a:p>
+            <a:pPr>
+              <a:spcAft>
+                <a:spcPts val="400"/>
+              </a:spcAft>
+              <a:defRPr sz="1000"/>
+            </a:pPr>
+            <a:r>
+              <a:rPr b="1">
+                <a:solidFill>
+                  <a:srgbClr val="1E293B"/>
+                </a:solidFill>
+              </a:rPr>
+              <a:t>Unified Dark Educational Theme: </a:t>
+            </a:r>
+            <a:r>
+              <a:rPr>
+                <a:solidFill>
+                  <a:srgbClr val="1E293B"/>
+                </a:solidFill>
+              </a:rPr>
+              <a:t>High-contrast, low-fatigue dashboard designed for lecture podiums and monitoring consoles.</a:t>
+            </a:r>
+          </a:p>
+          <a:p>
+            <a:pPr>
+              <a:spcAft>
+                <a:spcPts val="400"/>
+              </a:spcAft>
+              <a:defRPr sz="1000"/>
+            </a:pPr>
+            <a:r>
+              <a:rPr b="1">
+                <a:solidFill>
+                  <a:srgbClr val="1E293B"/>
+                </a:solidFill>
+              </a:rPr>
+              <a:t>Header Telemetry: </a:t>
+            </a:r>
+            <a:r>
+              <a:rPr>
+                <a:solidFill>
+                  <a:srgbClr val="1E293B"/>
+                </a:solidFill>
+              </a:rPr>
+              <a:t>Confirms Port 5047 status, SQLite WAL mode, and dual PyTorch model active state.</a:t>
+            </a:r>
+          </a:p>
+          <a:p>
+            <a:pPr>
+              <a:spcAft>
+                <a:spcPts val="400"/>
+              </a:spcAft>
+              <a:defRPr sz="1000"/>
+            </a:pPr>
+            <a:r>
+              <a:rPr b="1">
+                <a:solidFill>
+                  <a:srgbClr val="1E293B"/>
+                </a:solidFill>
+              </a:rPr>
+              <a:t>Primary KPI Cards: </a:t>
+            </a:r>
+            <a:r>
+              <a:rPr>
+                <a:solidFill>
+                  <a:srgbClr val="1E293B"/>
+                </a:solidFill>
+              </a:rPr>
+              <a:t>Tracks Total Monitored Snapshots, Mean Engagement Score (76.5%), Active Sessions, and Latency (11.4 ms).</a:t>
+            </a:r>
+          </a:p>
+          <a:p>
+            <a:pPr>
+              <a:spcAft>
+                <a:spcPts val="400"/>
+              </a:spcAft>
+              <a:defRPr sz="1000"/>
+            </a:pPr>
+            <a:r>
+              <a:rPr b="1">
+                <a:solidFill>
+                  <a:srgbClr val="1E293B"/>
+                </a:solidFill>
+              </a:rPr>
+              <a:t>Classroom Telemetry Sliders: </a:t>
+            </a:r>
+            <a:r>
+              <a:rPr>
+                <a:solidFill>
+                  <a:srgbClr val="1E293B"/>
+                </a:solidFill>
+              </a:rPr>
+              <a:t>Fine-grained sliders for Attentive %, Bored %, Distracted %, Drowsy %, Gaze %, and Hand Raises.</a:t>
+            </a:r>
+          </a:p>
+          <a:p>
+            <a:pPr>
+              <a:spcAft>
+                <a:spcPts val="400"/>
+              </a:spcAft>
+              <a:defRPr sz="1000"/>
+            </a:pPr>
+            <a:r>
+              <a:rPr b="1">
+                <a:solidFill>
+                  <a:srgbClr val="1E293B"/>
+                </a:solidFill>
+              </a:rPr>
+              <a:t>One-Click Presets: </a:t>
+            </a:r>
+            <a:r>
+              <a:rPr>
+                <a:solidFill>
+                  <a:srgbClr val="1E293B"/>
+                </a:solidFill>
+              </a:rPr>
+              <a:t>Instant switching between CS-301 High Focus, MATH-210 Slump, AI-405 Fatigue, and BIO-108 Active Q&amp;A.</a:t>
+            </a:r>
+          </a:p>
+        </p:txBody>
+      </p:sp>
+    </p:spTree>
+  </p:cSld>
+  <p:clrMapOvr>
+    <a:masterClrMapping/>
+  </p:clrMapOvr>
+</p:sld>
+</file>
+
+<file path=ppt/slides/slide11.xml><?xml version="1.0" encoding="utf-8"?>
+<p:sld xmlns:a="http://schemas.openxmlformats.org/drawingml/2006/main" xmlns:p="http://schemas.openxmlformats.org/presentationml/2006/main" xmlns:r="http://schemas.openxmlformats.org/officeDocument/2006/relationships">
+  <p:cSld>
+    <p:spTree>
+      <p:nvGrpSpPr>
+        <p:cNvPr id="1" name=""/>
+        <p:cNvGrpSpPr/>
+        <p:nvPr/>
+      </p:nvGrpSpPr>
+      <p:grpSpPr/>
+      <p:sp>
+        <p:nvSpPr>
+          <p:cNvPr id="2" name="TextBox 1"/>
+          <p:cNvSpPr txBox="1"/>
+          <p:nvPr/>
+        </p:nvSpPr>
+        <p:spPr>
+          <a:xfrm>
+            <a:off x="731520" y="365760"/>
+            <a:ext cx="10728655" cy="822960"/>
+          </a:xfrm>
+          <a:prstGeom prst="rect">
+            <a:avLst/>
+          </a:prstGeom>
+          <a:noFill/>
+        </p:spPr>
+        <p:txBody>
+          <a:bodyPr wrap="square" lIns="0" tIns="0" rIns="0" bIns="0">
+            <a:spAutoFit/>
+          </a:bodyPr>
+          <a:lstStyle/>
+          <a:p>
+            <a:r>
+              <a:rPr b="1" sz="1000">
+                <a:solidFill>
+                  <a:srgbClr val="06B6D4"/>
+                </a:solidFill>
+              </a:rPr>
+              <a:t>REAL-TIME TELEMETRY • PROJECT-047</a:t>
+            </a:r>
+          </a:p>
+          <a:p>
+            <a:r>
+              <a:rPr b="1" sz="2000">
+                <a:solidFill>
+                  <a:srgbClr val="0F172A"/>
+                </a:solidFill>
+              </a:rPr>
+              <a:t>3D Gaze Vector &amp; Affective Pose HUD</a:t>
+            </a:r>
+          </a:p>
+        </p:txBody>
+      </p:sp>
+      <p:pic>
+        <p:nvPicPr>
+          <p:cNvPr id="3" name="Picture 2" descr="02_3d_gaze_pose_hud.png"/>
+          <p:cNvPicPr>
+            <a:picLocks noChangeAspect="1"/>
+          </p:cNvPicPr>
+          <p:nvPr/>
+        </p:nvPicPr>
+        <p:blipFill>
+          <a:blip r:embed="rId2"/>
+          <a:stretch>
+            <a:fillRect/>
+          </a:stretch>
+        </p:blipFill>
+        <p:spPr>
+          <a:xfrm>
+            <a:off x="731520" y="1371600"/>
+            <a:ext cx="6217920" cy="3886200"/>
+          </a:xfrm>
+          <a:prstGeom prst="rect">
+            <a:avLst/>
+          </a:prstGeom>
+        </p:spPr>
+      </p:pic>
+      <p:sp>
+        <p:nvSpPr>
+          <p:cNvPr id="4" name="Rectangle 3"/>
+          <p:cNvSpPr/>
+          <p:nvPr/>
+        </p:nvSpPr>
+        <p:spPr>
+          <a:xfrm>
+            <a:off x="7223760" y="1371600"/>
+            <a:ext cx="4206240" cy="4937760"/>
+          </a:xfrm>
+          <a:prstGeom prst="rect">
+            <a:avLst/>
+          </a:prstGeom>
+          <a:solidFill>
+            <a:srgbClr val="FFFFFF"/>
+          </a:solidFill>
+          <a:ln w="12700">
+            <a:solidFill>
+              <a:srgbClr val="E2E8F0"/>
+            </a:solidFill>
+          </a:ln>
+        </p:spPr>
+        <p:style>
+          <a:lnRef idx="1">
+            <a:schemeClr val="accent1"/>
+          </a:lnRef>
+          <a:fillRef idx="3">
+            <a:schemeClr val="accent1"/>
+          </a:fillRef>
+          <a:effectRef idx="2">
+            <a:schemeClr val="accent1"/>
+          </a:effectRef>
+          <a:fontRef idx="minor">
+            <a:schemeClr val="lt1"/>
+          </a:fontRef>
+        </p:style>
+        <p:txBody>
+          <a:bodyPr rtlCol="0" anchor="ctr"/>
+          <a:lstStyle/>
+          <a:p>
+            <a:pPr algn="ctr"/>
+          </a:p>
+        </p:txBody>
+      </p:sp>
+      <p:sp>
+        <p:nvSpPr>
+          <p:cNvPr id="5" name="TextBox 4"/>
+          <p:cNvSpPr txBox="1"/>
+          <p:nvPr/>
+        </p:nvSpPr>
+        <p:spPr>
+          <a:xfrm>
+            <a:off x="7406640" y="1554480"/>
+            <a:ext cx="3840480" cy="4572000"/>
+          </a:xfrm>
+          <a:prstGeom prst="rect">
+            <a:avLst/>
+          </a:prstGeom>
+          <a:noFill/>
+        </p:spPr>
+        <p:txBody>
+          <a:bodyPr wrap="square" lIns="0" tIns="0" rIns="0" bIns="0">
+            <a:spAutoFit/>
+          </a:bodyPr>
+          <a:lstStyle/>
+          <a:p>
+            <a:pPr>
+              <a:spcAft>
+                <a:spcPts val="800"/>
+              </a:spcAft>
+            </a:pPr>
+            <a:r>
+              <a:rPr b="1" sz="1200">
+                <a:solidFill>
+                  <a:srgbClr val="06B6D4"/>
+                </a:solidFill>
+              </a:rPr>
+              <a:t>3D Gaze HUD Elements</a:t>
+            </a:r>
+          </a:p>
+          <a:p>
+            <a:pPr>
+              <a:spcAft>
+                <a:spcPts val="400"/>
+              </a:spcAft>
+              <a:defRPr sz="1000"/>
+            </a:pPr>
+            <a:r>
+              <a:rPr b="1">
+                <a:solidFill>
+                  <a:srgbClr val="1E293B"/>
+                </a:solidFill>
+              </a:rPr>
+              <a:t>Simulated Eye Orbitals: </a:t>
+            </a:r>
+            <a:r>
+              <a:rPr>
+                <a:solidFill>
+                  <a:srgbClr val="1E293B"/>
+                </a:solidFill>
+              </a:rPr>
+              <a:t>Dual animated cyan pupils tracking real-time 3D gaze vector pitch and yaw angles.</a:t>
+            </a:r>
+          </a:p>
+          <a:p>
+            <a:pPr>
+              <a:spcAft>
+                <a:spcPts val="400"/>
+              </a:spcAft>
+              <a:defRPr sz="1000"/>
+            </a:pPr>
+            <a:r>
+              <a:rPr b="1">
+                <a:solidFill>
+                  <a:srgbClr val="1E293B"/>
+                </a:solidFill>
+              </a:rPr>
+              <a:t>AU45 Blink Rate Counter: </a:t>
+            </a:r>
+            <a:r>
+              <a:rPr>
+                <a:solidFill>
+                  <a:srgbClr val="1E293B"/>
+                </a:solidFill>
+              </a:rPr>
+              <a:t>Monitors micro-sleep indications (normal: 14/min; fatigue: &gt;28/min).</a:t>
+            </a:r>
+          </a:p>
+          <a:p>
+            <a:pPr>
+              <a:spcAft>
+                <a:spcPts val="400"/>
+              </a:spcAft>
+              <a:defRPr sz="1000"/>
+            </a:pPr>
+            <a:r>
+              <a:rPr b="1">
+                <a:solidFill>
+                  <a:srgbClr val="1E293B"/>
+                </a:solidFill>
+              </a:rPr>
+              <a:t>Directive Status Pill: </a:t>
+            </a:r>
+            <a:r>
+              <a:rPr>
+                <a:solidFill>
+                  <a:srgbClr val="1E293B"/>
+                </a:solidFill>
+              </a:rPr>
+              <a:t>Displays current pedagogical directive: MAINTAIN_CURRENT_PACE, ASK_QUESTION, POLL, BREAK.</a:t>
+            </a:r>
+          </a:p>
+          <a:p>
+            <a:pPr>
+              <a:spcAft>
+                <a:spcPts val="400"/>
+              </a:spcAft>
+              <a:defRPr sz="1000"/>
+            </a:pPr>
+            <a:r>
+              <a:rPr b="1">
+                <a:solidFill>
+                  <a:srgbClr val="1E293B"/>
+                </a:solidFill>
+              </a:rPr>
+              <a:t>Board Focus Percentage: </a:t>
+            </a:r>
+            <a:r>
+              <a:rPr>
+                <a:solidFill>
+                  <a:srgbClr val="1E293B"/>
+                </a:solidFill>
+              </a:rPr>
+              <a:t>Quantifies cohort visual alignment with classroom blackboard or presentation slides.</a:t>
+            </a:r>
+          </a:p>
+          <a:p>
+            <a:pPr>
+              <a:spcAft>
+                <a:spcPts val="400"/>
+              </a:spcAft>
+              <a:defRPr sz="1000"/>
+            </a:pPr>
+            <a:r>
+              <a:rPr b="1">
+                <a:solidFill>
+                  <a:srgbClr val="1E293B"/>
+                </a:solidFill>
+              </a:rPr>
+              <a:t>Forecast Telemetry Cards: </a:t>
+            </a:r>
+            <a:r>
+              <a:rPr>
+                <a:solidFill>
+                  <a:srgbClr val="1E293B"/>
+                </a:solidFill>
+              </a:rPr>
+              <a:t>Displays Class Attention Index, Drowsiness Risk, Teacher Urgency, and Participation Forecast.</a:t>
+            </a:r>
+          </a:p>
+        </p:txBody>
+      </p:sp>
+    </p:spTree>
+  </p:cSld>
+  <p:clrMapOvr>
+    <a:masterClrMapping/>
+  </p:clrMapOvr>
+</p:sld>
+</file>
+
+<file path=ppt/slides/slide12.xml><?xml version="1.0" encoding="utf-8"?>
+<p:sld xmlns:a="http://schemas.openxmlformats.org/drawingml/2006/main" xmlns:p="http://schemas.openxmlformats.org/presentationml/2006/main" xmlns:r="http://schemas.openxmlformats.org/officeDocument/2006/relationships">
+  <p:cSld>
+    <p:spTree>
+      <p:nvGrpSpPr>
+        <p:cNvPr id="1" name=""/>
+        <p:cNvGrpSpPr/>
+        <p:nvPr/>
+      </p:nvGrpSpPr>
+      <p:grpSpPr/>
+      <p:sp>
+        <p:nvSpPr>
+          <p:cNvPr id="2" name="TextBox 1"/>
+          <p:cNvSpPr txBox="1"/>
+          <p:nvPr/>
+        </p:nvSpPr>
+        <p:spPr>
+          <a:xfrm>
+            <a:off x="731520" y="365760"/>
+            <a:ext cx="10728655" cy="822960"/>
+          </a:xfrm>
+          <a:prstGeom prst="rect">
+            <a:avLst/>
+          </a:prstGeom>
+          <a:noFill/>
+        </p:spPr>
+        <p:txBody>
+          <a:bodyPr wrap="square" lIns="0" tIns="0" rIns="0" bIns="0">
+            <a:spAutoFit/>
+          </a:bodyPr>
+          <a:lstStyle/>
+          <a:p>
+            <a:r>
+              <a:rPr b="1" sz="1000">
+                <a:solidFill>
+                  <a:srgbClr val="06B6D4"/>
+                </a:solidFill>
+              </a:rPr>
+              <a:t>LIVE DEMONSTRATION • PROJECT-047</a:t>
+            </a:r>
+          </a:p>
+          <a:p>
+            <a:r>
+              <a:rPr b="1" sz="2000">
+                <a:solidFill>
+                  <a:srgbClr val="0F172A"/>
+                </a:solidFill>
+              </a:rPr>
+              <a:t>Pedagogical Pivot: AI-405 Cognitive Fatigue &amp; Refresher Break</a:t>
+            </a:r>
+          </a:p>
+        </p:txBody>
+      </p:sp>
+      <p:pic>
+        <p:nvPicPr>
+          <p:cNvPr id="3" name="Picture 2" descr="05_ai405_deep_learning_fatigue.png"/>
+          <p:cNvPicPr>
+            <a:picLocks noChangeAspect="1"/>
+          </p:cNvPicPr>
+          <p:nvPr/>
+        </p:nvPicPr>
+        <p:blipFill>
+          <a:blip r:embed="rId2"/>
+          <a:stretch>
+            <a:fillRect/>
+          </a:stretch>
+        </p:blipFill>
+        <p:spPr>
+          <a:xfrm>
+            <a:off x="731520" y="1371600"/>
+            <a:ext cx="6217920" cy="3886200"/>
+          </a:xfrm>
+          <a:prstGeom prst="rect">
+            <a:avLst/>
+          </a:prstGeom>
+        </p:spPr>
+      </p:pic>
+      <p:sp>
+        <p:nvSpPr>
+          <p:cNvPr id="4" name="Rectangle 3"/>
+          <p:cNvSpPr/>
+          <p:nvPr/>
+        </p:nvSpPr>
+        <p:spPr>
+          <a:xfrm>
+            <a:off x="7223760" y="1371600"/>
+            <a:ext cx="4206240" cy="4937760"/>
+          </a:xfrm>
+          <a:prstGeom prst="rect">
+            <a:avLst/>
+          </a:prstGeom>
+          <a:solidFill>
+            <a:srgbClr val="FFFFFF"/>
+          </a:solidFill>
+          <a:ln w="12700">
+            <a:solidFill>
+              <a:srgbClr val="E2E8F0"/>
+            </a:solidFill>
+          </a:ln>
+        </p:spPr>
+        <p:style>
+          <a:lnRef idx="1">
+            <a:schemeClr val="accent1"/>
+          </a:lnRef>
+          <a:fillRef idx="3">
+            <a:schemeClr val="accent1"/>
+          </a:fillRef>
+          <a:effectRef idx="2">
+            <a:schemeClr val="accent1"/>
+          </a:effectRef>
+          <a:fontRef idx="minor">
+            <a:schemeClr val="lt1"/>
+          </a:fontRef>
+        </p:style>
+        <p:txBody>
+          <a:bodyPr rtlCol="0" anchor="ctr"/>
+          <a:lstStyle/>
+          <a:p>
+            <a:pPr algn="ctr"/>
+          </a:p>
+        </p:txBody>
+      </p:sp>
+      <p:sp>
+        <p:nvSpPr>
+          <p:cNvPr id="5" name="TextBox 4"/>
+          <p:cNvSpPr txBox="1"/>
+          <p:nvPr/>
+        </p:nvSpPr>
+        <p:spPr>
+          <a:xfrm>
+            <a:off x="7406640" y="1554480"/>
+            <a:ext cx="3840480" cy="4572000"/>
+          </a:xfrm>
+          <a:prstGeom prst="rect">
+            <a:avLst/>
+          </a:prstGeom>
+          <a:noFill/>
+        </p:spPr>
+        <p:txBody>
+          <a:bodyPr wrap="square" lIns="0" tIns="0" rIns="0" bIns="0">
+            <a:spAutoFit/>
+          </a:bodyPr>
+          <a:lstStyle/>
+          <a:p>
+            <a:pPr>
+              <a:spcAft>
+                <a:spcPts val="800"/>
+              </a:spcAft>
+            </a:pPr>
+            <a:r>
+              <a:rPr b="1" sz="1200">
+                <a:solidFill>
+                  <a:srgbClr val="06B6D4"/>
+                </a:solidFill>
+              </a:rPr>
+              <a:t>Fatigue Evaluation &amp; Directive</a:t>
+            </a:r>
+          </a:p>
+          <a:p>
+            <a:pPr>
+              <a:spcAft>
+                <a:spcPts val="400"/>
+              </a:spcAft>
+              <a:defRPr sz="1000"/>
+            </a:pPr>
+            <a:r>
+              <a:rPr b="1">
+                <a:solidFill>
+                  <a:srgbClr val="1E293B"/>
+                </a:solidFill>
+              </a:rPr>
+              <a:t>Course &amp; Topic: </a:t>
+            </a:r>
+            <a:r>
+              <a:rPr>
+                <a:solidFill>
+                  <a:srgbClr val="1E293B"/>
+                </a:solidFill>
+              </a:rPr>
+              <a:t>AI-405: Deep Learning &amp; Neural Representations (Backpropagation Through Time).</a:t>
+            </a:r>
+          </a:p>
+          <a:p>
+            <a:pPr>
+              <a:spcAft>
+                <a:spcPts val="400"/>
+              </a:spcAft>
+              <a:defRPr sz="1000"/>
+            </a:pPr>
+            <a:r>
+              <a:rPr b="1">
+                <a:solidFill>
+                  <a:srgbClr val="1E293B"/>
+                </a:solidFill>
+              </a:rPr>
+              <a:t>Observed Cues: </a:t>
+            </a:r>
+            <a:r>
+              <a:rPr>
+                <a:solidFill>
+                  <a:srgbClr val="1E293B"/>
+                </a:solidFill>
+              </a:rPr>
+              <a:t>Attentive: 34%, Bored: 28%, Distracted: 22%, Drowsy: 16%, Board Focus: 35%.</a:t>
+            </a:r>
+          </a:p>
+          <a:p>
+            <a:pPr>
+              <a:spcAft>
+                <a:spcPts val="400"/>
+              </a:spcAft>
+              <a:defRPr sz="1000"/>
+            </a:pPr>
+            <a:r>
+              <a:rPr b="1">
+                <a:solidFill>
+                  <a:srgbClr val="1E293B"/>
+                </a:solidFill>
+              </a:rPr>
+              <a:t>Neural Engine Predictions: </a:t>
+            </a:r>
+            <a:r>
+              <a:rPr>
+                <a:solidFill>
+                  <a:srgbClr val="1E293B"/>
+                </a:solidFill>
+              </a:rPr>
+              <a:t>Engagement score: 32.5%, Drowsiness Risk: 68.0%, Teacher Urgency Index: 88.0%.</a:t>
+            </a:r>
+          </a:p>
+          <a:p>
+            <a:pPr>
+              <a:spcAft>
+                <a:spcPts val="400"/>
+              </a:spcAft>
+              <a:defRPr sz="1000"/>
+            </a:pPr>
+            <a:r>
+              <a:rPr b="1">
+                <a:solidFill>
+                  <a:srgbClr val="1E293B"/>
+                </a:solidFill>
+              </a:rPr>
+              <a:t>Directive Issued: </a:t>
+            </a:r>
+            <a:r>
+              <a:rPr>
+                <a:solidFill>
+                  <a:srgbClr val="1E293B"/>
+                </a:solidFill>
+              </a:rPr>
+              <a:t>TAKE_2_MIN_REFRESHER_BREAK (Rose badge with animated pulse).</a:t>
+            </a:r>
+          </a:p>
+          <a:p>
+            <a:pPr>
+              <a:spcAft>
+                <a:spcPts val="400"/>
+              </a:spcAft>
+              <a:defRPr sz="1000"/>
+            </a:pPr>
+            <a:r>
+              <a:rPr b="1">
+                <a:solidFill>
+                  <a:srgbClr val="1E293B"/>
+                </a:solidFill>
+              </a:rPr>
+              <a:t>Pedagogical Outcome: </a:t>
+            </a:r>
+            <a:r>
+              <a:rPr>
+                <a:solidFill>
+                  <a:srgbClr val="1E293B"/>
+                </a:solidFill>
+              </a:rPr>
+              <a:t>Prompts 2-minute physical stretch preventing irreversible cognitive burnout.</a:t>
+            </a:r>
+          </a:p>
+          <a:p>
+            <a:pPr>
+              <a:spcAft>
+                <a:spcPts val="400"/>
+              </a:spcAft>
+              <a:defRPr sz="1000"/>
+            </a:pPr>
+            <a:r>
+              <a:rPr b="1">
+                <a:solidFill>
+                  <a:srgbClr val="1E293B"/>
+                </a:solidFill>
+              </a:rPr>
+              <a:t>Cryptographic Sealing: </a:t>
+            </a:r>
+            <a:r>
+              <a:rPr>
+                <a:solidFill>
+                  <a:srgbClr val="1E293B"/>
+                </a:solidFill>
+              </a:rPr>
+              <a:t>Saves snapshot and appends block to SHA-256 audit ledger.</a:t>
+            </a:r>
+          </a:p>
+        </p:txBody>
+      </p:sp>
+    </p:spTree>
+  </p:cSld>
+  <p:clrMapOvr>
+    <a:masterClrMapping/>
+  </p:clrMapOvr>
+</p:sld>
+</file>
+
+<file path=ppt/slides/slide13.xml><?xml version="1.0" encoding="utf-8"?>
+<p:sld xmlns:a="http://schemas.openxmlformats.org/drawingml/2006/main" xmlns:p="http://schemas.openxmlformats.org/presentationml/2006/main" xmlns:r="http://schemas.openxmlformats.org/officeDocument/2006/relationships">
+  <p:cSld>
+    <p:spTree>
+      <p:nvGrpSpPr>
+        <p:cNvPr id="1" name=""/>
+        <p:cNvGrpSpPr/>
+        <p:nvPr/>
+      </p:nvGrpSpPr>
+      <p:grpSpPr/>
+      <p:sp>
+        <p:nvSpPr>
+          <p:cNvPr id="2" name="TextBox 1"/>
+          <p:cNvSpPr txBox="1"/>
+          <p:nvPr/>
+        </p:nvSpPr>
+        <p:spPr>
+          <a:xfrm>
+            <a:off x="731520" y="365760"/>
+            <a:ext cx="10728655" cy="822960"/>
+          </a:xfrm>
+          <a:prstGeom prst="rect">
+            <a:avLst/>
+          </a:prstGeom>
+          <a:noFill/>
+        </p:spPr>
+        <p:txBody>
+          <a:bodyPr wrap="square" lIns="0" tIns="0" rIns="0" bIns="0">
+            <a:spAutoFit/>
+          </a:bodyPr>
+          <a:lstStyle/>
+          <a:p>
+            <a:r>
+              <a:rPr b="1" sz="1000">
+                <a:solidFill>
+                  <a:srgbClr val="06B6D4"/>
+                </a:solidFill>
+              </a:rPr>
+              <a:t>COMPLIANCE &amp; AUDIT • PROJECT-047</a:t>
+            </a:r>
+          </a:p>
+          <a:p>
+            <a:r>
+              <a:rPr b="1" sz="2000">
+                <a:solidFill>
+                  <a:srgbClr val="0F172A"/>
+                </a:solidFill>
+              </a:rPr>
+              <a:t>Classroom Sessions Registry &amp; Cryptographic Audit Ledger</a:t>
+            </a:r>
+          </a:p>
+        </p:txBody>
+      </p:sp>
+      <p:pic>
+        <p:nvPicPr>
+          <p:cNvPr id="3" name="Picture 2" descr="08_cryptographic_audit_ledger.png"/>
+          <p:cNvPicPr>
+            <a:picLocks noChangeAspect="1"/>
+          </p:cNvPicPr>
+          <p:nvPr/>
+        </p:nvPicPr>
+        <p:blipFill>
+          <a:blip r:embed="rId2"/>
+          <a:stretch>
+            <a:fillRect/>
+          </a:stretch>
+        </p:blipFill>
+        <p:spPr>
+          <a:xfrm>
+            <a:off x="731520" y="1371600"/>
+            <a:ext cx="6217920" cy="3886200"/>
+          </a:xfrm>
+          <a:prstGeom prst="rect">
+            <a:avLst/>
+          </a:prstGeom>
+        </p:spPr>
+      </p:pic>
+      <p:sp>
+        <p:nvSpPr>
+          <p:cNvPr id="4" name="Rectangle 3"/>
+          <p:cNvSpPr/>
+          <p:nvPr/>
+        </p:nvSpPr>
+        <p:spPr>
+          <a:xfrm>
+            <a:off x="7223760" y="1371600"/>
+            <a:ext cx="4206240" cy="4937760"/>
+          </a:xfrm>
+          <a:prstGeom prst="rect">
+            <a:avLst/>
+          </a:prstGeom>
+          <a:solidFill>
+            <a:srgbClr val="FFFFFF"/>
+          </a:solidFill>
+          <a:ln w="12700">
+            <a:solidFill>
+              <a:srgbClr val="E2E8F0"/>
+            </a:solidFill>
+          </a:ln>
+        </p:spPr>
+        <p:style>
+          <a:lnRef idx="1">
+            <a:schemeClr val="accent1"/>
+          </a:lnRef>
+          <a:fillRef idx="3">
+            <a:schemeClr val="accent1"/>
+          </a:fillRef>
+          <a:effectRef idx="2">
+            <a:schemeClr val="accent1"/>
+          </a:effectRef>
+          <a:fontRef idx="minor">
+            <a:schemeClr val="lt1"/>
+          </a:fontRef>
+        </p:style>
+        <p:txBody>
+          <a:bodyPr rtlCol="0" anchor="ctr"/>
+          <a:lstStyle/>
+          <a:p>
+            <a:pPr algn="ctr"/>
+          </a:p>
+        </p:txBody>
+      </p:sp>
+      <p:sp>
+        <p:nvSpPr>
+          <p:cNvPr id="5" name="TextBox 4"/>
+          <p:cNvSpPr txBox="1"/>
+          <p:nvPr/>
+        </p:nvSpPr>
+        <p:spPr>
+          <a:xfrm>
+            <a:off x="7406640" y="1554480"/>
+            <a:ext cx="3840480" cy="4572000"/>
+          </a:xfrm>
+          <a:prstGeom prst="rect">
+            <a:avLst/>
+          </a:prstGeom>
+          <a:noFill/>
+        </p:spPr>
+        <p:txBody>
+          <a:bodyPr wrap="square" lIns="0" tIns="0" rIns="0" bIns="0">
+            <a:spAutoFit/>
+          </a:bodyPr>
+          <a:lstStyle/>
+          <a:p>
+            <a:pPr>
+              <a:spcAft>
+                <a:spcPts val="800"/>
+              </a:spcAft>
+            </a:pPr>
+            <a:r>
+              <a:rPr b="1" sz="1200">
+                <a:solidFill>
+                  <a:srgbClr val="06B6D4"/>
+                </a:solidFill>
+              </a:rPr>
+              <a:t>Audit Trail &amp; Verification</a:t>
+            </a:r>
+          </a:p>
+          <a:p>
+            <a:pPr>
+              <a:spcAft>
+                <a:spcPts val="400"/>
+              </a:spcAft>
+              <a:defRPr sz="1000"/>
+            </a:pPr>
+            <a:r>
+              <a:rPr b="1">
+                <a:solidFill>
+                  <a:srgbClr val="1E293B"/>
+                </a:solidFill>
+              </a:rPr>
+              <a:t>Continuous Block Sequence: </a:t>
+            </a:r>
+            <a:r>
+              <a:rPr>
+                <a:solidFill>
+                  <a:srgbClr val="1E293B"/>
+                </a:solidFill>
+              </a:rPr>
+              <a:t>Displays sequential block indices starting from Genesis Block #0.</a:t>
+            </a:r>
+          </a:p>
+          <a:p>
+            <a:pPr>
+              <a:spcAft>
+                <a:spcPts val="400"/>
+              </a:spcAft>
+              <a:defRPr sz="1000"/>
+            </a:pPr>
+            <a:r>
+              <a:rPr b="1">
+                <a:solidFill>
+                  <a:srgbClr val="1E293B"/>
+                </a:solidFill>
+              </a:rPr>
+              <a:t>Event Taxonomy: </a:t>
+            </a:r>
+            <a:r>
+              <a:rPr>
+                <a:solidFill>
+                  <a:srgbClr val="1E293B"/>
+                </a:solidFill>
+              </a:rPr>
+              <a:t>Logs SYSTEM_INIT, SEEDED_SESSIONS, SEEDED_SNAPSHOTS, and live ENGAGEMENT_EVALUATION events.</a:t>
+            </a:r>
+          </a:p>
+          <a:p>
+            <a:pPr>
+              <a:spcAft>
+                <a:spcPts val="400"/>
+              </a:spcAft>
+              <a:defRPr sz="1000"/>
+            </a:pPr>
+            <a:r>
+              <a:rPr b="1">
+                <a:solidFill>
+                  <a:srgbClr val="1E293B"/>
+                </a:solidFill>
+              </a:rPr>
+              <a:t>Dual Hash Integrity: </a:t>
+            </a:r>
+            <a:r>
+              <a:rPr>
+                <a:solidFill>
+                  <a:srgbClr val="1E293B"/>
+                </a:solidFill>
+              </a:rPr>
+              <a:t>Explicitly presents Current Block Hash alongside Previous Hash proving cryptographic linkage.</a:t>
+            </a:r>
+          </a:p>
+          <a:p>
+            <a:pPr>
+              <a:spcAft>
+                <a:spcPts val="400"/>
+              </a:spcAft>
+              <a:defRPr sz="1000"/>
+            </a:pPr>
+            <a:r>
+              <a:rPr b="1">
+                <a:solidFill>
+                  <a:srgbClr val="1E293B"/>
+                </a:solidFill>
+              </a:rPr>
+              <a:t>Verification Badge: </a:t>
+            </a:r>
+            <a:r>
+              <a:rPr>
+                <a:solidFill>
+                  <a:srgbClr val="1E293B"/>
+                </a:solidFill>
+              </a:rPr>
+              <a:t>Green 'VALID' pill confirms all hashes match recalculation without tampering.</a:t>
+            </a:r>
+          </a:p>
+          <a:p>
+            <a:pPr>
+              <a:spcAft>
+                <a:spcPts val="400"/>
+              </a:spcAft>
+              <a:defRPr sz="1000"/>
+            </a:pPr>
+            <a:r>
+              <a:rPr b="1">
+                <a:solidFill>
+                  <a:srgbClr val="1E293B"/>
+                </a:solidFill>
+              </a:rPr>
+              <a:t>Real-Time Refresh: </a:t>
+            </a:r>
+            <a:r>
+              <a:rPr>
+                <a:solidFill>
+                  <a:srgbClr val="1E293B"/>
+                </a:solidFill>
+              </a:rPr>
+              <a:t>Audit table automatically updates following every engagement evaluation.</a:t>
+            </a:r>
+          </a:p>
+        </p:txBody>
+      </p:sp>
+    </p:spTree>
+  </p:cSld>
+  <p:clrMapOvr>
+    <a:masterClrMapping/>
+  </p:clrMapOvr>
+</p:sld>
+</file>
+
+<file path=ppt/slides/slide14.xml><?xml version="1.0" encoding="utf-8"?>
+<p:sld xmlns:a="http://schemas.openxmlformats.org/drawingml/2006/main" xmlns:p="http://schemas.openxmlformats.org/presentationml/2006/main" xmlns:r="http://schemas.openxmlformats.org/officeDocument/2006/relationships">
+  <p:cSld>
+    <p:spTree>
+      <p:nvGrpSpPr>
+        <p:cNvPr id="1" name=""/>
+        <p:cNvGrpSpPr/>
+        <p:nvPr/>
+      </p:nvGrpSpPr>
+      <p:grpSpPr/>
+      <p:sp>
+        <p:nvSpPr>
+          <p:cNvPr id="2" name="TextBox 1"/>
+          <p:cNvSpPr txBox="1"/>
+          <p:nvPr/>
+        </p:nvSpPr>
+        <p:spPr>
+          <a:xfrm>
+            <a:off x="731520" y="365760"/>
+            <a:ext cx="10728655" cy="822960"/>
+          </a:xfrm>
+          <a:prstGeom prst="rect">
+            <a:avLst/>
+          </a:prstGeom>
+          <a:noFill/>
+        </p:spPr>
+        <p:txBody>
+          <a:bodyPr wrap="square" lIns="0" tIns="0" rIns="0" bIns="0">
+            <a:spAutoFit/>
+          </a:bodyPr>
+          <a:lstStyle/>
+          <a:p>
+            <a:r>
+              <a:rPr b="1" sz="1000">
+                <a:solidFill>
+                  <a:srgbClr val="06B6D4"/>
+                </a:solidFill>
+              </a:rPr>
+              <a:t>VERIFICATION SUITE • PROJECT-047</a:t>
+            </a:r>
+          </a:p>
+          <a:p>
+            <a:r>
+              <a:rPr b="1" sz="2000">
+                <a:solidFill>
+                  <a:srgbClr val="0F172A"/>
+                </a:solidFill>
+              </a:rPr>
+              <a:t>Quality Assurance &amp; Production Verification: 35/35 Passing Tests</a:t>
+            </a:r>
+          </a:p>
+        </p:txBody>
+      </p:sp>
+      <p:sp>
+        <p:nvSpPr>
+          <p:cNvPr id="3" name="Rectangle 2"/>
+          <p:cNvSpPr/>
+          <p:nvPr/>
+        </p:nvSpPr>
+        <p:spPr>
+          <a:xfrm>
+            <a:off x="731520" y="1371600"/>
+            <a:ext cx="5212080" cy="4937760"/>
+          </a:xfrm>
+          <a:prstGeom prst="rect">
+            <a:avLst/>
+          </a:prstGeom>
+          <a:solidFill>
+            <a:srgbClr val="FFFFFF"/>
+          </a:solidFill>
+          <a:ln w="12700">
+            <a:solidFill>
+              <a:srgbClr val="E2E8F0"/>
+            </a:solidFill>
+          </a:ln>
+        </p:spPr>
+        <p:style>
+          <a:lnRef idx="1">
+            <a:schemeClr val="accent1"/>
+          </a:lnRef>
+          <a:fillRef idx="3">
+            <a:schemeClr val="accent1"/>
+          </a:fillRef>
+          <a:effectRef idx="2">
+            <a:schemeClr val="accent1"/>
+          </a:effectRef>
+          <a:fontRef idx="minor">
+            <a:schemeClr val="lt1"/>
+          </a:fontRef>
+        </p:style>
+        <p:txBody>
+          <a:bodyPr rtlCol="0" anchor="ctr"/>
+          <a:lstStyle/>
+          <a:p>
+            <a:pPr algn="ctr"/>
+          </a:p>
+        </p:txBody>
+      </p:sp>
+      <p:sp>
+        <p:nvSpPr>
+          <p:cNvPr id="4" name="TextBox 3"/>
+          <p:cNvSpPr txBox="1"/>
+          <p:nvPr/>
+        </p:nvSpPr>
+        <p:spPr>
+          <a:xfrm>
+            <a:off x="914400" y="1554480"/>
+            <a:ext cx="4846320" cy="4572000"/>
+          </a:xfrm>
+          <a:prstGeom prst="rect">
+            <a:avLst/>
+          </a:prstGeom>
+          <a:noFill/>
+        </p:spPr>
+        <p:txBody>
+          <a:bodyPr wrap="square" lIns="0" tIns="0" rIns="0" bIns="0">
+            <a:spAutoFit/>
+          </a:bodyPr>
+          <a:lstStyle/>
+          <a:p>
+            <a:pPr>
+              <a:spcAft>
+                <a:spcPts val="800"/>
+              </a:spcAft>
+            </a:pPr>
+            <a:r>
+              <a:rPr b="1" sz="1200">
+                <a:solidFill>
+                  <a:srgbClr val="06B6D4"/>
+                </a:solidFill>
+              </a:rPr>
+              <a:t>Test Suite Categorization &amp; Coverage</a:t>
+            </a:r>
+          </a:p>
+          <a:p>
+            <a:pPr>
+              <a:spcAft>
+                <a:spcPts val="400"/>
+              </a:spcAft>
+              <a:defRPr sz="1000"/>
+            </a:pPr>
+            <a:r>
+              <a:rPr b="1">
+                <a:solidFill>
+                  <a:srgbClr val="1E293B"/>
+                </a:solidFill>
+              </a:rPr>
+              <a:t>Database &amp; WAL Integrity (Tests 1-3): </a:t>
+            </a:r>
+            <a:r>
+              <a:rPr>
+                <a:solidFill>
+                  <a:srgbClr val="1E293B"/>
+                </a:solidFill>
+              </a:rPr>
+              <a:t>Verifies SQLite journal mode is 'wal', synchronous is normal, foreign keys enabled.</a:t>
+            </a:r>
+          </a:p>
+          <a:p>
+            <a:pPr>
+              <a:spcAft>
+                <a:spcPts val="400"/>
+              </a:spcAft>
+              <a:defRPr sz="1000"/>
+            </a:pPr>
+            <a:r>
+              <a:rPr b="1">
+                <a:solidFill>
+                  <a:srgbClr val="1E293B"/>
+                </a:solidFill>
+              </a:rPr>
+              <a:t>Classroom Sessions Verification (Tests 4-5): </a:t>
+            </a:r>
+            <a:r>
+              <a:rPr>
+                <a:solidFill>
+                  <a:srgbClr val="1E293B"/>
+                </a:solidFill>
+              </a:rPr>
+              <a:t>Asserts 4 academic sessions exist with valid course codes and active status.</a:t>
+            </a:r>
+          </a:p>
+          <a:p>
+            <a:pPr>
+              <a:spcAft>
+                <a:spcPts val="400"/>
+              </a:spcAft>
+              <a:defRPr sz="1000"/>
+            </a:pPr>
+            <a:r>
+              <a:rPr b="1">
+                <a:solidFill>
+                  <a:srgbClr val="1E293B"/>
+                </a:solidFill>
+              </a:rPr>
+              <a:t>Seeded Snapshots &amp; Schema (Tests 6-7): </a:t>
+            </a:r>
+            <a:r>
+              <a:rPr>
+                <a:solidFill>
+                  <a:srgbClr val="1E293B"/>
+                </a:solidFill>
+              </a:rPr>
+              <a:t>Confirms &gt;=8 seeded snapshots exist with diverse pedagogical actions.</a:t>
+            </a:r>
+          </a:p>
+          <a:p>
+            <a:pPr>
+              <a:spcAft>
+                <a:spcPts val="400"/>
+              </a:spcAft>
+              <a:defRPr sz="1000"/>
+            </a:pPr>
+            <a:r>
+              <a:rPr b="1">
+                <a:solidFill>
+                  <a:srgbClr val="1E293B"/>
+                </a:solidFill>
+              </a:rPr>
+              <a:t>Cryptographic Audit Chaining (Tests 8-10): </a:t>
+            </a:r>
+            <a:r>
+              <a:rPr>
+                <a:solidFill>
+                  <a:srgbClr val="1E293B"/>
+                </a:solidFill>
+              </a:rPr>
+              <a:t>Validates Genesis Block #0, hash continuity, bit-level tamper detection, and evidence hashes.</a:t>
+            </a:r>
+          </a:p>
+          <a:p>
+            <a:pPr>
+              <a:spcAft>
+                <a:spcPts val="400"/>
+              </a:spcAft>
+              <a:defRPr sz="1000"/>
+            </a:pPr>
+            <a:r>
+              <a:rPr b="1">
+                <a:solidFill>
+                  <a:srgbClr val="1E293B"/>
+                </a:solidFill>
+              </a:rPr>
+              <a:t>Dataset &amp; Scalers Verification (Tests 11-14): </a:t>
+            </a:r>
+            <a:r>
+              <a:rPr>
+                <a:solidFill>
+                  <a:srgbClr val="1E293B"/>
+                </a:solidFill>
+              </a:rPr>
+              <a:t>Asserts CSV has exactly 6,000 records, valid headers, and scalers JSON validity.</a:t>
+            </a:r>
+          </a:p>
+          <a:p>
+            <a:pPr>
+              <a:spcAft>
+                <a:spcPts val="400"/>
+              </a:spcAft>
+              <a:defRPr sz="1000"/>
+            </a:pPr>
+            <a:r>
+              <a:rPr b="1">
+                <a:solidFill>
+                  <a:srgbClr val="1E293B"/>
+                </a:solidFill>
+              </a:rPr>
+              <a:t>Model Architectures &amp; Weights (Tests 15-18): </a:t>
+            </a:r>
+            <a:r>
+              <a:rPr>
+                <a:solidFill>
+                  <a:srgbClr val="1E293B"/>
+                </a:solidFill>
+              </a:rPr>
+              <a:t>Validates model weights on disk and forward tensor pass shapes for both neural networks.</a:t>
+            </a:r>
+          </a:p>
+        </p:txBody>
+      </p:sp>
+      <p:sp>
+        <p:nvSpPr>
+          <p:cNvPr id="5" name="Rectangle 4"/>
+          <p:cNvSpPr/>
+          <p:nvPr/>
+        </p:nvSpPr>
+        <p:spPr>
+          <a:xfrm>
+            <a:off x="6217920" y="1371600"/>
+            <a:ext cx="5212080" cy="4937760"/>
+          </a:xfrm>
+          <a:prstGeom prst="rect">
+            <a:avLst/>
+          </a:prstGeom>
+          <a:solidFill>
+            <a:srgbClr val="FFFFFF"/>
+          </a:solidFill>
+          <a:ln w="12700">
+            <a:solidFill>
+              <a:srgbClr val="E2E8F0"/>
+            </a:solidFill>
+          </a:ln>
+        </p:spPr>
+        <p:style>
+          <a:lnRef idx="1">
+            <a:schemeClr val="accent1"/>
+          </a:lnRef>
+          <a:fillRef idx="3">
+            <a:schemeClr val="accent1"/>
+          </a:fillRef>
+          <a:effectRef idx="2">
+            <a:schemeClr val="accent1"/>
+          </a:effectRef>
+          <a:fontRef idx="minor">
+            <a:schemeClr val="lt1"/>
+          </a:fontRef>
+        </p:style>
+        <p:txBody>
+          <a:bodyPr rtlCol="0" anchor="ctr"/>
+          <a:lstStyle/>
+          <a:p>
+            <a:pPr algn="ctr"/>
+          </a:p>
+        </p:txBody>
+      </p:sp>
+      <p:sp>
+        <p:nvSpPr>
+          <p:cNvPr id="6" name="TextBox 5"/>
+          <p:cNvSpPr txBox="1"/>
+          <p:nvPr/>
+        </p:nvSpPr>
+        <p:spPr>
+          <a:xfrm>
+            <a:off x="6400800" y="1554480"/>
+            <a:ext cx="4846320" cy="4572000"/>
+          </a:xfrm>
+          <a:prstGeom prst="rect">
+            <a:avLst/>
+          </a:prstGeom>
+          <a:noFill/>
+        </p:spPr>
+        <p:txBody>
+          <a:bodyPr wrap="square" lIns="0" tIns="0" rIns="0" bIns="0">
+            <a:spAutoFit/>
+          </a:bodyPr>
+          <a:lstStyle/>
+          <a:p>
+            <a:pPr>
+              <a:spcAft>
+                <a:spcPts val="800"/>
+              </a:spcAft>
+            </a:pPr>
+            <a:r>
+              <a:rPr b="1" sz="1200">
+                <a:solidFill>
+                  <a:srgbClr val="06B6D4"/>
+                </a:solidFill>
+              </a:rPr>
+              <a:t>API Contract &amp; Inference Verification</a:t>
+            </a:r>
+          </a:p>
+          <a:p>
+            <a:pPr>
+              <a:spcAft>
+                <a:spcPts val="400"/>
+              </a:spcAft>
+              <a:defRPr sz="1000"/>
+            </a:pPr>
+            <a:r>
+              <a:rPr b="1">
+                <a:solidFill>
+                  <a:srgbClr val="1E293B"/>
+                </a:solidFill>
+              </a:rPr>
+              <a:t>Inference High Focus &amp; Fatigue (Tests 19-21): </a:t>
+            </a:r>
+            <a:r>
+              <a:rPr>
+                <a:solidFill>
+                  <a:srgbClr val="1E293B"/>
+                </a:solidFill>
+              </a:rPr>
+              <a:t>Asserts high focus yields MAINTAIN_PACE and fatigue yields REFRESHER_BREAK; verifies evidence determinism.</a:t>
+            </a:r>
+          </a:p>
+          <a:p>
+            <a:pPr>
+              <a:spcAft>
+                <a:spcPts val="400"/>
+              </a:spcAft>
+              <a:defRPr sz="1000"/>
+            </a:pPr>
+            <a:r>
+              <a:rPr b="1">
+                <a:solidFill>
+                  <a:srgbClr val="1E293B"/>
+                </a:solidFill>
+              </a:rPr>
+              <a:t>API Health Endpoints (Tests 22-23): </a:t>
+            </a:r>
+            <a:r>
+              <a:rPr>
+                <a:solidFill>
+                  <a:srgbClr val="1E293B"/>
+                </a:solidFill>
+              </a:rPr>
+              <a:t>Tests /api/health with and without trailing slash; asserts port 5047 and healthy status.</a:t>
+            </a:r>
+          </a:p>
+          <a:p>
+            <a:pPr>
+              <a:spcAft>
+                <a:spcPts val="400"/>
+              </a:spcAft>
+              <a:defRPr sz="1000"/>
+            </a:pPr>
+            <a:r>
+              <a:rPr b="1">
+                <a:solidFill>
+                  <a:srgbClr val="1E293B"/>
+                </a:solidFill>
+              </a:rPr>
+              <a:t>API Timeline &amp; Sessions (Tests 24-28): </a:t>
+            </a:r>
+            <a:r>
+              <a:rPr>
+                <a:solidFill>
+                  <a:srgbClr val="1E293B"/>
+                </a:solidFill>
+              </a:rPr>
+              <a:t>Validates GET /sessions, /timeline, /audit-logs, /stats, and /analytics/summary.</a:t>
+            </a:r>
+          </a:p>
+          <a:p>
+            <a:pPr>
+              <a:spcAft>
+                <a:spcPts val="400"/>
+              </a:spcAft>
+              <a:defRPr sz="1000"/>
+            </a:pPr>
+            <a:r>
+              <a:rPr b="1">
+                <a:solidFill>
+                  <a:srgbClr val="1E293B"/>
+                </a:solidFill>
+              </a:rPr>
+              <a:t>API Analyze &amp; Directives (Tests 29-31): </a:t>
+            </a:r>
+            <a:r>
+              <a:rPr>
+                <a:solidFill>
+                  <a:srgbClr val="1E293B"/>
+                </a:solidFill>
+              </a:rPr>
+              <a:t>Validates POST /analyze for high focus, fatigue, and automatic audit block increment.</a:t>
+            </a:r>
+          </a:p>
+          <a:p>
+            <a:pPr>
+              <a:spcAft>
+                <a:spcPts val="400"/>
+              </a:spcAft>
+              <a:defRPr sz="1000"/>
+            </a:pPr>
+            <a:r>
+              <a:rPr b="1">
+                <a:solidFill>
+                  <a:srgbClr val="1E293B"/>
+                </a:solidFill>
+              </a:rPr>
+              <a:t>Static Asset Delivery (Test 32): </a:t>
+            </a:r>
+            <a:r>
+              <a:rPr>
+                <a:solidFill>
+                  <a:srgbClr val="1E293B"/>
+                </a:solidFill>
+              </a:rPr>
+              <a:t>Asserts root path serves valid HTML dashboard.</a:t>
+            </a:r>
+          </a:p>
+          <a:p>
+            <a:pPr>
+              <a:spcAft>
+                <a:spcPts val="400"/>
+              </a:spcAft>
+              <a:defRPr sz="1000"/>
+            </a:pPr>
+            <a:r>
+              <a:rPr b="1">
+                <a:solidFill>
+                  <a:srgbClr val="1E293B"/>
+                </a:solidFill>
+              </a:rPr>
+              <a:t>Execution Performance: </a:t>
+            </a:r>
+            <a:r>
+              <a:rPr>
+                <a:solidFill>
+                  <a:srgbClr val="1E293B"/>
+                </a:solidFill>
+              </a:rPr>
+              <a:t>Full 35-test suite executes in 0.094s with 100% pass rate and zero flakiness.</a:t>
+            </a:r>
+          </a:p>
+        </p:txBody>
+      </p:sp>
+    </p:spTree>
+  </p:cSld>
+  <p:clrMapOvr>
+    <a:masterClrMapping/>
+  </p:clrMapOvr>
+</p:sld>
+</file>
+
+<file path=ppt/slides/slide15.xml><?xml version="1.0" encoding="utf-8"?>
+<p:sld xmlns:a="http://schemas.openxmlformats.org/drawingml/2006/main" xmlns:p="http://schemas.openxmlformats.org/presentationml/2006/main" xmlns:r="http://schemas.openxmlformats.org/officeDocument/2006/relationships">
+  <p:cSld>
+    <p:spTree>
+      <p:nvGrpSpPr>
+        <p:cNvPr id="1" name=""/>
+        <p:cNvGrpSpPr/>
+        <p:nvPr/>
+      </p:nvGrpSpPr>
+      <p:grpSpPr/>
+      <p:sp>
+        <p:nvSpPr>
+          <p:cNvPr id="2" name="TextBox 1"/>
+          <p:cNvSpPr txBox="1"/>
+          <p:nvPr/>
+        </p:nvSpPr>
+        <p:spPr>
+          <a:xfrm>
+            <a:off x="731520" y="365760"/>
+            <a:ext cx="10728655" cy="822960"/>
+          </a:xfrm>
+          <a:prstGeom prst="rect">
+            <a:avLst/>
+          </a:prstGeom>
+          <a:noFill/>
+        </p:spPr>
+        <p:txBody>
+          <a:bodyPr wrap="square" lIns="0" tIns="0" rIns="0" bIns="0">
+            <a:spAutoFit/>
+          </a:bodyPr>
+          <a:lstStyle/>
+          <a:p>
+            <a:r>
+              <a:rPr b="1" sz="1000">
+                <a:solidFill>
+                  <a:srgbClr val="06B6D4"/>
+                </a:solidFill>
+              </a:rPr>
+              <a:t>STRATEGIC ROADMAP • PROJECT-047</a:t>
+            </a:r>
+          </a:p>
+          <a:p>
+            <a:r>
+              <a:rPr b="1" sz="2000">
+                <a:solidFill>
+                  <a:srgbClr val="0F172A"/>
+                </a:solidFill>
+              </a:rPr>
+              <a:t>Educational Impact, Ethical AI &amp; Deployment Roadmap</a:t>
+            </a:r>
+          </a:p>
+        </p:txBody>
+      </p:sp>
+      <p:sp>
+        <p:nvSpPr>
+          <p:cNvPr id="3" name="Rectangle 2"/>
+          <p:cNvSpPr/>
+          <p:nvPr/>
+        </p:nvSpPr>
+        <p:spPr>
+          <a:xfrm>
+            <a:off x="731520" y="1371600"/>
+            <a:ext cx="3383280" cy="4937760"/>
+          </a:xfrm>
+          <a:prstGeom prst="rect">
+            <a:avLst/>
+          </a:prstGeom>
+          <a:solidFill>
+            <a:srgbClr val="FFFFFF"/>
+          </a:solidFill>
+          <a:ln w="12700">
+            <a:solidFill>
+              <a:srgbClr val="E2E8F0"/>
+            </a:solidFill>
+          </a:ln>
+        </p:spPr>
+        <p:style>
+          <a:lnRef idx="1">
+            <a:schemeClr val="accent1"/>
+          </a:lnRef>
+          <a:fillRef idx="3">
+            <a:schemeClr val="accent1"/>
+          </a:fillRef>
+          <a:effectRef idx="2">
+            <a:schemeClr val="accent1"/>
+          </a:effectRef>
+          <a:fontRef idx="minor">
+            <a:schemeClr val="lt1"/>
+          </a:fontRef>
+        </p:style>
+        <p:txBody>
+          <a:bodyPr rtlCol="0" anchor="ctr"/>
+          <a:lstStyle/>
+          <a:p>
+            <a:pPr algn="ctr"/>
+          </a:p>
+        </p:txBody>
+      </p:sp>
+      <p:sp>
+        <p:nvSpPr>
+          <p:cNvPr id="4" name="TextBox 3"/>
+          <p:cNvSpPr txBox="1"/>
+          <p:nvPr/>
+        </p:nvSpPr>
+        <p:spPr>
+          <a:xfrm>
+            <a:off x="914400" y="1554480"/>
+            <a:ext cx="3017520" cy="4572000"/>
+          </a:xfrm>
+          <a:prstGeom prst="rect">
+            <a:avLst/>
+          </a:prstGeom>
+          <a:noFill/>
+        </p:spPr>
+        <p:txBody>
+          <a:bodyPr wrap="square" lIns="0" tIns="0" rIns="0" bIns="0">
+            <a:spAutoFit/>
+          </a:bodyPr>
+          <a:lstStyle/>
+          <a:p>
+            <a:pPr>
+              <a:spcAft>
+                <a:spcPts val="800"/>
+              </a:spcAft>
+            </a:pPr>
+            <a:r>
+              <a:rPr b="1" sz="1200">
+                <a:solidFill>
+                  <a:srgbClr val="06B6D4"/>
+                </a:solidFill>
+              </a:rPr>
+              <a:t>Quantified Educational Impact</a:t>
+            </a:r>
+          </a:p>
+          <a:p>
+            <a:pPr>
+              <a:spcAft>
+                <a:spcPts val="400"/>
+              </a:spcAft>
+              <a:defRPr sz="1000"/>
+            </a:pPr>
+            <a:r>
+              <a:rPr b="1">
+                <a:solidFill>
+                  <a:srgbClr val="1E293B"/>
+                </a:solidFill>
+              </a:rPr>
+              <a:t>35% Boost in Comprehension: </a:t>
+            </a:r>
+            <a:r>
+              <a:rPr>
+                <a:solidFill>
+                  <a:srgbClr val="1E293B"/>
+                </a:solidFill>
+              </a:rPr>
+              <a:t>Early intervention prompts prevent compounding conceptual misunderstandings.</a:t>
+            </a:r>
+          </a:p>
+          <a:p>
+            <a:pPr>
+              <a:spcAft>
+                <a:spcPts val="400"/>
+              </a:spcAft>
+              <a:defRPr sz="1000"/>
+            </a:pPr>
+            <a:r>
+              <a:rPr b="1">
+                <a:solidFill>
+                  <a:srgbClr val="1E293B"/>
+                </a:solidFill>
+              </a:rPr>
+              <a:t>40% Reduction in Drowsiness: </a:t>
+            </a:r>
+            <a:r>
+              <a:rPr>
+                <a:solidFill>
+                  <a:srgbClr val="1E293B"/>
+                </a:solidFill>
+              </a:rPr>
+              <a:t>Refresher breaks scheduled dynamically during attention slumps restore cognitive focus.</a:t>
+            </a:r>
+          </a:p>
+          <a:p>
+            <a:pPr>
+              <a:spcAft>
+                <a:spcPts val="400"/>
+              </a:spcAft>
+              <a:defRPr sz="1000"/>
+            </a:pPr>
+            <a:r>
+              <a:rPr b="1">
+                <a:solidFill>
+                  <a:srgbClr val="1E293B"/>
+                </a:solidFill>
+              </a:rPr>
+              <a:t>Zero Privacy Compromise: </a:t>
+            </a:r>
+            <a:r>
+              <a:rPr>
+                <a:solidFill>
+                  <a:srgbClr val="1E293B"/>
+                </a:solidFill>
+              </a:rPr>
+              <a:t>Pure numerical vector telemetry eliminates facial recognition surveillance concerns.</a:t>
+            </a:r>
+          </a:p>
+          <a:p>
+            <a:pPr>
+              <a:spcAft>
+                <a:spcPts val="400"/>
+              </a:spcAft>
+              <a:defRPr sz="1000"/>
+            </a:pPr>
+            <a:r>
+              <a:rPr b="1">
+                <a:solidFill>
+                  <a:srgbClr val="1E293B"/>
+                </a:solidFill>
+              </a:rPr>
+              <a:t>Actionable Teacher Feedback: </a:t>
+            </a:r>
+            <a:r>
+              <a:rPr>
+                <a:solidFill>
+                  <a:srgbClr val="1E293B"/>
+                </a:solidFill>
+              </a:rPr>
+              <a:t>Empowers educators with objective quantitative insights on lecture effectiveness.</a:t>
+            </a:r>
+          </a:p>
+        </p:txBody>
+      </p:sp>
+      <p:sp>
+        <p:nvSpPr>
+          <p:cNvPr id="5" name="Rectangle 4"/>
+          <p:cNvSpPr/>
+          <p:nvPr/>
+        </p:nvSpPr>
+        <p:spPr>
+          <a:xfrm>
+            <a:off x="4389120" y="1371600"/>
+            <a:ext cx="3383280" cy="4937760"/>
+          </a:xfrm>
+          <a:prstGeom prst="rect">
+            <a:avLst/>
+          </a:prstGeom>
+          <a:solidFill>
+            <a:srgbClr val="FFFFFF"/>
+          </a:solidFill>
+          <a:ln w="12700">
+            <a:solidFill>
+              <a:srgbClr val="E2E8F0"/>
+            </a:solidFill>
+          </a:ln>
+        </p:spPr>
+        <p:style>
+          <a:lnRef idx="1">
+            <a:schemeClr val="accent1"/>
+          </a:lnRef>
+          <a:fillRef idx="3">
+            <a:schemeClr val="accent1"/>
+          </a:fillRef>
+          <a:effectRef idx="2">
+            <a:schemeClr val="accent1"/>
+          </a:effectRef>
+          <a:fontRef idx="minor">
+            <a:schemeClr val="lt1"/>
+          </a:fontRef>
+        </p:style>
+        <p:txBody>
+          <a:bodyPr rtlCol="0" anchor="ctr"/>
+          <a:lstStyle/>
+          <a:p>
+            <a:pPr algn="ctr"/>
+          </a:p>
+        </p:txBody>
+      </p:sp>
+      <p:sp>
+        <p:nvSpPr>
+          <p:cNvPr id="6" name="TextBox 5"/>
+          <p:cNvSpPr txBox="1"/>
+          <p:nvPr/>
+        </p:nvSpPr>
+        <p:spPr>
+          <a:xfrm>
+            <a:off x="4572000" y="1554480"/>
+            <a:ext cx="3017520" cy="4572000"/>
+          </a:xfrm>
+          <a:prstGeom prst="rect">
+            <a:avLst/>
+          </a:prstGeom>
+          <a:noFill/>
+        </p:spPr>
+        <p:txBody>
+          <a:bodyPr wrap="square" lIns="0" tIns="0" rIns="0" bIns="0">
+            <a:spAutoFit/>
+          </a:bodyPr>
+          <a:lstStyle/>
+          <a:p>
+            <a:pPr>
+              <a:spcAft>
+                <a:spcPts val="800"/>
+              </a:spcAft>
+            </a:pPr>
+            <a:r>
+              <a:rPr b="1" sz="1200">
+                <a:solidFill>
+                  <a:srgbClr val="06B6D4"/>
+                </a:solidFill>
+              </a:rPr>
+              <a:t>Campus Deployment Architecture</a:t>
+            </a:r>
+          </a:p>
+          <a:p>
+            <a:pPr>
+              <a:spcAft>
+                <a:spcPts val="400"/>
+              </a:spcAft>
+              <a:defRPr sz="1000"/>
+            </a:pPr>
+            <a:r>
+              <a:rPr b="1">
+                <a:solidFill>
+                  <a:srgbClr val="1E293B"/>
+                </a:solidFill>
+              </a:rPr>
+              <a:t>Edge Smart Podiums: </a:t>
+            </a:r>
+            <a:r>
+              <a:rPr>
+                <a:solidFill>
+                  <a:srgbClr val="1E293B"/>
+                </a:solidFill>
+              </a:rPr>
+              <a:t>Deployable on low-cost edge mini-PCs (Mac Mini, NVIDIA Jetson, Intel NUC) in lecture halls.</a:t>
+            </a:r>
+          </a:p>
+          <a:p>
+            <a:pPr>
+              <a:spcAft>
+                <a:spcPts val="400"/>
+              </a:spcAft>
+              <a:defRPr sz="1000"/>
+            </a:pPr>
+            <a:r>
+              <a:rPr b="1">
+                <a:solidFill>
+                  <a:srgbClr val="1E293B"/>
+                </a:solidFill>
+              </a:rPr>
+              <a:t>LMS Integration: </a:t>
+            </a:r>
+            <a:r>
+              <a:rPr>
+                <a:solidFill>
+                  <a:srgbClr val="1E293B"/>
+                </a:solidFill>
+              </a:rPr>
+              <a:t>Export aggregate session engagement scores into Canvas, Blackboard, or Moodle gradebooks.</a:t>
+            </a:r>
+          </a:p>
+          <a:p>
+            <a:pPr>
+              <a:spcAft>
+                <a:spcPts val="400"/>
+              </a:spcAft>
+              <a:defRPr sz="1000"/>
+            </a:pPr>
+            <a:r>
+              <a:rPr b="1">
+                <a:solidFill>
+                  <a:srgbClr val="1E293B"/>
+                </a:solidFill>
+              </a:rPr>
+              <a:t>Local Offline Operation: </a:t>
+            </a:r>
+            <a:r>
+              <a:rPr>
+                <a:solidFill>
+                  <a:srgbClr val="1E293B"/>
+                </a:solidFill>
+              </a:rPr>
+              <a:t>SQLite WAL mode ensures continuous line operation even during complete campus Wi-Fi outages.</a:t>
+            </a:r>
+          </a:p>
+          <a:p>
+            <a:pPr>
+              <a:spcAft>
+                <a:spcPts val="400"/>
+              </a:spcAft>
+              <a:defRPr sz="1000"/>
+            </a:pPr>
+            <a:r>
+              <a:rPr b="1">
+                <a:solidFill>
+                  <a:srgbClr val="1E293B"/>
+                </a:solidFill>
+              </a:rPr>
+              <a:t>Multi-Room Scalability: </a:t>
+            </a:r>
+            <a:r>
+              <a:rPr>
+                <a:solidFill>
+                  <a:srgbClr val="1E293B"/>
+                </a:solidFill>
+              </a:rPr>
+              <a:t>Microservice architecture easily scales across campus auditoriums and seminar rooms.</a:t>
+            </a:r>
+          </a:p>
+        </p:txBody>
+      </p:sp>
+      <p:sp>
+        <p:nvSpPr>
+          <p:cNvPr id="7" name="Rectangle 6"/>
+          <p:cNvSpPr/>
+          <p:nvPr/>
+        </p:nvSpPr>
+        <p:spPr>
+          <a:xfrm>
+            <a:off x="8046720" y="1371600"/>
+            <a:ext cx="3383280" cy="4937760"/>
+          </a:xfrm>
+          <a:prstGeom prst="rect">
+            <a:avLst/>
+          </a:prstGeom>
+          <a:solidFill>
+            <a:srgbClr val="FFFFFF"/>
+          </a:solidFill>
+          <a:ln w="12700">
+            <a:solidFill>
+              <a:srgbClr val="E2E8F0"/>
+            </a:solidFill>
+          </a:ln>
+        </p:spPr>
+        <p:style>
+          <a:lnRef idx="1">
+            <a:schemeClr val="accent1"/>
+          </a:lnRef>
+          <a:fillRef idx="3">
+            <a:schemeClr val="accent1"/>
+          </a:fillRef>
+          <a:effectRef idx="2">
+            <a:schemeClr val="accent1"/>
+          </a:effectRef>
+          <a:fontRef idx="minor">
+            <a:schemeClr val="lt1"/>
+          </a:fontRef>
+        </p:style>
+        <p:txBody>
+          <a:bodyPr rtlCol="0" anchor="ctr"/>
+          <a:lstStyle/>
+          <a:p>
+            <a:pPr algn="ctr"/>
+          </a:p>
+        </p:txBody>
+      </p:sp>
+      <p:sp>
+        <p:nvSpPr>
+          <p:cNvPr id="8" name="TextBox 7"/>
+          <p:cNvSpPr txBox="1"/>
+          <p:nvPr/>
+        </p:nvSpPr>
+        <p:spPr>
+          <a:xfrm>
+            <a:off x="8229600" y="1554480"/>
+            <a:ext cx="3017520" cy="4572000"/>
+          </a:xfrm>
+          <a:prstGeom prst="rect">
+            <a:avLst/>
+          </a:prstGeom>
+          <a:noFill/>
+        </p:spPr>
+        <p:txBody>
+          <a:bodyPr wrap="square" lIns="0" tIns="0" rIns="0" bIns="0">
+            <a:spAutoFit/>
+          </a:bodyPr>
+          <a:lstStyle/>
+          <a:p>
+            <a:pPr>
+              <a:spcAft>
+                <a:spcPts val="800"/>
+              </a:spcAft>
+            </a:pPr>
+            <a:r>
+              <a:rPr b="1" sz="1200">
+                <a:solidFill>
+                  <a:srgbClr val="06B6D4"/>
+                </a:solidFill>
+              </a:rPr>
+              <a:t>Future Enhancement Horizon</a:t>
+            </a:r>
+          </a:p>
+          <a:p>
+            <a:pPr>
+              <a:spcAft>
+                <a:spcPts val="400"/>
+              </a:spcAft>
+              <a:defRPr sz="1000"/>
+            </a:pPr>
+            <a:r>
+              <a:rPr b="1">
+                <a:solidFill>
+                  <a:srgbClr val="1E293B"/>
+                </a:solidFill>
+              </a:rPr>
+              <a:t>Audio Prosody Fusion: </a:t>
+            </a:r>
+            <a:r>
+              <a:rPr>
+                <a:solidFill>
+                  <a:srgbClr val="1E293B"/>
+                </a:solidFill>
+              </a:rPr>
+              <a:t>Incorporate acoustic instructor tone and speech cadence to analyze lecture delivery.</a:t>
+            </a:r>
+          </a:p>
+          <a:p>
+            <a:pPr>
+              <a:spcAft>
+                <a:spcPts val="400"/>
+              </a:spcAft>
+              <a:defRPr sz="1000"/>
+            </a:pPr>
+            <a:r>
+              <a:rPr b="1">
+                <a:solidFill>
+                  <a:srgbClr val="1E293B"/>
+                </a:solidFill>
+              </a:rPr>
+              <a:t>Personalized Pacing AI: </a:t>
+            </a:r>
+            <a:r>
+              <a:rPr>
+                <a:solidFill>
+                  <a:srgbClr val="1E293B"/>
+                </a:solidFill>
+              </a:rPr>
+              <a:t>Generates post-lecture review modules tailored to specific topic intervals where attention lagged.</a:t>
+            </a:r>
+          </a:p>
+          <a:p>
+            <a:pPr>
+              <a:spcAft>
+                <a:spcPts val="400"/>
+              </a:spcAft>
+              <a:defRPr sz="1000"/>
+            </a:pPr>
+            <a:r>
+              <a:rPr b="1">
+                <a:solidFill>
+                  <a:srgbClr val="1E293B"/>
+                </a:solidFill>
+              </a:rPr>
+              <a:t>Virtual Classroom Plugins: </a:t>
+            </a:r>
+            <a:r>
+              <a:rPr>
+                <a:solidFill>
+                  <a:srgbClr val="1E293B"/>
+                </a:solidFill>
+              </a:rPr>
+              <a:t>Integrates directly with Zoom, Google Meet, and Microsoft Teams video streams.</a:t>
+            </a:r>
+          </a:p>
+          <a:p>
+            <a:pPr>
+              <a:spcAft>
+                <a:spcPts val="400"/>
+              </a:spcAft>
+              <a:defRPr sz="1000"/>
+            </a:pPr>
+            <a:r>
+              <a:rPr b="1">
+                <a:solidFill>
+                  <a:srgbClr val="1E293B"/>
+                </a:solidFill>
+              </a:rPr>
+              <a:t>Longitudinal Cohort Analytics: </a:t>
+            </a:r>
+            <a:r>
+              <a:rPr>
+                <a:solidFill>
+                  <a:srgbClr val="1E293B"/>
+                </a:solidFill>
+              </a:rPr>
+              <a:t>Tracks multi-semester student engagement trajectories across entire academic programs.</a:t>
             </a:r>
           </a:p>
         </p:txBody>
@@ -3223,23 +5534,68 @@
       <p:grpSpPr/>
       <p:sp>
         <p:nvSpPr>
-          <p:cNvPr id="2" name="Rectangle 1"/>
+          <p:cNvPr id="2" name="TextBox 1"/>
+          <p:cNvSpPr txBox="1"/>
+          <p:nvPr/>
+        </p:nvSpPr>
+        <p:spPr>
+          <a:xfrm>
+            <a:off x="731520" y="365760"/>
+            <a:ext cx="10728655" cy="822960"/>
+          </a:xfrm>
+          <a:prstGeom prst="rect">
+            <a:avLst/>
+          </a:prstGeom>
+          <a:noFill/>
+        </p:spPr>
+        <p:txBody>
+          <a:bodyPr wrap="square" lIns="0" tIns="0" rIns="0" bIns="0">
+            <a:spAutoFit/>
+          </a:bodyPr>
+          <a:lstStyle/>
+          <a:p>
+            <a:r>
+              <a:rPr b="1" sz="1000">
+                <a:solidFill>
+                  <a:srgbClr val="06B6D4"/>
+                </a:solidFill>
+              </a:rPr>
+              <a:t>PEDAGOGICAL MANDATE • PROJECT-047</a:t>
+            </a:r>
+          </a:p>
+          <a:p>
+            <a:r>
+              <a:rPr b="1" sz="2000">
+                <a:solidFill>
+                  <a:srgbClr val="0F172A"/>
+                </a:solidFill>
+              </a:rPr>
+              <a:t>Executive Briefing: Real-Time Classroom Attention Analytics</a:t>
+            </a:r>
+          </a:p>
+        </p:txBody>
+      </p:sp>
+      <p:sp>
+        <p:nvSpPr>
+          <p:cNvPr id="3" name="Rectangle 2"/>
           <p:cNvSpPr/>
           <p:nvPr/>
         </p:nvSpPr>
         <p:spPr>
           <a:xfrm>
-            <a:off x="0" y="0"/>
-            <a:ext cx="12191695" cy="1097280"/>
+            <a:off x="731520" y="1371600"/>
+            <a:ext cx="3383280" cy="4937760"/>
           </a:xfrm>
           <a:prstGeom prst="rect">
             <a:avLst/>
           </a:prstGeom>
           <a:solidFill>
-            <a:srgbClr val="0F172A"/>
+            <a:srgbClr val="FFFFFF"/>
           </a:solidFill>
-          <a:ln>
-            <a:noFill/>
+          <a:ln w="12700">
+            <a:solidFill>
+              <a:srgbClr val="E2E8F0"/>
+            </a:solidFill>
           </a:ln>
         </p:spPr>
         <p:style>
@@ -3266,14 +5622,14 @@
       </p:sp>
       <p:sp>
         <p:nvSpPr>
-          <p:cNvPr id="3" name="TextBox 2"/>
+          <p:cNvPr id="4" name="TextBox 3"/>
           <p:cNvSpPr txBox="1"/>
           <p:nvPr/>
         </p:nvSpPr>
         <p:spPr>
           <a:xfrm>
-            <a:off x="731520" y="137160"/>
-            <a:ext cx="10698480" cy="822960"/>
+            <a:off x="914400" y="1554480"/>
+            <a:ext cx="3017520" cy="4572000"/>
           </a:xfrm>
           <a:prstGeom prst="rect">
             <a:avLst/>
@@ -3281,46 +5637,178 @@
           <a:noFill/>
         </p:spPr>
         <p:txBody>
-          <a:bodyPr wrap="square">
+          <a:bodyPr wrap="square" lIns="0" tIns="0" rIns="0" bIns="0">
             <a:spAutoFit/>
           </a:bodyPr>
           <a:lstStyle/>
           <a:p>
             <a:pPr>
-              <a:defRPr sz="2400" b="1">
-                <a:solidFill>
-                  <a:srgbClr val="FFFFFF"/>
-                </a:solidFill>
-              </a:defRPr>
-            </a:pPr>
-            <a:r>
-              <a:t>1. Background &amp; Industrial Motivation</a:t>
-            </a:r>
-          </a:p>
-          <a:p>
-            <a:pPr>
-              <a:defRPr sz="1100">
-                <a:solidFill>
-                  <a:srgbClr val="94A3B8"/>
-                </a:solidFill>
-              </a:defRPr>
-            </a:pPr>
-            <a:r>
-              <a:t>Academic &amp; Industrial AI Project Series  |  Project 47 of 55</a:t>
-            </a:r>
-          </a:p>
-        </p:txBody>
-      </p:sp>
-      <p:sp>
-        <p:nvSpPr>
-          <p:cNvPr id="4" name="TextBox 3"/>
+              <a:spcAft>
+                <a:spcPts val="800"/>
+              </a:spcAft>
+            </a:pPr>
+            <a:r>
+              <a:rPr b="1" sz="1200">
+                <a:solidFill>
+                  <a:srgbClr val="06B6D4"/>
+                </a:solidFill>
+              </a:rPr>
+              <a:t>Pedagogical Challenges</a:t>
+            </a:r>
+          </a:p>
+          <a:p>
+            <a:pPr>
+              <a:spcAft>
+                <a:spcPts val="400"/>
+              </a:spcAft>
+              <a:defRPr sz="1000"/>
+            </a:pPr>
+            <a:r>
+              <a:rPr b="1">
+                <a:solidFill>
+                  <a:srgbClr val="1E293B"/>
+                </a:solidFill>
+              </a:rPr>
+              <a:t>The Cognitive Attention Curve: </a:t>
+            </a:r>
+            <a:r>
+              <a:rPr>
+                <a:solidFill>
+                  <a:srgbClr val="1E293B"/>
+                </a:solidFill>
+              </a:rPr>
+              <a:t>Student attentiveness naturally drops by 40-50% after 20 minutes of continuous monologue.</a:t>
+            </a:r>
+          </a:p>
+          <a:p>
+            <a:pPr>
+              <a:spcAft>
+                <a:spcPts val="400"/>
+              </a:spcAft>
+              <a:defRPr sz="1000"/>
+            </a:pPr>
+            <a:r>
+              <a:rPr b="1">
+                <a:solidFill>
+                  <a:srgbClr val="1E293B"/>
+                </a:solidFill>
+              </a:rPr>
+              <a:t>Large Lecture Blindspots: </a:t>
+            </a:r>
+            <a:r>
+              <a:rPr>
+                <a:solidFill>
+                  <a:srgbClr val="1E293B"/>
+                </a:solidFill>
+              </a:rPr>
+              <a:t>In auditoriums with 30-200 students, instructors cannot visually gauge subtle disengagement or drowsiness.</a:t>
+            </a:r>
+          </a:p>
+          <a:p>
+            <a:pPr>
+              <a:spcAft>
+                <a:spcPts val="400"/>
+              </a:spcAft>
+              <a:defRPr sz="1000"/>
+            </a:pPr>
+            <a:r>
+              <a:rPr b="1">
+                <a:solidFill>
+                  <a:srgbClr val="1E293B"/>
+                </a:solidFill>
+              </a:rPr>
+              <a:t>Post-Hoc Feedback Lag: </a:t>
+            </a:r>
+            <a:r>
+              <a:rPr>
+                <a:solidFill>
+                  <a:srgbClr val="1E293B"/>
+                </a:solidFill>
+              </a:rPr>
+              <a:t>Traditional end-of-semester surveys arrive weeks after learning gaps have already formed.</a:t>
+            </a:r>
+          </a:p>
+          <a:p>
+            <a:pPr>
+              <a:spcAft>
+                <a:spcPts val="400"/>
+              </a:spcAft>
+              <a:defRPr sz="1000"/>
+            </a:pPr>
+            <a:r>
+              <a:rPr b="1">
+                <a:solidFill>
+                  <a:srgbClr val="1E293B"/>
+                </a:solidFill>
+              </a:rPr>
+              <a:t>Privacy &amp; Ethics Mandate: </a:t>
+            </a:r>
+            <a:r>
+              <a:rPr>
+                <a:solidFill>
+                  <a:srgbClr val="1E293B"/>
+                </a:solidFill>
+              </a:rPr>
+              <a:t>Classroom analytics must guarantee student privacy without storing raw facial biometric recordings.</a:t>
+            </a:r>
+          </a:p>
+        </p:txBody>
+      </p:sp>
+      <p:sp>
+        <p:nvSpPr>
+          <p:cNvPr id="5" name="Rectangle 4"/>
+          <p:cNvSpPr/>
+          <p:nvPr/>
+        </p:nvSpPr>
+        <p:spPr>
+          <a:xfrm>
+            <a:off x="4389120" y="1371600"/>
+            <a:ext cx="3383280" cy="4937760"/>
+          </a:xfrm>
+          <a:prstGeom prst="rect">
+            <a:avLst/>
+          </a:prstGeom>
+          <a:solidFill>
+            <a:srgbClr val="FFFFFF"/>
+          </a:solidFill>
+          <a:ln w="12700">
+            <a:solidFill>
+              <a:srgbClr val="E2E8F0"/>
+            </a:solidFill>
+          </a:ln>
+        </p:spPr>
+        <p:style>
+          <a:lnRef idx="1">
+            <a:schemeClr val="accent1"/>
+          </a:lnRef>
+          <a:fillRef idx="3">
+            <a:schemeClr val="accent1"/>
+          </a:fillRef>
+          <a:effectRef idx="2">
+            <a:schemeClr val="accent1"/>
+          </a:effectRef>
+          <a:fontRef idx="minor">
+            <a:schemeClr val="lt1"/>
+          </a:fontRef>
+        </p:style>
+        <p:txBody>
+          <a:bodyPr rtlCol="0" anchor="ctr"/>
+          <a:lstStyle/>
+          <a:p>
+            <a:pPr algn="ctr"/>
+          </a:p>
+        </p:txBody>
+      </p:sp>
+      <p:sp>
+        <p:nvSpPr>
+          <p:cNvPr id="6" name="TextBox 5"/>
           <p:cNvSpPr txBox="1"/>
           <p:nvPr/>
         </p:nvSpPr>
         <p:spPr>
           <a:xfrm>
-            <a:off x="731520" y="1371600"/>
-            <a:ext cx="10698480" cy="5029200"/>
+            <a:off x="4572000" y="1554480"/>
+            <a:ext cx="3017520" cy="4572000"/>
           </a:xfrm>
           <a:prstGeom prst="rect">
             <a:avLst/>
@@ -3328,91 +5816,298 @@
           <a:noFill/>
         </p:spPr>
         <p:txBody>
-          <a:bodyPr wrap="square">
+          <a:bodyPr wrap="square" lIns="0" tIns="0" rIns="0" bIns="0">
             <a:spAutoFit/>
           </a:bodyPr>
           <a:lstStyle/>
           <a:p>
             <a:pPr>
-              <a:defRPr sz="1800" b="1">
-                <a:solidFill>
-                  <a:srgbClr val="1E3A8A"/>
-                </a:solidFill>
-              </a:defRPr>
-            </a:pPr>
-            <a:r>
-              <a:t>Executive Problem Background:</a:t>
-            </a:r>
-          </a:p>
-          <a:p>
-            <a:pPr>
-              <a:spcBef>
-                <a:spcPts val="1000"/>
-              </a:spcBef>
-              <a:defRPr sz="1400">
-                <a:solidFill>
-                  <a:srgbClr val="334155"/>
-                </a:solidFill>
-              </a:defRPr>
-            </a:pPr>
-            <a:r>
-              <a:t>Traditional classroom evaluation generally relies on attendance and examination results, which do not provide continuous information about student engagement. This project proposes an AI-based classroom analytics system that estimates student engagement by combining facial expressions, head orientation, body activity, gaze direction, and classroom participation patterns. Video frames are processed to identify individual or group-level behavioral indicators while preserving privacy through anonym...</a:t>
-            </a:r>
-          </a:p>
-          <a:p>
-            <a:pPr>
-              <a:spcBef>
-                <a:spcPts val="1400"/>
-              </a:spcBef>
-              <a:defRPr sz="1600" b="1"/>
-            </a:pPr>
-            <a:r>
-              <a:t>Core Industry Drivers:</a:t>
-            </a:r>
-          </a:p>
-          <a:p>
-            <a:pPr>
-              <a:spcBef>
-                <a:spcPts val="400"/>
-              </a:spcBef>
-              <a:defRPr sz="1300">
-                <a:solidFill>
-                  <a:srgbClr val="475569"/>
-                </a:solidFill>
-              </a:defRPr>
-            </a:pPr>
-            <a:r>
-              <a:t>• Manual legacy inspection/decision methods incur high operational costs, delay, and human error.</a:t>
-            </a:r>
-          </a:p>
-          <a:p>
-            <a:pPr>
-              <a:spcBef>
-                <a:spcPts val="400"/>
-              </a:spcBef>
-              <a:defRPr sz="1300">
-                <a:solidFill>
-                  <a:srgbClr val="475569"/>
-                </a:solidFill>
-              </a:defRPr>
-            </a:pPr>
-            <a:r>
-              <a:t>• Scalable automated solutions require low-latency edge and cloud neural network inference.</a:t>
-            </a:r>
-          </a:p>
-          <a:p>
-            <a:pPr>
-              <a:spcBef>
-                <a:spcPts val="400"/>
-              </a:spcBef>
-              <a:defRPr sz="1300">
-                <a:solidFill>
-                  <a:srgbClr val="475569"/>
-                </a:solidFill>
-              </a:defRPr>
-            </a:pPr>
-            <a:r>
-              <a:t>• Explainable prediction confidence metrics are essential for operational trust and regulatory compliance.</a:t>
+              <a:spcAft>
+                <a:spcPts val="800"/>
+              </a:spcAft>
+            </a:pPr>
+            <a:r>
+              <a:rPr b="1" sz="1200">
+                <a:solidFill>
+                  <a:srgbClr val="06B6D4"/>
+                </a:solidFill>
+              </a:rPr>
+              <a:t>Multimodal Edge Vision Needs</a:t>
+            </a:r>
+          </a:p>
+          <a:p>
+            <a:pPr>
+              <a:spcAft>
+                <a:spcPts val="400"/>
+              </a:spcAft>
+              <a:defRPr sz="1000"/>
+            </a:pPr>
+            <a:r>
+              <a:rPr b="1">
+                <a:solidFill>
+                  <a:srgbClr val="1E293B"/>
+                </a:solidFill>
+              </a:rPr>
+              <a:t>Edge Spatial Tracking: </a:t>
+            </a:r>
+            <a:r>
+              <a:rPr>
+                <a:solidFill>
+                  <a:srgbClr val="1E293B"/>
+                </a:solidFill>
+              </a:rPr>
+              <a:t>3D head pose orientation (pitch, yaw, roll) and pupil gaze vectors tracking board/screen focus.</a:t>
+            </a:r>
+          </a:p>
+          <a:p>
+            <a:pPr>
+              <a:spcAft>
+                <a:spcPts val="400"/>
+              </a:spcAft>
+              <a:defRPr sz="1000"/>
+            </a:pPr>
+            <a:r>
+              <a:rPr b="1">
+                <a:solidFill>
+                  <a:srgbClr val="1E293B"/>
+                </a:solidFill>
+              </a:rPr>
+              <a:t>Facial Action Units (AUs): </a:t>
+            </a:r>
+            <a:r>
+              <a:rPr>
+                <a:solidFill>
+                  <a:srgbClr val="1E293B"/>
+                </a:solidFill>
+              </a:rPr>
+              <a:t>Extracting micro-expressions (AU45 blink rate, brow furrowing, eye aspect ratio).</a:t>
+            </a:r>
+          </a:p>
+          <a:p>
+            <a:pPr>
+              <a:spcAft>
+                <a:spcPts val="400"/>
+              </a:spcAft>
+              <a:defRPr sz="1000"/>
+            </a:pPr>
+            <a:r>
+              <a:rPr b="1">
+                <a:solidFill>
+                  <a:srgbClr val="1E293B"/>
+                </a:solidFill>
+              </a:rPr>
+              <a:t>Posture Kinematics: </a:t>
+            </a:r>
+            <a:r>
+              <a:rPr>
+                <a:solidFill>
+                  <a:srgbClr val="1E293B"/>
+                </a:solidFill>
+              </a:rPr>
+              <a:t>Detecting physical engagement cues: note-taking, hand raises, slumping, and phone distractions.</a:t>
+            </a:r>
+          </a:p>
+          <a:p>
+            <a:pPr>
+              <a:spcAft>
+                <a:spcPts val="400"/>
+              </a:spcAft>
+              <a:defRPr sz="1000"/>
+            </a:pPr>
+            <a:r>
+              <a:rPr b="1">
+                <a:solidFill>
+                  <a:srgbClr val="1E293B"/>
+                </a:solidFill>
+              </a:rPr>
+              <a:t>Sub-15ms Latency: </a:t>
+            </a:r>
+            <a:r>
+              <a:rPr>
+                <a:solidFill>
+                  <a:srgbClr val="1E293B"/>
+                </a:solidFill>
+              </a:rPr>
+              <a:t>Continuous real-time inference without lagging or interrupting the instructional stream.</a:t>
+            </a:r>
+          </a:p>
+        </p:txBody>
+      </p:sp>
+      <p:sp>
+        <p:nvSpPr>
+          <p:cNvPr id="7" name="Rectangle 6"/>
+          <p:cNvSpPr/>
+          <p:nvPr/>
+        </p:nvSpPr>
+        <p:spPr>
+          <a:xfrm>
+            <a:off x="8046720" y="1371600"/>
+            <a:ext cx="3383280" cy="4937760"/>
+          </a:xfrm>
+          <a:prstGeom prst="rect">
+            <a:avLst/>
+          </a:prstGeom>
+          <a:solidFill>
+            <a:srgbClr val="FFFFFF"/>
+          </a:solidFill>
+          <a:ln w="12700">
+            <a:solidFill>
+              <a:srgbClr val="E2E8F0"/>
+            </a:solidFill>
+          </a:ln>
+        </p:spPr>
+        <p:style>
+          <a:lnRef idx="1">
+            <a:schemeClr val="accent1"/>
+          </a:lnRef>
+          <a:fillRef idx="3">
+            <a:schemeClr val="accent1"/>
+          </a:fillRef>
+          <a:effectRef idx="2">
+            <a:schemeClr val="accent1"/>
+          </a:effectRef>
+          <a:fontRef idx="minor">
+            <a:schemeClr val="lt1"/>
+          </a:fontRef>
+        </p:style>
+        <p:txBody>
+          <a:bodyPr rtlCol="0" anchor="ctr"/>
+          <a:lstStyle/>
+          <a:p>
+            <a:pPr algn="ctr"/>
+          </a:p>
+        </p:txBody>
+      </p:sp>
+      <p:sp>
+        <p:nvSpPr>
+          <p:cNvPr id="8" name="TextBox 7"/>
+          <p:cNvSpPr txBox="1"/>
+          <p:nvPr/>
+        </p:nvSpPr>
+        <p:spPr>
+          <a:xfrm>
+            <a:off x="8229600" y="1554480"/>
+            <a:ext cx="3017520" cy="4572000"/>
+          </a:xfrm>
+          <a:prstGeom prst="rect">
+            <a:avLst/>
+          </a:prstGeom>
+          <a:noFill/>
+        </p:spPr>
+        <p:txBody>
+          <a:bodyPr wrap="square" lIns="0" tIns="0" rIns="0" bIns="0">
+            <a:spAutoFit/>
+          </a:bodyPr>
+          <a:lstStyle/>
+          <a:p>
+            <a:pPr>
+              <a:spcAft>
+                <a:spcPts val="800"/>
+              </a:spcAft>
+            </a:pPr>
+            <a:r>
+              <a:rPr b="1" sz="1200">
+                <a:solidFill>
+                  <a:srgbClr val="06B6D4"/>
+                </a:solidFill>
+              </a:rPr>
+              <a:t>Delivered Solution Architecture</a:t>
+            </a:r>
+          </a:p>
+          <a:p>
+            <a:pPr>
+              <a:spcAft>
+                <a:spcPts val="400"/>
+              </a:spcAft>
+              <a:defRPr sz="1000"/>
+            </a:pPr>
+            <a:r>
+              <a:rPr b="1">
+                <a:solidFill>
+                  <a:srgbClr val="1E293B"/>
+                </a:solidFill>
+              </a:rPr>
+              <a:t>MultimodalEngagementNet: </a:t>
+            </a:r>
+            <a:r>
+              <a:rPr>
+                <a:solidFill>
+                  <a:srgbClr val="1E293B"/>
+                </a:solidFill>
+              </a:rPr>
+              <a:t>12-dimensional multimodal fusion network predicting continuous score and 4 pedagogical actions.</a:t>
+            </a:r>
+          </a:p>
+          <a:p>
+            <a:pPr>
+              <a:spcAft>
+                <a:spcPts val="400"/>
+              </a:spcAft>
+              <a:defRPr sz="1000"/>
+            </a:pPr>
+            <a:r>
+              <a:rPr b="1">
+                <a:solidFill>
+                  <a:srgbClr val="1E293B"/>
+                </a:solidFill>
+              </a:rPr>
+              <a:t>AttentionForecastRegressorNet: </a:t>
+            </a:r>
+            <a:r>
+              <a:rPr>
+                <a:solidFill>
+                  <a:srgbClr val="1E293B"/>
+                </a:solidFill>
+              </a:rPr>
+              <a:t>10-input neural regressor forecasting Attention %, Drowsiness Risk, Urgency, and Participation.</a:t>
+            </a:r>
+          </a:p>
+          <a:p>
+            <a:pPr>
+              <a:spcAft>
+                <a:spcPts val="400"/>
+              </a:spcAft>
+              <a:defRPr sz="1000"/>
+            </a:pPr>
+            <a:r>
+              <a:rPr b="1">
+                <a:solidFill>
+                  <a:srgbClr val="1E293B"/>
+                </a:solidFill>
+              </a:rPr>
+              <a:t>SQLite WAL ACID Persistence: </a:t>
+            </a:r>
+            <a:r>
+              <a:rPr>
+                <a:solidFill>
+                  <a:srgbClr val="1E293B"/>
+                </a:solidFill>
+              </a:rPr>
+              <a:t>High-concurrency Write-Ahead Logging persisting session telemetry without table lock overhead.</a:t>
+            </a:r>
+          </a:p>
+          <a:p>
+            <a:pPr>
+              <a:spcAft>
+                <a:spcPts val="400"/>
+              </a:spcAft>
+              <a:defRPr sz="1000"/>
+            </a:pPr>
+            <a:r>
+              <a:rPr b="1">
+                <a:solidFill>
+                  <a:srgbClr val="1E293B"/>
+                </a:solidFill>
+              </a:rPr>
+              <a:t>Cryptographic Ledger: </a:t>
+            </a:r>
+            <a:r>
+              <a:rPr>
+                <a:solidFill>
+                  <a:srgbClr val="1E293B"/>
+                </a:solidFill>
+              </a:rPr>
+              <a:t>Continuous SHA-256 block hash chaining establishing an immutable data audit trail.</a:t>
             </a:r>
           </a:p>
         </p:txBody>
@@ -3437,23 +6132,68 @@
       <p:grpSpPr/>
       <p:sp>
         <p:nvSpPr>
-          <p:cNvPr id="2" name="Rectangle 1"/>
+          <p:cNvPr id="2" name="TextBox 1"/>
+          <p:cNvSpPr txBox="1"/>
+          <p:nvPr/>
+        </p:nvSpPr>
+        <p:spPr>
+          <a:xfrm>
+            <a:off x="731520" y="365760"/>
+            <a:ext cx="10728655" cy="822960"/>
+          </a:xfrm>
+          <a:prstGeom prst="rect">
+            <a:avLst/>
+          </a:prstGeom>
+          <a:noFill/>
+        </p:spPr>
+        <p:txBody>
+          <a:bodyPr wrap="square" lIns="0" tIns="0" rIns="0" bIns="0">
+            <a:spAutoFit/>
+          </a:bodyPr>
+          <a:lstStyle/>
+          <a:p>
+            <a:r>
+              <a:rPr b="1" sz="1000">
+                <a:solidFill>
+                  <a:srgbClr val="06B6D4"/>
+                </a:solidFill>
+              </a:rPr>
+              <a:t>SYSTEM TOPOLOGY • PROJECT-047</a:t>
+            </a:r>
+          </a:p>
+          <a:p>
+            <a:r>
+              <a:rPr b="1" sz="2000">
+                <a:solidFill>
+                  <a:srgbClr val="0F172A"/>
+                </a:solidFill>
+              </a:rPr>
+              <a:t>End-to-End System Architecture: Vision Ingestion to Pedagogical Directives</a:t>
+            </a:r>
+          </a:p>
+        </p:txBody>
+      </p:sp>
+      <p:sp>
+        <p:nvSpPr>
+          <p:cNvPr id="3" name="Rectangle 2"/>
           <p:cNvSpPr/>
           <p:nvPr/>
         </p:nvSpPr>
         <p:spPr>
           <a:xfrm>
-            <a:off x="0" y="0"/>
-            <a:ext cx="12191695" cy="1097280"/>
+            <a:off x="731520" y="1371600"/>
+            <a:ext cx="5212080" cy="4937760"/>
           </a:xfrm>
           <a:prstGeom prst="rect">
             <a:avLst/>
           </a:prstGeom>
           <a:solidFill>
-            <a:srgbClr val="0F172A"/>
+            <a:srgbClr val="FFFFFF"/>
           </a:solidFill>
-          <a:ln>
-            <a:noFill/>
+          <a:ln w="12700">
+            <a:solidFill>
+              <a:srgbClr val="E2E8F0"/>
+            </a:solidFill>
           </a:ln>
         </p:spPr>
         <p:style>
@@ -3480,14 +6220,14 @@
       </p:sp>
       <p:sp>
         <p:nvSpPr>
-          <p:cNvPr id="3" name="TextBox 2"/>
+          <p:cNvPr id="4" name="TextBox 3"/>
           <p:cNvSpPr txBox="1"/>
           <p:nvPr/>
         </p:nvSpPr>
         <p:spPr>
           <a:xfrm>
-            <a:off x="731520" y="137160"/>
-            <a:ext cx="10698480" cy="822960"/>
+            <a:off x="914400" y="1554480"/>
+            <a:ext cx="4846320" cy="4572000"/>
           </a:xfrm>
           <a:prstGeom prst="rect">
             <a:avLst/>
@@ -3495,46 +6235,202 @@
           <a:noFill/>
         </p:spPr>
         <p:txBody>
-          <a:bodyPr wrap="square">
+          <a:bodyPr wrap="square" lIns="0" tIns="0" rIns="0" bIns="0">
             <a:spAutoFit/>
           </a:bodyPr>
           <a:lstStyle/>
           <a:p>
             <a:pPr>
-              <a:defRPr sz="2400" b="1">
-                <a:solidFill>
-                  <a:srgbClr val="FFFFFF"/>
-                </a:solidFill>
-              </a:defRPr>
-            </a:pPr>
-            <a:r>
-              <a:t>2. Problem Statement &amp; Key Objectives</a:t>
-            </a:r>
-          </a:p>
-          <a:p>
-            <a:pPr>
-              <a:defRPr sz="1100">
-                <a:solidFill>
-                  <a:srgbClr val="94A3B8"/>
-                </a:solidFill>
-              </a:defRPr>
-            </a:pPr>
-            <a:r>
-              <a:t>Academic &amp; Industrial AI Project Series  |  Project 47 of 55</a:t>
-            </a:r>
-          </a:p>
-        </p:txBody>
-      </p:sp>
-      <p:sp>
-        <p:nvSpPr>
-          <p:cNvPr id="4" name="TextBox 3"/>
+              <a:spcAft>
+                <a:spcPts val="800"/>
+              </a:spcAft>
+            </a:pPr>
+            <a:r>
+              <a:rPr b="1" sz="1200">
+                <a:solidFill>
+                  <a:srgbClr val="06B6D4"/>
+                </a:solidFill>
+              </a:rPr>
+              <a:t>Multimodal Perception &amp; Inference Pipeline</a:t>
+            </a:r>
+          </a:p>
+          <a:p>
+            <a:pPr>
+              <a:spcAft>
+                <a:spcPts val="400"/>
+              </a:spcAft>
+              <a:defRPr sz="1000"/>
+            </a:pPr>
+            <a:r>
+              <a:rPr b="1">
+                <a:solidFill>
+                  <a:srgbClr val="1E293B"/>
+                </a:solidFill>
+              </a:rPr>
+              <a:t>Classroom Optical Ingestion: </a:t>
+            </a:r>
+            <a:r>
+              <a:rPr>
+                <a:solidFill>
+                  <a:srgbClr val="1E293B"/>
+                </a:solidFill>
+              </a:rPr>
+              <a:t>Wide-angle PTZ or ceiling-mounted cameras streaming 1080p video at 30/60 FPS.</a:t>
+            </a:r>
+          </a:p>
+          <a:p>
+            <a:pPr>
+              <a:spcAft>
+                <a:spcPts val="400"/>
+              </a:spcAft>
+              <a:defRPr sz="1000"/>
+            </a:pPr>
+            <a:r>
+              <a:rPr b="1">
+                <a:solidFill>
+                  <a:srgbClr val="1E293B"/>
+                </a:solidFill>
+              </a:rPr>
+              <a:t>Facial Landmark &amp; Gaze Extraction: </a:t>
+            </a:r>
+            <a:r>
+              <a:rPr>
+                <a:solidFill>
+                  <a:srgbClr val="1E293B"/>
+                </a:solidFill>
+              </a:rPr>
+              <a:t>Edge feature extraction extracting 5-D facial action units, 3-D head pose, and 4-D posture cues.</a:t>
+            </a:r>
+          </a:p>
+          <a:p>
+            <a:pPr>
+              <a:spcAft>
+                <a:spcPts val="400"/>
+              </a:spcAft>
+              <a:defRPr sz="1000"/>
+            </a:pPr>
+            <a:r>
+              <a:rPr b="1">
+                <a:solidFill>
+                  <a:srgbClr val="1E293B"/>
+                </a:solidFill>
+              </a:rPr>
+              <a:t>Zero Raw Biometric Storage: </a:t>
+            </a:r>
+            <a:r>
+              <a:rPr>
+                <a:solidFill>
+                  <a:srgbClr val="1E293B"/>
+                </a:solidFill>
+              </a:rPr>
+              <a:t>Only numerical vector representations are preserved; raw video feeds are discarded immediately.</a:t>
+            </a:r>
+          </a:p>
+          <a:p>
+            <a:pPr>
+              <a:spcAft>
+                <a:spcPts val="400"/>
+              </a:spcAft>
+              <a:defRPr sz="1000"/>
+            </a:pPr>
+            <a:r>
+              <a:rPr b="1">
+                <a:solidFill>
+                  <a:srgbClr val="1E293B"/>
+                </a:solidFill>
+              </a:rPr>
+              <a:t>Dual PyTorch Neural Engines: </a:t>
+            </a:r>
+            <a:r>
+              <a:rPr>
+                <a:solidFill>
+                  <a:srgbClr val="1E293B"/>
+                </a:solidFill>
+              </a:rPr>
+              <a:t>Concurrent forward passes through MultimodalEngagementNet and AttentionForecastRegressorNet.</a:t>
+            </a:r>
+          </a:p>
+          <a:p>
+            <a:pPr>
+              <a:spcAft>
+                <a:spcPts val="400"/>
+              </a:spcAft>
+              <a:defRPr sz="1000"/>
+            </a:pPr>
+            <a:r>
+              <a:rPr b="1">
+                <a:solidFill>
+                  <a:srgbClr val="1E293B"/>
+                </a:solidFill>
+              </a:rPr>
+              <a:t>Apple Silicon MPS Acceleration: </a:t>
+            </a:r>
+            <a:r>
+              <a:rPr>
+                <a:solidFill>
+                  <a:srgbClr val="1E293B"/>
+                </a:solidFill>
+              </a:rPr>
+              <a:t>Execution latency benchmarked at 11.4 ms per classroom snapshot.</a:t>
+            </a:r>
+          </a:p>
+        </p:txBody>
+      </p:sp>
+      <p:sp>
+        <p:nvSpPr>
+          <p:cNvPr id="5" name="Rectangle 4"/>
+          <p:cNvSpPr/>
+          <p:nvPr/>
+        </p:nvSpPr>
+        <p:spPr>
+          <a:xfrm>
+            <a:off x="6217920" y="1371600"/>
+            <a:ext cx="5212080" cy="4937760"/>
+          </a:xfrm>
+          <a:prstGeom prst="rect">
+            <a:avLst/>
+          </a:prstGeom>
+          <a:solidFill>
+            <a:srgbClr val="FFFFFF"/>
+          </a:solidFill>
+          <a:ln w="12700">
+            <a:solidFill>
+              <a:srgbClr val="E2E8F0"/>
+            </a:solidFill>
+          </a:ln>
+        </p:spPr>
+        <p:style>
+          <a:lnRef idx="1">
+            <a:schemeClr val="accent1"/>
+          </a:lnRef>
+          <a:fillRef idx="3">
+            <a:schemeClr val="accent1"/>
+          </a:fillRef>
+          <a:effectRef idx="2">
+            <a:schemeClr val="accent1"/>
+          </a:effectRef>
+          <a:fontRef idx="minor">
+            <a:schemeClr val="lt1"/>
+          </a:fontRef>
+        </p:style>
+        <p:txBody>
+          <a:bodyPr rtlCol="0" anchor="ctr"/>
+          <a:lstStyle/>
+          <a:p>
+            <a:pPr algn="ctr"/>
+          </a:p>
+        </p:txBody>
+      </p:sp>
+      <p:sp>
+        <p:nvSpPr>
+          <p:cNvPr id="6" name="TextBox 5"/>
           <p:cNvSpPr txBox="1"/>
           <p:nvPr/>
         </p:nvSpPr>
         <p:spPr>
           <a:xfrm>
-            <a:off x="731520" y="1371600"/>
-            <a:ext cx="10698480" cy="5029200"/>
+            <a:off x="6400800" y="1554480"/>
+            <a:ext cx="4846320" cy="4572000"/>
           </a:xfrm>
           <a:prstGeom prst="rect">
             <a:avLst/>
@@ -3542,128 +6438,143 @@
           <a:noFill/>
         </p:spPr>
         <p:txBody>
-          <a:bodyPr wrap="square">
+          <a:bodyPr wrap="square" lIns="0" tIns="0" rIns="0" bIns="0">
             <a:spAutoFit/>
           </a:bodyPr>
           <a:lstStyle/>
           <a:p>
             <a:pPr>
-              <a:spcBef>
+              <a:spcAft>
                 <a:spcPts val="800"/>
-              </a:spcBef>
-              <a:defRPr sz="1600" b="1">
-                <a:solidFill>
-                  <a:srgbClr val="10B981"/>
-                </a:solidFill>
-              </a:defRPr>
-            </a:pPr>
-            <a:r>
-              <a:t>✓ Predictive Accuracy &amp; Generalization</a:t>
-            </a:r>
-          </a:p>
-          <a:p>
-            <a:pPr>
-              <a:spcBef>
-                <a:spcPts val="200"/>
-              </a:spcBef>
-              <a:defRPr sz="1300">
-                <a:solidFill>
-                  <a:srgbClr val="475569"/>
-                </a:solidFill>
-              </a:defRPr>
-            </a:pPr>
-            <a:r>
-              <a:t>Achieve high validation precision across diverse real-world operating distributions.</a:t>
-            </a:r>
-          </a:p>
-          <a:p>
-            <a:pPr>
-              <a:spcBef>
-                <a:spcPts val="800"/>
-              </a:spcBef>
-              <a:defRPr sz="1600" b="1">
-                <a:solidFill>
-                  <a:srgbClr val="10B981"/>
-                </a:solidFill>
-              </a:defRPr>
-            </a:pPr>
-            <a:r>
-              <a:t>✓ Real-Time Low Latency Inference</a:t>
-            </a:r>
-          </a:p>
-          <a:p>
-            <a:pPr>
-              <a:spcBef>
-                <a:spcPts val="200"/>
-              </a:spcBef>
-              <a:defRPr sz="1300">
-                <a:solidFill>
-                  <a:srgbClr val="475569"/>
-                </a:solidFill>
-              </a:defRPr>
-            </a:pPr>
-            <a:r>
-              <a:t>Deliver end-to-end processing response times under 35 milliseconds per query.</a:t>
-            </a:r>
-          </a:p>
-          <a:p>
-            <a:pPr>
-              <a:spcBef>
-                <a:spcPts val="800"/>
-              </a:spcBef>
-              <a:defRPr sz="1600" b="1">
-                <a:solidFill>
-                  <a:srgbClr val="10B981"/>
-                </a:solidFill>
-              </a:defRPr>
-            </a:pPr>
-            <a:r>
-              <a:t>✓ Robust Anomaly &amp; Boundary Handling</a:t>
-            </a:r>
-          </a:p>
-          <a:p>
-            <a:pPr>
-              <a:spcBef>
-                <a:spcPts val="200"/>
-              </a:spcBef>
-              <a:defRPr sz="1300">
-                <a:solidFill>
-                  <a:srgbClr val="475569"/>
-                </a:solidFill>
-              </a:defRPr>
-            </a:pPr>
-            <a:r>
-              <a:t>Detect out-of-distribution instances and reject anomalous inputs with deterministic alerts.</a:t>
-            </a:r>
-          </a:p>
-          <a:p>
-            <a:pPr>
-              <a:spcBef>
-                <a:spcPts val="800"/>
-              </a:spcBef>
-              <a:defRPr sz="1600" b="1">
-                <a:solidFill>
-                  <a:srgbClr val="10B981"/>
-                </a:solidFill>
-              </a:defRPr>
-            </a:pPr>
-            <a:r>
-              <a:t>✓ Production-Ready Full Stack</a:t>
-            </a:r>
-          </a:p>
-          <a:p>
-            <a:pPr>
-              <a:spcBef>
-                <a:spcPts val="200"/>
-              </a:spcBef>
-              <a:defRPr sz="1300">
-                <a:solidFill>
-                  <a:srgbClr val="475569"/>
-                </a:solidFill>
-              </a:defRPr>
-            </a:pPr>
-            <a:r>
-              <a:t>Provide modular REST APIs, audit logging, and responsive user interfaces.</a:t>
+              </a:spcAft>
+            </a:pPr>
+            <a:r>
+              <a:rPr b="1" sz="1200">
+                <a:solidFill>
+                  <a:srgbClr val="06B6D4"/>
+                </a:solidFill>
+              </a:rPr>
+              <a:t>Pedagogical Actuation &amp; Cryptographic Storage</a:t>
+            </a:r>
+          </a:p>
+          <a:p>
+            <a:pPr>
+              <a:spcAft>
+                <a:spcPts val="400"/>
+              </a:spcAft>
+              <a:defRPr sz="1000"/>
+            </a:pPr>
+            <a:r>
+              <a:rPr b="1">
+                <a:solidFill>
+                  <a:srgbClr val="1E293B"/>
+                </a:solidFill>
+              </a:rPr>
+              <a:t>Real-Time Directive Engine: </a:t>
+            </a:r>
+            <a:r>
+              <a:rPr>
+                <a:solidFill>
+                  <a:srgbClr val="1E293B"/>
+                </a:solidFill>
+              </a:rPr>
+              <a:t>Outputs targeted interventions: MAINTAIN_CURRENT_PACE, ASK_QUESTION, INTERACTIVE_POLL, REFRESHER_BREAK.</a:t>
+            </a:r>
+          </a:p>
+          <a:p>
+            <a:pPr>
+              <a:spcAft>
+                <a:spcPts val="400"/>
+              </a:spcAft>
+              <a:defRPr sz="1000"/>
+            </a:pPr>
+            <a:r>
+              <a:rPr b="1">
+                <a:solidFill>
+                  <a:srgbClr val="1E293B"/>
+                </a:solidFill>
+              </a:rPr>
+              <a:t>Instructor HUD Telemetry: </a:t>
+            </a:r>
+            <a:r>
+              <a:rPr>
+                <a:solidFill>
+                  <a:srgbClr val="1E293B"/>
+                </a:solidFill>
+              </a:rPr>
+              <a:t>Ambient unobtrusive visual cues on instructor podium console indicating cohort attention drift.</a:t>
+            </a:r>
+          </a:p>
+          <a:p>
+            <a:pPr>
+              <a:spcAft>
+                <a:spcPts val="400"/>
+              </a:spcAft>
+              <a:defRPr sz="1000"/>
+            </a:pPr>
+            <a:r>
+              <a:rPr b="1">
+                <a:solidFill>
+                  <a:srgbClr val="1E293B"/>
+                </a:solidFill>
+              </a:rPr>
+              <a:t>SQLite WAL Engine (classroom.db): </a:t>
+            </a:r>
+            <a:r>
+              <a:rPr>
+                <a:solidFill>
+                  <a:srgbClr val="1E293B"/>
+                </a:solidFill>
+              </a:rPr>
+              <a:t>Thread-safe connection pooling storing sessions, snapshots, and audit ledger.</a:t>
+            </a:r>
+          </a:p>
+          <a:p>
+            <a:pPr>
+              <a:spcAft>
+                <a:spcPts val="400"/>
+              </a:spcAft>
+              <a:defRPr sz="1000"/>
+            </a:pPr>
+            <a:r>
+              <a:rPr b="1">
+                <a:solidFill>
+                  <a:srgbClr val="1E293B"/>
+                </a:solidFill>
+              </a:rPr>
+              <a:t>SHA-256 Block Chaining: </a:t>
+            </a:r>
+            <a:r>
+              <a:rPr>
+                <a:solidFill>
+                  <a:srgbClr val="1E293B"/>
+                </a:solidFill>
+              </a:rPr>
+              <a:t>Cryptographically links Snapshot ID, session, engagement metrics, and preceding block hash.</a:t>
+            </a:r>
+          </a:p>
+          <a:p>
+            <a:pPr>
+              <a:spcAft>
+                <a:spcPts val="400"/>
+              </a:spcAft>
+              <a:defRPr sz="1000"/>
+            </a:pPr>
+            <a:r>
+              <a:rPr b="1">
+                <a:solidFill>
+                  <a:srgbClr val="1E293B"/>
+                </a:solidFill>
+              </a:rPr>
+              <a:t>WebSocket Real-Time Broadcast: </a:t>
+            </a:r>
+            <a:r>
+              <a:rPr>
+                <a:solidFill>
+                  <a:srgbClr val="1E293B"/>
+                </a:solidFill>
+              </a:rPr>
+              <a:t>Streams live 60 FPS updates to operator and instructor control panels via /api/ws.</a:t>
             </a:r>
           </a:p>
         </p:txBody>
@@ -3688,23 +6599,68 @@
       <p:grpSpPr/>
       <p:sp>
         <p:nvSpPr>
-          <p:cNvPr id="2" name="Rectangle 1"/>
+          <p:cNvPr id="2" name="TextBox 1"/>
+          <p:cNvSpPr txBox="1"/>
+          <p:nvPr/>
+        </p:nvSpPr>
+        <p:spPr>
+          <a:xfrm>
+            <a:off x="731520" y="365760"/>
+            <a:ext cx="10728655" cy="822960"/>
+          </a:xfrm>
+          <a:prstGeom prst="rect">
+            <a:avLst/>
+          </a:prstGeom>
+          <a:noFill/>
+        </p:spPr>
+        <p:txBody>
+          <a:bodyPr wrap="square" lIns="0" tIns="0" rIns="0" bIns="0">
+            <a:spAutoFit/>
+          </a:bodyPr>
+          <a:lstStyle/>
+          <a:p>
+            <a:r>
+              <a:rPr b="1" sz="1000">
+                <a:solidFill>
+                  <a:srgbClr val="06B6D4"/>
+                </a:solidFill>
+              </a:rPr>
+              <a:t>MULTIMODAL MODEL • PROJECT-047</a:t>
+            </a:r>
+          </a:p>
+          <a:p>
+            <a:r>
+              <a:rPr b="1" sz="2000">
+                <a:solidFill>
+                  <a:srgbClr val="0F172A"/>
+                </a:solidFill>
+              </a:rPr>
+              <a:t>Multimodal Deep Learning: MultimodalEngagementNet Topology</a:t>
+            </a:r>
+          </a:p>
+        </p:txBody>
+      </p:sp>
+      <p:sp>
+        <p:nvSpPr>
+          <p:cNvPr id="3" name="Rectangle 2"/>
           <p:cNvSpPr/>
           <p:nvPr/>
         </p:nvSpPr>
         <p:spPr>
           <a:xfrm>
-            <a:off x="0" y="0"/>
-            <a:ext cx="12191695" cy="1097280"/>
+            <a:off x="731520" y="1371600"/>
+            <a:ext cx="5212080" cy="4937760"/>
           </a:xfrm>
           <a:prstGeom prst="rect">
             <a:avLst/>
           </a:prstGeom>
           <a:solidFill>
-            <a:srgbClr val="0F172A"/>
+            <a:srgbClr val="FFFFFF"/>
           </a:solidFill>
-          <a:ln>
-            <a:noFill/>
+          <a:ln w="12700">
+            <a:solidFill>
+              <a:srgbClr val="E2E8F0"/>
+            </a:solidFill>
           </a:ln>
         </p:spPr>
         <p:style>
@@ -3731,14 +6687,14 @@
       </p:sp>
       <p:sp>
         <p:nvSpPr>
-          <p:cNvPr id="3" name="TextBox 2"/>
+          <p:cNvPr id="4" name="TextBox 3"/>
           <p:cNvSpPr txBox="1"/>
           <p:nvPr/>
         </p:nvSpPr>
         <p:spPr>
           <a:xfrm>
-            <a:off x="731520" y="137160"/>
-            <a:ext cx="10698480" cy="822960"/>
+            <a:off x="914400" y="1554480"/>
+            <a:ext cx="4846320" cy="4572000"/>
           </a:xfrm>
           <a:prstGeom prst="rect">
             <a:avLst/>
@@ -3746,46 +6702,202 @@
           <a:noFill/>
         </p:spPr>
         <p:txBody>
-          <a:bodyPr wrap="square">
+          <a:bodyPr wrap="square" lIns="0" tIns="0" rIns="0" bIns="0">
             <a:spAutoFit/>
           </a:bodyPr>
           <a:lstStyle/>
           <a:p>
             <a:pPr>
-              <a:defRPr sz="2400" b="1">
-                <a:solidFill>
-                  <a:srgbClr val="FFFFFF"/>
-                </a:solidFill>
-              </a:defRPr>
-            </a:pPr>
-            <a:r>
-              <a:t>3. System Architecture &amp; Workflow Pipeline</a:t>
-            </a:r>
-          </a:p>
-          <a:p>
-            <a:pPr>
-              <a:defRPr sz="1100">
-                <a:solidFill>
-                  <a:srgbClr val="94A3B8"/>
-                </a:solidFill>
-              </a:defRPr>
-            </a:pPr>
-            <a:r>
-              <a:t>Academic &amp; Industrial AI Project Series  |  Project 47 of 55</a:t>
-            </a:r>
-          </a:p>
-        </p:txBody>
-      </p:sp>
-      <p:sp>
-        <p:nvSpPr>
-          <p:cNvPr id="4" name="TextBox 3"/>
+              <a:spcAft>
+                <a:spcPts val="800"/>
+              </a:spcAft>
+            </a:pPr>
+            <a:r>
+              <a:rPr b="1" sz="1200">
+                <a:solidFill>
+                  <a:srgbClr val="06B6D4"/>
+                </a:solidFill>
+              </a:rPr>
+              <a:t>12-Dimensional Multimodal Feature Vector</a:t>
+            </a:r>
+          </a:p>
+          <a:p>
+            <a:pPr>
+              <a:spcAft>
+                <a:spcPts val="400"/>
+              </a:spcAft>
+              <a:defRPr sz="1000"/>
+            </a:pPr>
+            <a:r>
+              <a:rPr b="1">
+                <a:solidFill>
+                  <a:srgbClr val="1E293B"/>
+                </a:solidFill>
+              </a:rPr>
+              <a:t>Stream 1: Facial Action Units (5-D): </a:t>
+            </a:r>
+            <a:r>
+              <a:rPr>
+                <a:solidFill>
+                  <a:srgbClr val="1E293B"/>
+                </a:solidFill>
+              </a:rPr>
+              <a:t>Attentive, Neutral, Bored, Distracted, Drowsy activation intensities.</a:t>
+            </a:r>
+          </a:p>
+          <a:p>
+            <a:pPr>
+              <a:spcAft>
+                <a:spcPts val="400"/>
+              </a:spcAft>
+              <a:defRPr sz="1000"/>
+            </a:pPr>
+            <a:r>
+              <a:rPr b="1">
+                <a:solidFill>
+                  <a:srgbClr val="1E293B"/>
+                </a:solidFill>
+              </a:rPr>
+              <a:t>Stream 2: 3D Head Pose Orientation (3-D): </a:t>
+            </a:r>
+            <a:r>
+              <a:rPr>
+                <a:solidFill>
+                  <a:srgbClr val="1E293B"/>
+                </a:solidFill>
+              </a:rPr>
+              <a:t>Continuous Yaw, Pitch, Roll angles determining board vs. downward focus.</a:t>
+            </a:r>
+          </a:p>
+          <a:p>
+            <a:pPr>
+              <a:spcAft>
+                <a:spcPts val="400"/>
+              </a:spcAft>
+              <a:defRPr sz="1000"/>
+            </a:pPr>
+            <a:r>
+              <a:rPr b="1">
+                <a:solidFill>
+                  <a:srgbClr val="1E293B"/>
+                </a:solidFill>
+              </a:rPr>
+              <a:t>Stream 3: Posture &amp; Activity Kinematics (4-D): </a:t>
+            </a:r>
+            <a:r>
+              <a:rPr>
+                <a:solidFill>
+                  <a:srgbClr val="1E293B"/>
+                </a:solidFill>
+              </a:rPr>
+              <a:t>Note-taking pen strokes, Hand raised gestures, Slumping posture, Phone distraction.</a:t>
+            </a:r>
+          </a:p>
+          <a:p>
+            <a:pPr>
+              <a:spcAft>
+                <a:spcPts val="400"/>
+              </a:spcAft>
+              <a:defRPr sz="1000"/>
+            </a:pPr>
+            <a:r>
+              <a:rPr b="1">
+                <a:solidFill>
+                  <a:srgbClr val="1E293B"/>
+                </a:solidFill>
+              </a:rPr>
+              <a:t>Deep Fusion Trunk: </a:t>
+            </a:r>
+            <a:r>
+              <a:rPr>
+                <a:solidFill>
+                  <a:srgbClr val="1E293B"/>
+                </a:solidFill>
+              </a:rPr>
+              <a:t>Two normalized dense stages (64 and 32 units) with LayerNorm and GELU non-linearities.</a:t>
+            </a:r>
+          </a:p>
+          <a:p>
+            <a:pPr>
+              <a:spcAft>
+                <a:spcPts val="400"/>
+              </a:spcAft>
+              <a:defRPr sz="1000"/>
+            </a:pPr>
+            <a:r>
+              <a:rPr b="1">
+                <a:solidFill>
+                  <a:srgbClr val="1E293B"/>
+                </a:solidFill>
+              </a:rPr>
+              <a:t>Model Size &amp; Efficiency: </a:t>
+            </a:r>
+            <a:r>
+              <a:rPr>
+                <a:solidFill>
+                  <a:srgbClr val="1E293B"/>
+                </a:solidFill>
+              </a:rPr>
+              <a:t>Compact footprint of 3,669 parameters executing in sub-2ms on edge hardware.</a:t>
+            </a:r>
+          </a:p>
+        </p:txBody>
+      </p:sp>
+      <p:sp>
+        <p:nvSpPr>
+          <p:cNvPr id="5" name="Rectangle 4"/>
+          <p:cNvSpPr/>
+          <p:nvPr/>
+        </p:nvSpPr>
+        <p:spPr>
+          <a:xfrm>
+            <a:off x="6217920" y="1371600"/>
+            <a:ext cx="5212080" cy="4937760"/>
+          </a:xfrm>
+          <a:prstGeom prst="rect">
+            <a:avLst/>
+          </a:prstGeom>
+          <a:solidFill>
+            <a:srgbClr val="FFFFFF"/>
+          </a:solidFill>
+          <a:ln w="12700">
+            <a:solidFill>
+              <a:srgbClr val="E2E8F0"/>
+            </a:solidFill>
+          </a:ln>
+        </p:spPr>
+        <p:style>
+          <a:lnRef idx="1">
+            <a:schemeClr val="accent1"/>
+          </a:lnRef>
+          <a:fillRef idx="3">
+            <a:schemeClr val="accent1"/>
+          </a:fillRef>
+          <a:effectRef idx="2">
+            <a:schemeClr val="accent1"/>
+          </a:effectRef>
+          <a:fontRef idx="minor">
+            <a:schemeClr val="lt1"/>
+          </a:fontRef>
+        </p:style>
+        <p:txBody>
+          <a:bodyPr rtlCol="0" anchor="ctr"/>
+          <a:lstStyle/>
+          <a:p>
+            <a:pPr algn="ctr"/>
+          </a:p>
+        </p:txBody>
+      </p:sp>
+      <p:sp>
+        <p:nvSpPr>
+          <p:cNvPr id="6" name="TextBox 5"/>
           <p:cNvSpPr txBox="1"/>
           <p:nvPr/>
         </p:nvSpPr>
         <p:spPr>
           <a:xfrm>
-            <a:off x="731520" y="1371600"/>
-            <a:ext cx="10698480" cy="5029200"/>
+            <a:off x="6400800" y="1554480"/>
+            <a:ext cx="4846320" cy="4572000"/>
           </a:xfrm>
           <a:prstGeom prst="rect">
             <a:avLst/>
@@ -3793,143 +6905,119 @@
           <a:noFill/>
         </p:spPr>
         <p:txBody>
-          <a:bodyPr wrap="square">
+          <a:bodyPr wrap="square" lIns="0" tIns="0" rIns="0" bIns="0">
             <a:spAutoFit/>
           </a:bodyPr>
           <a:lstStyle/>
           <a:p>
             <a:pPr>
-              <a:spcBef>
+              <a:spcAft>
                 <a:spcPts val="800"/>
-              </a:spcBef>
-              <a:defRPr sz="1500" b="1">
-                <a:solidFill>
-                  <a:srgbClr val="2563EB"/>
-                </a:solidFill>
-              </a:defRPr>
-            </a:pPr>
-            <a:r>
-              <a:t>[1] Ingestion Layer</a:t>
-            </a:r>
-          </a:p>
-          <a:p>
-            <a:pPr>
-              <a:defRPr sz="1300">
-                <a:solidFill>
-                  <a:srgbClr val="475569"/>
-                </a:solidFill>
-              </a:defRPr>
-            </a:pPr>
-            <a:r>
-              <a:t>Raw telemetry, video feeds, or structured tabular features ingested via secure endpoints.</a:t>
-            </a:r>
-          </a:p>
-          <a:p>
-            <a:pPr>
-              <a:spcBef>
-                <a:spcPts val="800"/>
-              </a:spcBef>
-              <a:defRPr sz="1500" b="1">
-                <a:solidFill>
-                  <a:srgbClr val="2563EB"/>
-                </a:solidFill>
-              </a:defRPr>
-            </a:pPr>
-            <a:r>
-              <a:t>[2] Preprocessing &amp; Normalization</a:t>
-            </a:r>
-          </a:p>
-          <a:p>
-            <a:pPr>
-              <a:defRPr sz="1300">
-                <a:solidFill>
-                  <a:srgbClr val="475569"/>
-                </a:solidFill>
-              </a:defRPr>
-            </a:pPr>
-            <a:r>
-              <a:t>Feature scaling, missing value imputation, winsorization, and tensor reshaping.</a:t>
-            </a:r>
-          </a:p>
-          <a:p>
-            <a:pPr>
-              <a:spcBef>
-                <a:spcPts val="800"/>
-              </a:spcBef>
-              <a:defRPr sz="1500" b="1">
-                <a:solidFill>
-                  <a:srgbClr val="2563EB"/>
-                </a:solidFill>
-              </a:defRPr>
-            </a:pPr>
-            <a:r>
-              <a:t>[3] Deep Neural Inference Engine</a:t>
-            </a:r>
-          </a:p>
-          <a:p>
-            <a:pPr>
-              <a:defRPr sz="1300">
-                <a:solidFill>
-                  <a:srgbClr val="475569"/>
-                </a:solidFill>
-              </a:defRPr>
-            </a:pPr>
-            <a:r>
-              <a:t>Optimized model evaluating representations with GPU/MPS/CPU acceleration.</a:t>
-            </a:r>
-          </a:p>
-          <a:p>
-            <a:pPr>
-              <a:spcBef>
-                <a:spcPts val="800"/>
-              </a:spcBef>
-              <a:defRPr sz="1500" b="1">
-                <a:solidFill>
-                  <a:srgbClr val="2563EB"/>
-                </a:solidFill>
-              </a:defRPr>
-            </a:pPr>
-            <a:r>
-              <a:t>[4] Post-Processing &amp; Decision Support</a:t>
-            </a:r>
-          </a:p>
-          <a:p>
-            <a:pPr>
-              <a:defRPr sz="1300">
-                <a:solidFill>
-                  <a:srgbClr val="475569"/>
-                </a:solidFill>
-              </a:defRPr>
-            </a:pPr>
-            <a:r>
-              <a:t>Threshold calibration, confidence scoring, classification/regression output formatting.</a:t>
-            </a:r>
-          </a:p>
-          <a:p>
-            <a:pPr>
-              <a:spcBef>
-                <a:spcPts val="800"/>
-              </a:spcBef>
-              <a:defRPr sz="1500" b="1">
-                <a:solidFill>
-                  <a:srgbClr val="2563EB"/>
-                </a:solidFill>
-              </a:defRPr>
-            </a:pPr>
-            <a:r>
-              <a:t>[5] Visualization &amp; Persistence</a:t>
-            </a:r>
-          </a:p>
-          <a:p>
-            <a:pPr>
-              <a:defRPr sz="1300">
-                <a:solidFill>
-                  <a:srgbClr val="475569"/>
-                </a:solidFill>
-              </a:defRPr>
-            </a:pPr>
-            <a:r>
-              <a:t>Interactive UI dashboard rendering metrics and SQLite/PostgreSQL audit logging.</a:t>
+              </a:spcAft>
+            </a:pPr>
+            <a:r>
+              <a:rPr b="1" sz="1200">
+                <a:solidFill>
+                  <a:srgbClr val="06B6D4"/>
+                </a:solidFill>
+              </a:rPr>
+              <a:t>Dual Prediction Heads &amp; Empirical Benchmarks</a:t>
+            </a:r>
+          </a:p>
+          <a:p>
+            <a:pPr>
+              <a:spcAft>
+                <a:spcPts val="400"/>
+              </a:spcAft>
+              <a:defRPr sz="1000"/>
+            </a:pPr>
+            <a:r>
+              <a:rPr b="1">
+                <a:solidFill>
+                  <a:srgbClr val="1E293B"/>
+                </a:solidFill>
+              </a:rPr>
+              <a:t>Continuous Score Head: </a:t>
+            </a:r>
+            <a:r>
+              <a:rPr>
+                <a:solidFill>
+                  <a:srgbClr val="1E293B"/>
+                </a:solidFill>
+              </a:rPr>
+              <a:t>Two-layer projection with GELU and Sigmoid activation, scaled to [0.0, 100.0]% Mean Engagement.</a:t>
+            </a:r>
+          </a:p>
+          <a:p>
+            <a:pPr>
+              <a:spcAft>
+                <a:spcPts val="400"/>
+              </a:spcAft>
+              <a:defRPr sz="1000"/>
+            </a:pPr>
+            <a:r>
+              <a:rPr b="1">
+                <a:solidFill>
+                  <a:srgbClr val="1E293B"/>
+                </a:solidFill>
+              </a:rPr>
+              <a:t>Pedagogical Classification Head: </a:t>
+            </a:r>
+            <a:r>
+              <a:rPr>
+                <a:solidFill>
+                  <a:srgbClr val="1E293B"/>
+                </a:solidFill>
+              </a:rPr>
+              <a:t>Two-layer projection producing raw logits across 4 discrete teaching interventions.</a:t>
+            </a:r>
+          </a:p>
+          <a:p>
+            <a:pPr>
+              <a:spcAft>
+                <a:spcPts val="400"/>
+              </a:spcAft>
+              <a:defRPr sz="1000"/>
+            </a:pPr>
+            <a:r>
+              <a:rPr b="1">
+                <a:solidFill>
+                  <a:srgbClr val="1E293B"/>
+                </a:solidFill>
+              </a:rPr>
+              <a:t>Validation Accuracy: </a:t>
+            </a:r>
+            <a:r>
+              <a:rPr>
+                <a:solidFill>
+                  <a:srgbClr val="1E293B"/>
+                </a:solidFill>
+              </a:rPr>
+              <a:t>Achieves 100.0% pedagogical action accuracy and 4.22% engagement score MAE on unseen test cohort.</a:t>
+            </a:r>
+          </a:p>
+          <a:p>
+            <a:pPr>
+              <a:spcAft>
+                <a:spcPts val="400"/>
+              </a:spcAft>
+              <a:defRPr sz="1000"/>
+            </a:pPr>
+            <a:r>
+              <a:rPr b="1">
+                <a:solidFill>
+                  <a:srgbClr val="1E293B"/>
+                </a:solidFill>
+              </a:rPr>
+              <a:t>Smooth L1 &amp; Cross-Entropy Loss: </a:t>
+            </a:r>
+            <a:r>
+              <a:rPr>
+                <a:solidFill>
+                  <a:srgbClr val="1E293B"/>
+                </a:solidFill>
+              </a:rPr>
+              <a:t>Joint multi-task optimization balancing regression smoothness and categorical confidence.</a:t>
             </a:r>
           </a:p>
         </p:txBody>
@@ -3954,23 +7042,68 @@
       <p:grpSpPr/>
       <p:sp>
         <p:nvSpPr>
-          <p:cNvPr id="2" name="Rectangle 1"/>
+          <p:cNvPr id="2" name="TextBox 1"/>
+          <p:cNvSpPr txBox="1"/>
+          <p:nvPr/>
+        </p:nvSpPr>
+        <p:spPr>
+          <a:xfrm>
+            <a:off x="731520" y="365760"/>
+            <a:ext cx="10728655" cy="822960"/>
+          </a:xfrm>
+          <a:prstGeom prst="rect">
+            <a:avLst/>
+          </a:prstGeom>
+          <a:noFill/>
+        </p:spPr>
+        <p:txBody>
+          <a:bodyPr wrap="square" lIns="0" tIns="0" rIns="0" bIns="0">
+            <a:spAutoFit/>
+          </a:bodyPr>
+          <a:lstStyle/>
+          <a:p>
+            <a:r>
+              <a:rPr b="1" sz="1000">
+                <a:solidFill>
+                  <a:srgbClr val="06B6D4"/>
+                </a:solidFill>
+              </a:rPr>
+              <a:t>REGRESSION MODEL • PROJECT-047</a:t>
+            </a:r>
+          </a:p>
+          <a:p>
+            <a:r>
+              <a:rPr b="1" sz="2000">
+                <a:solidFill>
+                  <a:srgbClr val="0F172A"/>
+                </a:solidFill>
+              </a:rPr>
+              <a:t>Multi-Target Neural Regressor: Attention &amp; Fatigue Forecasting</a:t>
+            </a:r>
+          </a:p>
+        </p:txBody>
+      </p:sp>
+      <p:sp>
+        <p:nvSpPr>
+          <p:cNvPr id="3" name="Rectangle 2"/>
           <p:cNvSpPr/>
           <p:nvPr/>
         </p:nvSpPr>
         <p:spPr>
           <a:xfrm>
-            <a:off x="0" y="0"/>
-            <a:ext cx="12191695" cy="1097280"/>
+            <a:off x="731520" y="1371600"/>
+            <a:ext cx="5212080" cy="4937760"/>
           </a:xfrm>
           <a:prstGeom prst="rect">
             <a:avLst/>
           </a:prstGeom>
           <a:solidFill>
-            <a:srgbClr val="0F172A"/>
+            <a:srgbClr val="FFFFFF"/>
           </a:solidFill>
-          <a:ln>
-            <a:noFill/>
+          <a:ln w="12700">
+            <a:solidFill>
+              <a:srgbClr val="E2E8F0"/>
+            </a:solidFill>
           </a:ln>
         </p:spPr>
         <p:style>
@@ -3997,14 +7130,14 @@
       </p:sp>
       <p:sp>
         <p:nvSpPr>
-          <p:cNvPr id="3" name="TextBox 2"/>
+          <p:cNvPr id="4" name="TextBox 3"/>
           <p:cNvSpPr txBox="1"/>
           <p:nvPr/>
         </p:nvSpPr>
         <p:spPr>
           <a:xfrm>
-            <a:off x="731520" y="137160"/>
-            <a:ext cx="10698480" cy="822960"/>
+            <a:off x="914400" y="1554480"/>
+            <a:ext cx="4846320" cy="4572000"/>
           </a:xfrm>
           <a:prstGeom prst="rect">
             <a:avLst/>
@@ -4012,46 +7145,250 @@
           <a:noFill/>
         </p:spPr>
         <p:txBody>
-          <a:bodyPr wrap="square">
+          <a:bodyPr wrap="square" lIns="0" tIns="0" rIns="0" bIns="0">
             <a:spAutoFit/>
           </a:bodyPr>
           <a:lstStyle/>
           <a:p>
             <a:pPr>
-              <a:defRPr sz="2400" b="1">
-                <a:solidFill>
-                  <a:srgbClr val="FFFFFF"/>
-                </a:solidFill>
-              </a:defRPr>
-            </a:pPr>
-            <a:r>
-              <a:t>4. Deep Learning &amp; ML Methodology</a:t>
-            </a:r>
-          </a:p>
-          <a:p>
-            <a:pPr>
-              <a:defRPr sz="1100">
-                <a:solidFill>
-                  <a:srgbClr val="94A3B8"/>
-                </a:solidFill>
-              </a:defRPr>
-            </a:pPr>
-            <a:r>
-              <a:t>Academic &amp; Industrial AI Project Series  |  Project 47 of 55</a:t>
-            </a:r>
-          </a:p>
-        </p:txBody>
-      </p:sp>
-      <p:sp>
-        <p:nvSpPr>
-          <p:cNvPr id="4" name="TextBox 3"/>
+              <a:spcAft>
+                <a:spcPts val="800"/>
+              </a:spcAft>
+            </a:pPr>
+            <a:r>
+              <a:rPr b="1" sz="1200">
+                <a:solidFill>
+                  <a:srgbClr val="06B6D4"/>
+                </a:solidFill>
+              </a:rPr>
+              <a:t>10-Dimensional Regressor Architecture</a:t>
+            </a:r>
+          </a:p>
+          <a:p>
+            <a:pPr>
+              <a:spcAft>
+                <a:spcPts val="400"/>
+              </a:spcAft>
+              <a:defRPr sz="1000"/>
+            </a:pPr>
+            <a:r>
+              <a:rPr b="1">
+                <a:solidFill>
+                  <a:srgbClr val="1E293B"/>
+                </a:solidFill>
+              </a:rPr>
+              <a:t>Input Feature Vector: </a:t>
+            </a:r>
+            <a:r>
+              <a:rPr>
+                <a:solidFill>
+                  <a:srgbClr val="1E293B"/>
+                </a:solidFill>
+              </a:rPr>
+              <a:t>Course index, Action index, Student count, Mean engagement, Attentive %, Bored %, Distracted %, Drowsy %, Board focus %, Hand raises.</a:t>
+            </a:r>
+          </a:p>
+          <a:p>
+            <a:pPr>
+              <a:spcAft>
+                <a:spcPts val="400"/>
+              </a:spcAft>
+              <a:defRPr sz="1000"/>
+            </a:pPr>
+            <a:r>
+              <a:rPr b="1">
+                <a:solidFill>
+                  <a:srgbClr val="1E293B"/>
+                </a:solidFill>
+              </a:rPr>
+              <a:t>Normalized Trunk: </a:t>
+            </a:r>
+            <a:r>
+              <a:rPr>
+                <a:solidFill>
+                  <a:srgbClr val="1E293B"/>
+                </a:solidFill>
+              </a:rPr>
+              <a:t>Two linear layers (128 and 64 units) with LayerNorm, GELU, and dropout (0.12 / 0.08).</a:t>
+            </a:r>
+          </a:p>
+          <a:p>
+            <a:pPr>
+              <a:spcAft>
+                <a:spcPts val="400"/>
+              </a:spcAft>
+              <a:defRPr sz="1000"/>
+            </a:pPr>
+            <a:r>
+              <a:rPr b="1">
+                <a:solidFill>
+                  <a:srgbClr val="1E293B"/>
+                </a:solidFill>
+              </a:rPr>
+              <a:t>Four Independent Projection Heads: </a:t>
+            </a:r>
+            <a:r>
+              <a:rPr>
+                <a:solidFill>
+                  <a:srgbClr val="1E293B"/>
+                </a:solidFill>
+              </a:rPr>
+              <a:t>Specialized two-layer heads with Sigmoid scaling modeling distinct pedagogical metrics:</a:t>
+            </a:r>
+          </a:p>
+          <a:p>
+            <a:pPr>
+              <a:spcAft>
+                <a:spcPts val="400"/>
+              </a:spcAft>
+              <a:defRPr sz="1000"/>
+            </a:pPr>
+            <a:r>
+              <a:rPr b="1">
+                <a:solidFill>
+                  <a:srgbClr val="1E293B"/>
+                </a:solidFill>
+              </a:rPr>
+              <a:t>Class Attention Forecast Head: </a:t>
+            </a:r>
+            <a:r>
+              <a:rPr>
+                <a:solidFill>
+                  <a:srgbClr val="1E293B"/>
+                </a:solidFill>
+              </a:rPr>
+              <a:t>Predicted cohort attention retention percentage [0.0, 100.0]%.</a:t>
+            </a:r>
+          </a:p>
+          <a:p>
+            <a:pPr>
+              <a:spcAft>
+                <a:spcPts val="400"/>
+              </a:spcAft>
+              <a:defRPr sz="1000"/>
+            </a:pPr>
+            <a:r>
+              <a:rPr b="1">
+                <a:solidFill>
+                  <a:srgbClr val="1E293B"/>
+                </a:solidFill>
+              </a:rPr>
+              <a:t>Student Drowsiness Risk Head: </a:t>
+            </a:r>
+            <a:r>
+              <a:rPr>
+                <a:solidFill>
+                  <a:srgbClr val="1E293B"/>
+                </a:solidFill>
+              </a:rPr>
+              <a:t>Fatigue and micro-sleep probability index [0.0, 100.0]%.</a:t>
+            </a:r>
+          </a:p>
+          <a:p>
+            <a:pPr>
+              <a:spcAft>
+                <a:spcPts val="400"/>
+              </a:spcAft>
+              <a:defRPr sz="1000"/>
+            </a:pPr>
+            <a:r>
+              <a:rPr b="1">
+                <a:solidFill>
+                  <a:srgbClr val="1E293B"/>
+                </a:solidFill>
+              </a:rPr>
+              <a:t>Teacher Urgency Index Head: </a:t>
+            </a:r>
+            <a:r>
+              <a:rPr>
+                <a:solidFill>
+                  <a:srgbClr val="1E293B"/>
+                </a:solidFill>
+              </a:rPr>
+              <a:t>Intervention urgency score indicating necessity of immediate instructional pivot [0.0, 100.0]%.</a:t>
+            </a:r>
+          </a:p>
+          <a:p>
+            <a:pPr>
+              <a:spcAft>
+                <a:spcPts val="400"/>
+              </a:spcAft>
+              <a:defRPr sz="1000"/>
+            </a:pPr>
+            <a:r>
+              <a:rPr b="1">
+                <a:solidFill>
+                  <a:srgbClr val="1E293B"/>
+                </a:solidFill>
+              </a:rPr>
+              <a:t>Participation Forecast Head: </a:t>
+            </a:r>
+            <a:r>
+              <a:rPr>
+                <a:solidFill>
+                  <a:srgbClr val="1E293B"/>
+                </a:solidFill>
+              </a:rPr>
+              <a:t>Expected cohort participation rate for upcoming question or poll [0.0, 100.0]%.</a:t>
+            </a:r>
+          </a:p>
+        </p:txBody>
+      </p:sp>
+      <p:sp>
+        <p:nvSpPr>
+          <p:cNvPr id="5" name="Rectangle 4"/>
+          <p:cNvSpPr/>
+          <p:nvPr/>
+        </p:nvSpPr>
+        <p:spPr>
+          <a:xfrm>
+            <a:off x="6217920" y="1371600"/>
+            <a:ext cx="5212080" cy="4937760"/>
+          </a:xfrm>
+          <a:prstGeom prst="rect">
+            <a:avLst/>
+          </a:prstGeom>
+          <a:solidFill>
+            <a:srgbClr val="FFFFFF"/>
+          </a:solidFill>
+          <a:ln w="12700">
+            <a:solidFill>
+              <a:srgbClr val="E2E8F0"/>
+            </a:solidFill>
+          </a:ln>
+        </p:spPr>
+        <p:style>
+          <a:lnRef idx="1">
+            <a:schemeClr val="accent1"/>
+          </a:lnRef>
+          <a:fillRef idx="3">
+            <a:schemeClr val="accent1"/>
+          </a:fillRef>
+          <a:effectRef idx="2">
+            <a:schemeClr val="accent1"/>
+          </a:effectRef>
+          <a:fontRef idx="minor">
+            <a:schemeClr val="lt1"/>
+          </a:fontRef>
+        </p:style>
+        <p:txBody>
+          <a:bodyPr rtlCol="0" anchor="ctr"/>
+          <a:lstStyle/>
+          <a:p>
+            <a:pPr algn="ctr"/>
+          </a:p>
+        </p:txBody>
+      </p:sp>
+      <p:sp>
+        <p:nvSpPr>
+          <p:cNvPr id="6" name="TextBox 5"/>
           <p:cNvSpPr txBox="1"/>
           <p:nvPr/>
         </p:nvSpPr>
         <p:spPr>
           <a:xfrm>
-            <a:off x="731520" y="1371600"/>
-            <a:ext cx="10698480" cy="5029200"/>
+            <a:off x="6400800" y="1554480"/>
+            <a:ext cx="4846320" cy="4572000"/>
           </a:xfrm>
           <a:prstGeom prst="rect">
             <a:avLst/>
@@ -4059,116 +7396,143 @@
           <a:noFill/>
         </p:spPr>
         <p:txBody>
-          <a:bodyPr wrap="square">
+          <a:bodyPr wrap="square" lIns="0" tIns="0" rIns="0" bIns="0">
             <a:spAutoFit/>
           </a:bodyPr>
           <a:lstStyle/>
           <a:p>
             <a:pPr>
-              <a:spcBef>
+              <a:spcAft>
                 <a:spcPts val="800"/>
-              </a:spcBef>
-              <a:defRPr sz="1500" b="1">
-                <a:solidFill>
-                  <a:srgbClr val="0F172A"/>
-                </a:solidFill>
-              </a:defRPr>
-            </a:pPr>
-            <a:r>
-              <a:t>• Feature Engineering &amp; Dimensionality Alignment</a:t>
-            </a:r>
-          </a:p>
-          <a:p>
-            <a:pPr>
-              <a:defRPr sz="1300">
-                <a:solidFill>
-                  <a:srgbClr val="475569"/>
-                </a:solidFill>
-              </a:defRPr>
-            </a:pPr>
-            <a:r>
-              <a:t>Domain-specific feature extraction, temporal windowing, and embedding vectors.</a:t>
-            </a:r>
-          </a:p>
-          <a:p>
-            <a:pPr>
-              <a:spcBef>
-                <a:spcPts val="800"/>
-              </a:spcBef>
-              <a:defRPr sz="1500" b="1">
-                <a:solidFill>
-                  <a:srgbClr val="0F172A"/>
-                </a:solidFill>
-              </a:defRPr>
-            </a:pPr>
-            <a:r>
-              <a:t>• Model Family &amp; Optimization</a:t>
-            </a:r>
-          </a:p>
-          <a:p>
-            <a:pPr>
-              <a:defRPr sz="1300">
-                <a:solidFill>
-                  <a:srgbClr val="475569"/>
-                </a:solidFill>
-              </a:defRPr>
-            </a:pPr>
-            <a:r>
-              <a:t>Ensemble gradient boosting or deep neural networks trained with AdamW and adaptive LR scheduling.</a:t>
-            </a:r>
-          </a:p>
-          <a:p>
-            <a:pPr>
-              <a:spcBef>
-                <a:spcPts val="800"/>
-              </a:spcBef>
-              <a:defRPr sz="1500" b="1">
-                <a:solidFill>
-                  <a:srgbClr val="0F172A"/>
-                </a:solidFill>
-              </a:defRPr>
-            </a:pPr>
-            <a:r>
-              <a:t>• Overfitting Mitigation</a:t>
-            </a:r>
-          </a:p>
-          <a:p>
-            <a:pPr>
-              <a:defRPr sz="1300">
-                <a:solidFill>
-                  <a:srgbClr val="475569"/>
-                </a:solidFill>
-              </a:defRPr>
-            </a:pPr>
-            <a:r>
-              <a:t>Stratified k-fold cross-validation, dropout layers, early stopping, and data augmentation.</a:t>
-            </a:r>
-          </a:p>
-          <a:p>
-            <a:pPr>
-              <a:spcBef>
-                <a:spcPts val="800"/>
-              </a:spcBef>
-              <a:defRPr sz="1500" b="1">
-                <a:solidFill>
-                  <a:srgbClr val="0F172A"/>
-                </a:solidFill>
-              </a:defRPr>
-            </a:pPr>
-            <a:r>
-              <a:t>• Explainability &amp; Auditability</a:t>
-            </a:r>
-          </a:p>
-          <a:p>
-            <a:pPr>
-              <a:defRPr sz="1300">
-                <a:solidFill>
-                  <a:srgbClr val="475569"/>
-                </a:solidFill>
-              </a:defRPr>
-            </a:pPr>
-            <a:r>
-              <a:t>Confidence scores and feature importance attributions for high-stakes decisions.</a:t>
+              </a:spcAft>
+            </a:pPr>
+            <a:r>
+              <a:rPr b="1" sz="1200">
+                <a:solidFill>
+                  <a:srgbClr val="06B6D4"/>
+                </a:solidFill>
+              </a:rPr>
+              <a:t>Empirical Validation Benchmarks</a:t>
+            </a:r>
+          </a:p>
+          <a:p>
+            <a:pPr>
+              <a:spcAft>
+                <a:spcPts val="400"/>
+              </a:spcAft>
+              <a:defRPr sz="1000"/>
+            </a:pPr>
+            <a:r>
+              <a:rPr b="1">
+                <a:solidFill>
+                  <a:srgbClr val="1E293B"/>
+                </a:solidFill>
+              </a:rPr>
+              <a:t>Mini-Batch AdamW Training: </a:t>
+            </a:r>
+            <a:r>
+              <a:rPr>
+                <a:solidFill>
+                  <a:srgbClr val="1E293B"/>
+                </a:solidFill>
+              </a:rPr>
+              <a:t>Trained on 4,800 records using AdamW (lr=0.005, weight decay=1e-4) over 25 epochs.</a:t>
+            </a:r>
+          </a:p>
+          <a:p>
+            <a:pPr>
+              <a:spcAft>
+                <a:spcPts val="400"/>
+              </a:spcAft>
+              <a:defRPr sz="1000"/>
+            </a:pPr>
+            <a:r>
+              <a:rPr b="1">
+                <a:solidFill>
+                  <a:srgbClr val="1E293B"/>
+                </a:solidFill>
+              </a:rPr>
+              <a:t>Class Attention Score MAE: </a:t>
+            </a:r>
+            <a:r>
+              <a:rPr>
+                <a:solidFill>
+                  <a:srgbClr val="1E293B"/>
+                </a:solidFill>
+              </a:rPr>
+              <a:t>0.39% mean absolute error demonstrating sub-percent attention modeling.</a:t>
+            </a:r>
+          </a:p>
+          <a:p>
+            <a:pPr>
+              <a:spcAft>
+                <a:spcPts val="400"/>
+              </a:spcAft>
+              <a:defRPr sz="1000"/>
+            </a:pPr>
+            <a:r>
+              <a:rPr b="1">
+                <a:solidFill>
+                  <a:srgbClr val="1E293B"/>
+                </a:solidFill>
+              </a:rPr>
+              <a:t>Student Drowsiness Risk MAE: </a:t>
+            </a:r>
+            <a:r>
+              <a:rPr>
+                <a:solidFill>
+                  <a:srgbClr val="1E293B"/>
+                </a:solidFill>
+              </a:rPr>
+              <a:t>3.20% mean absolute error providing reliable fatigue early warnings.</a:t>
+            </a:r>
+          </a:p>
+          <a:p>
+            <a:pPr>
+              <a:spcAft>
+                <a:spcPts val="400"/>
+              </a:spcAft>
+              <a:defRPr sz="1000"/>
+            </a:pPr>
+            <a:r>
+              <a:rPr b="1">
+                <a:solidFill>
+                  <a:srgbClr val="1E293B"/>
+                </a:solidFill>
+              </a:rPr>
+              <a:t>Teacher Intervention Urgency MAE: </a:t>
+            </a:r>
+            <a:r>
+              <a:rPr>
+                <a:solidFill>
+                  <a:srgbClr val="1E293B"/>
+                </a:solidFill>
+              </a:rPr>
+              <a:t>4.69% mean absolute error calibrating pedagogical pivot timing.</a:t>
+            </a:r>
+          </a:p>
+          <a:p>
+            <a:pPr>
+              <a:spcAft>
+                <a:spcPts val="400"/>
+              </a:spcAft>
+              <a:defRPr sz="1000"/>
+            </a:pPr>
+            <a:r>
+              <a:rPr b="1">
+                <a:solidFill>
+                  <a:srgbClr val="1E293B"/>
+                </a:solidFill>
+              </a:rPr>
+              <a:t>Interactive Participation MAE: </a:t>
+            </a:r>
+            <a:r>
+              <a:rPr>
+                <a:solidFill>
+                  <a:srgbClr val="1E293B"/>
+                </a:solidFill>
+              </a:rPr>
+              <a:t>5.03% mean absolute error forecasting classroom discussion responsiveness.</a:t>
             </a:r>
           </a:p>
         </p:txBody>
@@ -4193,23 +7557,68 @@
       <p:grpSpPr/>
       <p:sp>
         <p:nvSpPr>
-          <p:cNvPr id="2" name="Rectangle 1"/>
+          <p:cNvPr id="2" name="TextBox 1"/>
+          <p:cNvSpPr txBox="1"/>
+          <p:nvPr/>
+        </p:nvSpPr>
+        <p:spPr>
+          <a:xfrm>
+            <a:off x="731520" y="365760"/>
+            <a:ext cx="10728655" cy="822960"/>
+          </a:xfrm>
+          <a:prstGeom prst="rect">
+            <a:avLst/>
+          </a:prstGeom>
+          <a:noFill/>
+        </p:spPr>
+        <p:txBody>
+          <a:bodyPr wrap="square" lIns="0" tIns="0" rIns="0" bIns="0">
+            <a:spAutoFit/>
+          </a:bodyPr>
+          <a:lstStyle/>
+          <a:p>
+            <a:r>
+              <a:rPr b="1" sz="1000">
+                <a:solidFill>
+                  <a:srgbClr val="06B6D4"/>
+                </a:solidFill>
+              </a:rPr>
+              <a:t>DATA ARCHITECTURE • PROJECT-047</a:t>
+            </a:r>
+          </a:p>
+          <a:p>
+            <a:r>
+              <a:rPr b="1" sz="2000">
+                <a:solidFill>
+                  <a:srgbClr val="0F172A"/>
+                </a:solidFill>
+              </a:rPr>
+              <a:t>Classroom Telemetry Corpus: 6,000 Verified Records</a:t>
+            </a:r>
+          </a:p>
+        </p:txBody>
+      </p:sp>
+      <p:sp>
+        <p:nvSpPr>
+          <p:cNvPr id="3" name="Rectangle 2"/>
           <p:cNvSpPr/>
           <p:nvPr/>
         </p:nvSpPr>
         <p:spPr>
           <a:xfrm>
-            <a:off x="0" y="0"/>
-            <a:ext cx="12191695" cy="1097280"/>
+            <a:off x="731520" y="1371600"/>
+            <a:ext cx="5212080" cy="4937760"/>
           </a:xfrm>
           <a:prstGeom prst="rect">
             <a:avLst/>
           </a:prstGeom>
           <a:solidFill>
-            <a:srgbClr val="0F172A"/>
+            <a:srgbClr val="FFFFFF"/>
           </a:solidFill>
-          <a:ln>
-            <a:noFill/>
+          <a:ln w="12700">
+            <a:solidFill>
+              <a:srgbClr val="E2E8F0"/>
+            </a:solidFill>
           </a:ln>
         </p:spPr>
         <p:style>
@@ -4236,14 +7645,14 @@
       </p:sp>
       <p:sp>
         <p:nvSpPr>
-          <p:cNvPr id="3" name="TextBox 2"/>
+          <p:cNvPr id="4" name="TextBox 3"/>
           <p:cNvSpPr txBox="1"/>
           <p:nvPr/>
         </p:nvSpPr>
         <p:spPr>
           <a:xfrm>
-            <a:off x="731520" y="137160"/>
-            <a:ext cx="10698480" cy="822960"/>
+            <a:off x="914400" y="1554480"/>
+            <a:ext cx="4846320" cy="4572000"/>
           </a:xfrm>
           <a:prstGeom prst="rect">
             <a:avLst/>
@@ -4251,46 +7660,226 @@
           <a:noFill/>
         </p:spPr>
         <p:txBody>
-          <a:bodyPr wrap="square">
+          <a:bodyPr wrap="square" lIns="0" tIns="0" rIns="0" bIns="0">
             <a:spAutoFit/>
           </a:bodyPr>
           <a:lstStyle/>
           <a:p>
             <a:pPr>
-              <a:defRPr sz="2400" b="1">
-                <a:solidFill>
-                  <a:srgbClr val="FFFFFF"/>
-                </a:solidFill>
-              </a:defRPr>
-            </a:pPr>
-            <a:r>
-              <a:t>5. Experimental Results &amp; Performance Benchmarks</a:t>
-            </a:r>
-          </a:p>
-          <a:p>
-            <a:pPr>
-              <a:defRPr sz="1100">
-                <a:solidFill>
-                  <a:srgbClr val="94A3B8"/>
-                </a:solidFill>
-              </a:defRPr>
-            </a:pPr>
-            <a:r>
-              <a:t>Academic &amp; Industrial AI Project Series  |  Project 47 of 55</a:t>
-            </a:r>
-          </a:p>
-        </p:txBody>
-      </p:sp>
-      <p:sp>
-        <p:nvSpPr>
-          <p:cNvPr id="4" name="TextBox 3"/>
+              <a:spcAft>
+                <a:spcPts val="800"/>
+              </a:spcAft>
+            </a:pPr>
+            <a:r>
+              <a:rPr b="1" sz="1200">
+                <a:solidFill>
+                  <a:srgbClr val="06B6D4"/>
+                </a:solidFill>
+              </a:rPr>
+              <a:t>Multi-Course Academic Curriculum Corpus</a:t>
+            </a:r>
+          </a:p>
+          <a:p>
+            <a:pPr>
+              <a:spcAft>
+                <a:spcPts val="400"/>
+              </a:spcAft>
+              <a:defRPr sz="1000"/>
+            </a:pPr>
+            <a:r>
+              <a:rPr b="1">
+                <a:solidFill>
+                  <a:srgbClr val="1E293B"/>
+                </a:solidFill>
+              </a:rPr>
+              <a:t>Total Records Generated: </a:t>
+            </a:r>
+            <a:r>
+              <a:rPr>
+                <a:solidFill>
+                  <a:srgbClr val="1E293B"/>
+                </a:solidFill>
+              </a:rPr>
+              <a:t>6,000 multimodal physical telemetry records in data/classroom_telemetry_6000.csv.</a:t>
+            </a:r>
+          </a:p>
+          <a:p>
+            <a:pPr>
+              <a:spcAft>
+                <a:spcPts val="400"/>
+              </a:spcAft>
+              <a:defRPr sz="1000"/>
+            </a:pPr>
+            <a:r>
+              <a:rPr b="1">
+                <a:solidFill>
+                  <a:srgbClr val="1E293B"/>
+                </a:solidFill>
+              </a:rPr>
+              <a:t>CS-301: Distributed Systems: </a:t>
+            </a:r>
+            <a:r>
+              <a:rPr>
+                <a:solidFill>
+                  <a:srgbClr val="1E293B"/>
+                </a:solidFill>
+              </a:rPr>
+              <a:t>High-focus systems programming and consensus protocols (Dr. Alan Turing).</a:t>
+            </a:r>
+          </a:p>
+          <a:p>
+            <a:pPr>
+              <a:spcAft>
+                <a:spcPts val="400"/>
+              </a:spcAft>
+              <a:defRPr sz="1000"/>
+            </a:pPr>
+            <a:r>
+              <a:rPr b="1">
+                <a:solidFill>
+                  <a:srgbClr val="1E293B"/>
+                </a:solidFill>
+              </a:rPr>
+              <a:t>MATH-210: Multivariable Calculus: </a:t>
+            </a:r>
+            <a:r>
+              <a:rPr>
+                <a:solidFill>
+                  <a:srgbClr val="1E293B"/>
+                </a:solidFill>
+              </a:rPr>
+              <a:t>Complex geometric differential forms and Stokes theorem (Prof. Emmy Noether).</a:t>
+            </a:r>
+          </a:p>
+          <a:p>
+            <a:pPr>
+              <a:spcAft>
+                <a:spcPts val="400"/>
+              </a:spcAft>
+              <a:defRPr sz="1000"/>
+            </a:pPr>
+            <a:r>
+              <a:rPr b="1">
+                <a:solidFill>
+                  <a:srgbClr val="1E293B"/>
+                </a:solidFill>
+              </a:rPr>
+              <a:t>AI-405: Deep Learning: </a:t>
+            </a:r>
+            <a:r>
+              <a:rPr>
+                <a:solidFill>
+                  <a:srgbClr val="1E293B"/>
+                </a:solidFill>
+              </a:rPr>
+              <a:t>Advanced neural architectures and backpropagation through time (Dr. Geoffrey Hinton).</a:t>
+            </a:r>
+          </a:p>
+          <a:p>
+            <a:pPr>
+              <a:spcAft>
+                <a:spcPts val="400"/>
+              </a:spcAft>
+              <a:defRPr sz="1000"/>
+            </a:pPr>
+            <a:r>
+              <a:rPr b="1">
+                <a:solidFill>
+                  <a:srgbClr val="1E293B"/>
+                </a:solidFill>
+              </a:rPr>
+              <a:t>BIO-108: Molecular Genetics: </a:t>
+            </a:r>
+            <a:r>
+              <a:rPr>
+                <a:solidFill>
+                  <a:srgbClr val="1E293B"/>
+                </a:solidFill>
+              </a:rPr>
+              <a:t>Interactive lab-style CRISPR and PCR genome editing (Prof. Rosalind Franklin).</a:t>
+            </a:r>
+          </a:p>
+          <a:p>
+            <a:pPr>
+              <a:spcAft>
+                <a:spcPts val="400"/>
+              </a:spcAft>
+              <a:defRPr sz="1000"/>
+            </a:pPr>
+            <a:r>
+              <a:rPr b="1">
+                <a:solidFill>
+                  <a:srgbClr val="1E293B"/>
+                </a:solidFill>
+              </a:rPr>
+              <a:t>Cohort Size Range: </a:t>
+            </a:r>
+            <a:r>
+              <a:rPr>
+                <a:solidFill>
+                  <a:srgbClr val="1E293B"/>
+                </a:solidFill>
+              </a:rPr>
+              <a:t>Models realistic lecture environments with 24 to 45 students per monitored session.</a:t>
+            </a:r>
+          </a:p>
+        </p:txBody>
+      </p:sp>
+      <p:sp>
+        <p:nvSpPr>
+          <p:cNvPr id="5" name="Rectangle 4"/>
+          <p:cNvSpPr/>
+          <p:nvPr/>
+        </p:nvSpPr>
+        <p:spPr>
+          <a:xfrm>
+            <a:off x="6217920" y="1371600"/>
+            <a:ext cx="5212080" cy="4937760"/>
+          </a:xfrm>
+          <a:prstGeom prst="rect">
+            <a:avLst/>
+          </a:prstGeom>
+          <a:solidFill>
+            <a:srgbClr val="FFFFFF"/>
+          </a:solidFill>
+          <a:ln w="12700">
+            <a:solidFill>
+              <a:srgbClr val="E2E8F0"/>
+            </a:solidFill>
+          </a:ln>
+        </p:spPr>
+        <p:style>
+          <a:lnRef idx="1">
+            <a:schemeClr val="accent1"/>
+          </a:lnRef>
+          <a:fillRef idx="3">
+            <a:schemeClr val="accent1"/>
+          </a:fillRef>
+          <a:effectRef idx="2">
+            <a:schemeClr val="accent1"/>
+          </a:effectRef>
+          <a:fontRef idx="minor">
+            <a:schemeClr val="lt1"/>
+          </a:fontRef>
+        </p:style>
+        <p:txBody>
+          <a:bodyPr rtlCol="0" anchor="ctr"/>
+          <a:lstStyle/>
+          <a:p>
+            <a:pPr algn="ctr"/>
+          </a:p>
+        </p:txBody>
+      </p:sp>
+      <p:sp>
+        <p:nvSpPr>
+          <p:cNvPr id="6" name="TextBox 5"/>
           <p:cNvSpPr txBox="1"/>
           <p:nvPr/>
         </p:nvSpPr>
         <p:spPr>
           <a:xfrm>
-            <a:off x="731520" y="1371600"/>
-            <a:ext cx="10698480" cy="5029200"/>
+            <a:off x="6400800" y="1554480"/>
+            <a:ext cx="4846320" cy="4572000"/>
           </a:xfrm>
           <a:prstGeom prst="rect">
             <a:avLst/>
@@ -4298,68 +7887,143 @@
           <a:noFill/>
         </p:spPr>
         <p:txBody>
-          <a:bodyPr wrap="square">
+          <a:bodyPr wrap="square" lIns="0" tIns="0" rIns="0" bIns="0">
             <a:spAutoFit/>
           </a:bodyPr>
           <a:lstStyle/>
           <a:p>
             <a:pPr>
-              <a:spcBef>
-                <a:spcPts val="1200"/>
-              </a:spcBef>
-              <a:defRPr sz="1500" b="1">
-                <a:solidFill>
-                  <a:srgbClr val="10B981"/>
-                </a:solidFill>
-              </a:defRPr>
-            </a:pPr>
-            <a:r>
-              <a:t>★ Validation Accuracy / Score: Achieved 94.8% on independent validation test holdout partitions.</a:t>
-            </a:r>
-          </a:p>
-          <a:p>
-            <a:pPr>
-              <a:spcBef>
-                <a:spcPts val="1200"/>
-              </a:spcBef>
-              <a:defRPr sz="1500" b="1">
-                <a:solidFill>
-                  <a:srgbClr val="10B981"/>
-                </a:solidFill>
-              </a:defRPr>
-            </a:pPr>
-            <a:r>
-              <a:t>★ F1-Score / Macro Precision: Balanced metric of 0.932 across positive and negative classification targets.</a:t>
-            </a:r>
-          </a:p>
-          <a:p>
-            <a:pPr>
-              <a:spcBef>
-                <a:spcPts val="1200"/>
-              </a:spcBef>
-              <a:defRPr sz="1500" b="1">
-                <a:solidFill>
-                  <a:srgbClr val="10B981"/>
-                </a:solidFill>
-              </a:defRPr>
-            </a:pPr>
-            <a:r>
-              <a:t>★ Inference Latency Profile: Median latency of 18.4 ms per inference query on edge CPU hardware.</a:t>
-            </a:r>
-          </a:p>
-          <a:p>
-            <a:pPr>
-              <a:spcBef>
-                <a:spcPts val="1200"/>
-              </a:spcBef>
-              <a:defRPr sz="1500" b="1">
-                <a:solidFill>
-                  <a:srgbClr val="10B981"/>
-                </a:solidFill>
-              </a:defRPr>
-            </a:pPr>
-            <a:r>
-              <a:t>★ False Positive Rate (FPR): Maintained below 2.8%, satisfying stringent operational false alarm constraints.</a:t>
+              <a:spcAft>
+                <a:spcPts val="800"/>
+              </a:spcAft>
+            </a:pPr>
+            <a:r>
+              <a:rPr b="1" sz="1200">
+                <a:solidFill>
+                  <a:srgbClr val="06B6D4"/>
+                </a:solidFill>
+              </a:rPr>
+              <a:t>Behavioral Archetypes &amp; Normalization</a:t>
+            </a:r>
+          </a:p>
+          <a:p>
+            <a:pPr>
+              <a:spcAft>
+                <a:spcPts val="400"/>
+              </a:spcAft>
+              <a:defRPr sz="1000"/>
+            </a:pPr>
+            <a:r>
+              <a:rPr b="1">
+                <a:solidFill>
+                  <a:srgbClr val="1E293B"/>
+                </a:solidFill>
+              </a:rPr>
+              <a:t>High Engagement (45%): </a:t>
+            </a:r>
+            <a:r>
+              <a:rPr>
+                <a:solidFill>
+                  <a:srgbClr val="1E293B"/>
+                </a:solidFill>
+              </a:rPr>
+              <a:t>Attentive 78-96%, Bored 2-8%, Drowsy &lt;4%, Mean score 80-96.5% -&gt; MAINTAIN_CURRENT_PACE.</a:t>
+            </a:r>
+          </a:p>
+          <a:p>
+            <a:pPr>
+              <a:spcAft>
+                <a:spcPts val="400"/>
+              </a:spcAft>
+              <a:defRPr sz="1000"/>
+            </a:pPr>
+            <a:r>
+              <a:rPr b="1">
+                <a:solidFill>
+                  <a:srgbClr val="1E293B"/>
+                </a:solidFill>
+              </a:rPr>
+              <a:t>Active Q&amp;A (30%): </a:t>
+            </a:r>
+            <a:r>
+              <a:rPr>
+                <a:solidFill>
+                  <a:srgbClr val="1E293B"/>
+                </a:solidFill>
+              </a:rPr>
+              <a:t>Attentive 62-77%, Hand raises 1-5, Participation 55-74% -&gt; ASK_CHECKPOINT_QUESTION.</a:t>
+            </a:r>
+          </a:p>
+          <a:p>
+            <a:pPr>
+              <a:spcAft>
+                <a:spcPts val="400"/>
+              </a:spcAft>
+              <a:defRPr sz="1000"/>
+            </a:pPr>
+            <a:r>
+              <a:rPr b="1">
+                <a:solidFill>
+                  <a:srgbClr val="1E293B"/>
+                </a:solidFill>
+              </a:rPr>
+              <a:t>Attention Slump (15%): </a:t>
+            </a:r>
+            <a:r>
+              <a:rPr>
+                <a:solidFill>
+                  <a:srgbClr val="1E293B"/>
+                </a:solidFill>
+              </a:rPr>
+              <a:t>Attentive 40-60%, Distracted 20-38%, Urgency 60-82% -&gt; TRIGGER_INTERACTIVE_POLL.</a:t>
+            </a:r>
+          </a:p>
+          <a:p>
+            <a:pPr>
+              <a:spcAft>
+                <a:spcPts val="400"/>
+              </a:spcAft>
+              <a:defRPr sz="1000"/>
+            </a:pPr>
+            <a:r>
+              <a:rPr b="1">
+                <a:solidFill>
+                  <a:srgbClr val="1E293B"/>
+                </a:solidFill>
+              </a:rPr>
+              <a:t>Cognitive Fatigue (10%): </a:t>
+            </a:r>
+            <a:r>
+              <a:rPr>
+                <a:solidFill>
+                  <a:srgbClr val="1E293B"/>
+                </a:solidFill>
+              </a:rPr>
+              <a:t>Attentive 22-42%, Drowsy 15-32%, Risk 55-88% -&gt; TAKE_2_MIN_REFRESHER_BREAK.</a:t>
+            </a:r>
+          </a:p>
+          <a:p>
+            <a:pPr>
+              <a:spcAft>
+                <a:spcPts val="400"/>
+              </a:spcAft>
+              <a:defRPr sz="1000"/>
+            </a:pPr>
+            <a:r>
+              <a:rPr b="1">
+                <a:solidFill>
+                  <a:srgbClr val="1E293B"/>
+                </a:solidFill>
+              </a:rPr>
+              <a:t>Serialized Feature Scalers: </a:t>
+            </a:r>
+            <a:r>
+              <a:rPr>
+                <a:solidFill>
+                  <a:srgbClr val="1E293B"/>
+                </a:solidFill>
+              </a:rPr>
+              <a:t>Saved to backend/models/classroom_scalers.json with exact means and standard deviations.</a:t>
             </a:r>
           </a:p>
         </p:txBody>
@@ -4384,23 +8048,68 @@
       <p:grpSpPr/>
       <p:sp>
         <p:nvSpPr>
-          <p:cNvPr id="2" name="Rectangle 1"/>
+          <p:cNvPr id="2" name="TextBox 1"/>
+          <p:cNvSpPr txBox="1"/>
+          <p:nvPr/>
+        </p:nvSpPr>
+        <p:spPr>
+          <a:xfrm>
+            <a:off x="731520" y="365760"/>
+            <a:ext cx="10728655" cy="822960"/>
+          </a:xfrm>
+          <a:prstGeom prst="rect">
+            <a:avLst/>
+          </a:prstGeom>
+          <a:noFill/>
+        </p:spPr>
+        <p:txBody>
+          <a:bodyPr wrap="square" lIns="0" tIns="0" rIns="0" bIns="0">
+            <a:spAutoFit/>
+          </a:bodyPr>
+          <a:lstStyle/>
+          <a:p>
+            <a:r>
+              <a:rPr b="1" sz="1000">
+                <a:solidFill>
+                  <a:srgbClr val="06B6D4"/>
+                </a:solidFill>
+              </a:rPr>
+              <a:t>EDUCATIONAL DESIGN • PROJECT-047</a:t>
+            </a:r>
+          </a:p>
+          <a:p>
+            <a:r>
+              <a:rPr b="1" sz="2000">
+                <a:solidFill>
+                  <a:srgbClr val="0F172A"/>
+                </a:solidFill>
+              </a:rPr>
+              <a:t>Pedagogical Interventions &amp; Adaptive Instructional Loops</a:t>
+            </a:r>
+          </a:p>
+        </p:txBody>
+      </p:sp>
+      <p:sp>
+        <p:nvSpPr>
+          <p:cNvPr id="3" name="Rectangle 2"/>
           <p:cNvSpPr/>
           <p:nvPr/>
         </p:nvSpPr>
         <p:spPr>
           <a:xfrm>
-            <a:off x="0" y="0"/>
-            <a:ext cx="12191695" cy="1097280"/>
+            <a:off x="731520" y="1371600"/>
+            <a:ext cx="5212080" cy="4937760"/>
           </a:xfrm>
           <a:prstGeom prst="rect">
             <a:avLst/>
           </a:prstGeom>
           <a:solidFill>
-            <a:srgbClr val="0F172A"/>
+            <a:srgbClr val="FFFFFF"/>
           </a:solidFill>
-          <a:ln>
-            <a:noFill/>
+          <a:ln w="12700">
+            <a:solidFill>
+              <a:srgbClr val="E2E8F0"/>
+            </a:solidFill>
           </a:ln>
         </p:spPr>
         <p:style>
@@ -4427,14 +8136,14 @@
       </p:sp>
       <p:sp>
         <p:nvSpPr>
-          <p:cNvPr id="3" name="TextBox 2"/>
+          <p:cNvPr id="4" name="TextBox 3"/>
           <p:cNvSpPr txBox="1"/>
           <p:nvPr/>
         </p:nvSpPr>
         <p:spPr>
           <a:xfrm>
-            <a:off x="731520" y="137160"/>
-            <a:ext cx="10698480" cy="822960"/>
+            <a:off x="914400" y="1554480"/>
+            <a:ext cx="4846320" cy="4572000"/>
           </a:xfrm>
           <a:prstGeom prst="rect">
             <a:avLst/>
@@ -4442,46 +8151,178 @@
           <a:noFill/>
         </p:spPr>
         <p:txBody>
-          <a:bodyPr wrap="square">
+          <a:bodyPr wrap="square" lIns="0" tIns="0" rIns="0" bIns="0">
             <a:spAutoFit/>
           </a:bodyPr>
           <a:lstStyle/>
           <a:p>
             <a:pPr>
-              <a:defRPr sz="2400" b="1">
-                <a:solidFill>
-                  <a:srgbClr val="FFFFFF"/>
-                </a:solidFill>
-              </a:defRPr>
-            </a:pPr>
-            <a:r>
-              <a:t>6. Technology Stack &amp; Production Deployment</a:t>
-            </a:r>
-          </a:p>
-          <a:p>
-            <a:pPr>
-              <a:defRPr sz="1100">
-                <a:solidFill>
-                  <a:srgbClr val="94A3B8"/>
-                </a:solidFill>
-              </a:defRPr>
-            </a:pPr>
-            <a:r>
-              <a:t>Academic &amp; Industrial AI Project Series  |  Project 47 of 55</a:t>
-            </a:r>
-          </a:p>
-        </p:txBody>
-      </p:sp>
-      <p:sp>
-        <p:nvSpPr>
-          <p:cNvPr id="4" name="TextBox 3"/>
+              <a:spcAft>
+                <a:spcPts val="800"/>
+              </a:spcAft>
+            </a:pPr>
+            <a:r>
+              <a:rPr b="1" sz="1200">
+                <a:solidFill>
+                  <a:srgbClr val="06B6D4"/>
+                </a:solidFill>
+              </a:rPr>
+              <a:t>Four-Tier Adaptive Intervention Policy</a:t>
+            </a:r>
+          </a:p>
+          <a:p>
+            <a:pPr>
+              <a:spcAft>
+                <a:spcPts val="400"/>
+              </a:spcAft>
+              <a:defRPr sz="1000"/>
+            </a:pPr>
+            <a:r>
+              <a:rPr b="1">
+                <a:solidFill>
+                  <a:srgbClr val="1E293B"/>
+                </a:solidFill>
+              </a:rPr>
+              <a:t>1. MAINTAIN_CURRENT_PACE (Emerald): </a:t>
+            </a:r>
+            <a:r>
+              <a:rPr>
+                <a:solidFill>
+                  <a:srgbClr val="1E293B"/>
+                </a:solidFill>
+              </a:rPr>
+              <a:t>Triggered when cohort attention &gt; 80% and drowsiness &lt; 8%. Validates instructional pacing.</a:t>
+            </a:r>
+          </a:p>
+          <a:p>
+            <a:pPr>
+              <a:spcAft>
+                <a:spcPts val="400"/>
+              </a:spcAft>
+              <a:defRPr sz="1000"/>
+            </a:pPr>
+            <a:r>
+              <a:rPr b="1">
+                <a:solidFill>
+                  <a:srgbClr val="1E293B"/>
+                </a:solidFill>
+              </a:rPr>
+              <a:t>2. ASK_CHECKPOINT_QUESTION (Cyan): </a:t>
+            </a:r>
+            <a:r>
+              <a:rPr>
+                <a:solidFill>
+                  <a:srgbClr val="1E293B"/>
+                </a:solidFill>
+              </a:rPr>
+              <a:t>Triggered when attention dips to 65-80%. Prompts instructor to pose a diagnostic conceptual check.</a:t>
+            </a:r>
+          </a:p>
+          <a:p>
+            <a:pPr>
+              <a:spcAft>
+                <a:spcPts val="400"/>
+              </a:spcAft>
+              <a:defRPr sz="1000"/>
+            </a:pPr>
+            <a:r>
+              <a:rPr b="1">
+                <a:solidFill>
+                  <a:srgbClr val="1E293B"/>
+                </a:solidFill>
+              </a:rPr>
+              <a:t>3. TRIGGER_INTERACTIVE_POLL (Amber): </a:t>
+            </a:r>
+            <a:r>
+              <a:rPr>
+                <a:solidFill>
+                  <a:srgbClr val="1E293B"/>
+                </a:solidFill>
+              </a:rPr>
+              <a:t>Triggered when distraction exceeds 20% or attention falls to 50-65%. Re-engages students with live polling.</a:t>
+            </a:r>
+          </a:p>
+          <a:p>
+            <a:pPr>
+              <a:spcAft>
+                <a:spcPts val="400"/>
+              </a:spcAft>
+              <a:defRPr sz="1000"/>
+            </a:pPr>
+            <a:r>
+              <a:rPr b="1">
+                <a:solidFill>
+                  <a:srgbClr val="1E293B"/>
+                </a:solidFill>
+              </a:rPr>
+              <a:t>4. TAKE_2_MIN_REFRESHER_BREAK (Rose): </a:t>
+            </a:r>
+            <a:r>
+              <a:rPr>
+                <a:solidFill>
+                  <a:srgbClr val="1E293B"/>
+                </a:solidFill>
+              </a:rPr>
+              <a:t>Triggered when drowsiness exceeds 15% or attention drops &lt; 50%. Prompts physical stretch or cognitive break.</a:t>
+            </a:r>
+          </a:p>
+        </p:txBody>
+      </p:sp>
+      <p:sp>
+        <p:nvSpPr>
+          <p:cNvPr id="5" name="Rectangle 4"/>
+          <p:cNvSpPr/>
+          <p:nvPr/>
+        </p:nvSpPr>
+        <p:spPr>
+          <a:xfrm>
+            <a:off x="6217920" y="1371600"/>
+            <a:ext cx="5212080" cy="4937760"/>
+          </a:xfrm>
+          <a:prstGeom prst="rect">
+            <a:avLst/>
+          </a:prstGeom>
+          <a:solidFill>
+            <a:srgbClr val="FFFFFF"/>
+          </a:solidFill>
+          <a:ln w="12700">
+            <a:solidFill>
+              <a:srgbClr val="E2E8F0"/>
+            </a:solidFill>
+          </a:ln>
+        </p:spPr>
+        <p:style>
+          <a:lnRef idx="1">
+            <a:schemeClr val="accent1"/>
+          </a:lnRef>
+          <a:fillRef idx="3">
+            <a:schemeClr val="accent1"/>
+          </a:fillRef>
+          <a:effectRef idx="2">
+            <a:schemeClr val="accent1"/>
+          </a:effectRef>
+          <a:fontRef idx="minor">
+            <a:schemeClr val="lt1"/>
+          </a:fontRef>
+        </p:style>
+        <p:txBody>
+          <a:bodyPr rtlCol="0" anchor="ctr"/>
+          <a:lstStyle/>
+          <a:p>
+            <a:pPr algn="ctr"/>
+          </a:p>
+        </p:txBody>
+      </p:sp>
+      <p:sp>
+        <p:nvSpPr>
+          <p:cNvPr id="6" name="TextBox 5"/>
           <p:cNvSpPr txBox="1"/>
           <p:nvPr/>
         </p:nvSpPr>
         <p:spPr>
           <a:xfrm>
-            <a:off x="731520" y="1371600"/>
-            <a:ext cx="10698480" cy="5029200"/>
+            <a:off x="6400800" y="1554480"/>
+            <a:ext cx="4846320" cy="4572000"/>
           </a:xfrm>
           <a:prstGeom prst="rect">
             <a:avLst/>
@@ -4489,116 +8330,119 @@
           <a:noFill/>
         </p:spPr>
         <p:txBody>
-          <a:bodyPr wrap="square">
+          <a:bodyPr wrap="square" lIns="0" tIns="0" rIns="0" bIns="0">
             <a:spAutoFit/>
           </a:bodyPr>
           <a:lstStyle/>
           <a:p>
             <a:pPr>
-              <a:spcBef>
+              <a:spcAft>
                 <a:spcPts val="800"/>
-              </a:spcBef>
-              <a:defRPr sz="1500" b="1">
-                <a:solidFill>
-                  <a:srgbClr val="1E3A8A"/>
-                </a:solidFill>
-              </a:defRPr>
-            </a:pPr>
-            <a:r>
-              <a:t>⚙ Core Machine Learning Framework</a:t>
-            </a:r>
-          </a:p>
-          <a:p>
-            <a:pPr>
-              <a:defRPr sz="1300">
-                <a:solidFill>
-                  <a:srgbClr val="475569"/>
-                </a:solidFill>
-              </a:defRPr>
-            </a:pPr>
-            <a:r>
-              <a:t>PyTorch 2.0+ / Scikit-learn / HuggingFace Transformers / OpenCV</a:t>
-            </a:r>
-          </a:p>
-          <a:p>
-            <a:pPr>
-              <a:spcBef>
-                <a:spcPts val="800"/>
-              </a:spcBef>
-              <a:defRPr sz="1500" b="1">
-                <a:solidFill>
-                  <a:srgbClr val="1E3A8A"/>
-                </a:solidFill>
-              </a:defRPr>
-            </a:pPr>
-            <a:r>
-              <a:t>⚙ Asynchronous REST Backend</a:t>
-            </a:r>
-          </a:p>
-          <a:p>
-            <a:pPr>
-              <a:defRPr sz="1300">
-                <a:solidFill>
-                  <a:srgbClr val="475569"/>
-                </a:solidFill>
-              </a:defRPr>
-            </a:pPr>
-            <a:r>
-              <a:t>FastAPI / Uvicorn ASGI Server / Pydantic V2 Type Safety</a:t>
-            </a:r>
-          </a:p>
-          <a:p>
-            <a:pPr>
-              <a:spcBef>
-                <a:spcPts val="800"/>
-              </a:spcBef>
-              <a:defRPr sz="1500" b="1">
-                <a:solidFill>
-                  <a:srgbClr val="1E3A8A"/>
-                </a:solidFill>
-              </a:defRPr>
-            </a:pPr>
-            <a:r>
-              <a:t>⚙ Data Persistence &amp; Storage</a:t>
-            </a:r>
-          </a:p>
-          <a:p>
-            <a:pPr>
-              <a:defRPr sz="1300">
-                <a:solidFill>
-                  <a:srgbClr val="475569"/>
-                </a:solidFill>
-              </a:defRPr>
-            </a:pPr>
-            <a:r>
-              <a:t>SQLite / PostgreSQL with transactional integrity &amp; audit trail</a:t>
-            </a:r>
-          </a:p>
-          <a:p>
-            <a:pPr>
-              <a:spcBef>
-                <a:spcPts val="800"/>
-              </a:spcBef>
-              <a:defRPr sz="1500" b="1">
-                <a:solidFill>
-                  <a:srgbClr val="1E3A8A"/>
-                </a:solidFill>
-              </a:defRPr>
-            </a:pPr>
-            <a:r>
-              <a:t>⚙ Interactive Frontend Layer</a:t>
-            </a:r>
-          </a:p>
-          <a:p>
-            <a:pPr>
-              <a:defRPr sz="1300">
-                <a:solidFill>
-                  <a:srgbClr val="475569"/>
-                </a:solidFill>
-              </a:defRPr>
-            </a:pPr>
-            <a:r>
-              <a:t>Modern Responsive Web Portal (HTML5, Tailwind/CSS, JavaScript ES6+)</a:t>
+              </a:spcAft>
+            </a:pPr>
+            <a:r>
+              <a:rPr b="1" sz="1200">
+                <a:solidFill>
+                  <a:srgbClr val="06B6D4"/>
+                </a:solidFill>
+              </a:rPr>
+              <a:t>Instructor Podium Experience &amp; Micro-Alerts</a:t>
+            </a:r>
+          </a:p>
+          <a:p>
+            <a:pPr>
+              <a:spcAft>
+                <a:spcPts val="400"/>
+              </a:spcAft>
+              <a:defRPr sz="1000"/>
+            </a:pPr>
+            <a:r>
+              <a:rPr b="1">
+                <a:solidFill>
+                  <a:srgbClr val="1E293B"/>
+                </a:solidFill>
+              </a:rPr>
+              <a:t>Non-Intrusive Display: </a:t>
+            </a:r>
+            <a:r>
+              <a:rPr>
+                <a:solidFill>
+                  <a:srgbClr val="1E293B"/>
+                </a:solidFill>
+              </a:rPr>
+              <a:t>Soft peripheral visual cues avoid startling the lecturer or disrupting lecture momentum.</a:t>
+            </a:r>
+          </a:p>
+          <a:p>
+            <a:pPr>
+              <a:spcAft>
+                <a:spcPts val="400"/>
+              </a:spcAft>
+              <a:defRPr sz="1000"/>
+            </a:pPr>
+            <a:r>
+              <a:rPr b="1">
+                <a:solidFill>
+                  <a:srgbClr val="1E293B"/>
+                </a:solidFill>
+              </a:rPr>
+              <a:t>Trend Direction Indicators: </a:t>
+            </a:r>
+            <a:r>
+              <a:rPr>
+                <a:solidFill>
+                  <a:srgbClr val="1E293B"/>
+                </a:solidFill>
+              </a:rPr>
+              <a:t>Shows whether cohort attention is stabilizing, recovering, or degrading over 5-minute windows.</a:t>
+            </a:r>
+          </a:p>
+          <a:p>
+            <a:pPr>
+              <a:spcAft>
+                <a:spcPts val="400"/>
+              </a:spcAft>
+              <a:defRPr sz="1000"/>
+            </a:pPr>
+            <a:r>
+              <a:rPr b="1">
+                <a:solidFill>
+                  <a:srgbClr val="1E293B"/>
+                </a:solidFill>
+              </a:rPr>
+              <a:t>Classroom Gaze Tracking: </a:t>
+            </a:r>
+            <a:r>
+              <a:rPr>
+                <a:solidFill>
+                  <a:srgbClr val="1E293B"/>
+                </a:solidFill>
+              </a:rPr>
+              <a:t>Monitors percentage of cohort maintaining line-of-sight with the blackboard / presentation screen.</a:t>
+            </a:r>
+          </a:p>
+          <a:p>
+            <a:pPr>
+              <a:spcAft>
+                <a:spcPts val="400"/>
+              </a:spcAft>
+              <a:defRPr sz="1000"/>
+            </a:pPr>
+            <a:r>
+              <a:rPr b="1">
+                <a:solidFill>
+                  <a:srgbClr val="1E293B"/>
+                </a:solidFill>
+              </a:rPr>
+              <a:t>Hand Raise Counters: </a:t>
+            </a:r>
+            <a:r>
+              <a:rPr>
+                <a:solidFill>
+                  <a:srgbClr val="1E293B"/>
+                </a:solidFill>
+              </a:rPr>
+              <a:t>Automated detection of student hand gestures ensuring quiet participants are acknowledged.</a:t>
             </a:r>
           </a:p>
         </p:txBody>
@@ -4623,23 +8467,68 @@
       <p:grpSpPr/>
       <p:sp>
         <p:nvSpPr>
-          <p:cNvPr id="2" name="Rectangle 1"/>
+          <p:cNvPr id="2" name="TextBox 1"/>
+          <p:cNvSpPr txBox="1"/>
+          <p:nvPr/>
+        </p:nvSpPr>
+        <p:spPr>
+          <a:xfrm>
+            <a:off x="731520" y="365760"/>
+            <a:ext cx="10728655" cy="822960"/>
+          </a:xfrm>
+          <a:prstGeom prst="rect">
+            <a:avLst/>
+          </a:prstGeom>
+          <a:noFill/>
+        </p:spPr>
+        <p:txBody>
+          <a:bodyPr wrap="square" lIns="0" tIns="0" rIns="0" bIns="0">
+            <a:spAutoFit/>
+          </a:bodyPr>
+          <a:lstStyle/>
+          <a:p>
+            <a:r>
+              <a:rPr b="1" sz="1000">
+                <a:solidFill>
+                  <a:srgbClr val="06B6D4"/>
+                </a:solidFill>
+              </a:rPr>
+              <a:t>DATA INFRASTRUCTURE • PROJECT-047</a:t>
+            </a:r>
+          </a:p>
+          <a:p>
+            <a:r>
+              <a:rPr b="1" sz="2000">
+                <a:solidFill>
+                  <a:srgbClr val="0F172A"/>
+                </a:solidFill>
+              </a:rPr>
+              <a:t>Relational Persistence &amp; SQLite WAL Architecture</a:t>
+            </a:r>
+          </a:p>
+        </p:txBody>
+      </p:sp>
+      <p:sp>
+        <p:nvSpPr>
+          <p:cNvPr id="3" name="Rectangle 2"/>
           <p:cNvSpPr/>
           <p:nvPr/>
         </p:nvSpPr>
         <p:spPr>
           <a:xfrm>
-            <a:off x="0" y="0"/>
-            <a:ext cx="12191695" cy="1097280"/>
+            <a:off x="731520" y="1371600"/>
+            <a:ext cx="5212080" cy="4937760"/>
           </a:xfrm>
           <a:prstGeom prst="rect">
             <a:avLst/>
           </a:prstGeom>
           <a:solidFill>
-            <a:srgbClr val="0F172A"/>
+            <a:srgbClr val="FFFFFF"/>
           </a:solidFill>
-          <a:ln>
-            <a:noFill/>
+          <a:ln w="12700">
+            <a:solidFill>
+              <a:srgbClr val="E2E8F0"/>
+            </a:solidFill>
           </a:ln>
         </p:spPr>
         <p:style>
@@ -4666,14 +8555,14 @@
       </p:sp>
       <p:sp>
         <p:nvSpPr>
-          <p:cNvPr id="3" name="TextBox 2"/>
+          <p:cNvPr id="4" name="TextBox 3"/>
           <p:cNvSpPr txBox="1"/>
           <p:nvPr/>
         </p:nvSpPr>
         <p:spPr>
           <a:xfrm>
-            <a:off x="731520" y="137160"/>
-            <a:ext cx="10698480" cy="822960"/>
+            <a:off x="914400" y="1554480"/>
+            <a:ext cx="4846320" cy="4572000"/>
           </a:xfrm>
           <a:prstGeom prst="rect">
             <a:avLst/>
@@ -4681,46 +8570,178 @@
           <a:noFill/>
         </p:spPr>
         <p:txBody>
-          <a:bodyPr wrap="square">
+          <a:bodyPr wrap="square" lIns="0" tIns="0" rIns="0" bIns="0">
             <a:spAutoFit/>
           </a:bodyPr>
           <a:lstStyle/>
           <a:p>
             <a:pPr>
-              <a:defRPr sz="2400" b="1">
-                <a:solidFill>
-                  <a:srgbClr val="FFFFFF"/>
-                </a:solidFill>
-              </a:defRPr>
-            </a:pPr>
-            <a:r>
-              <a:t>7. Conclusion &amp; Future Roadmap</a:t>
-            </a:r>
-          </a:p>
-          <a:p>
-            <a:pPr>
-              <a:defRPr sz="1100">
-                <a:solidFill>
-                  <a:srgbClr val="94A3B8"/>
-                </a:solidFill>
-              </a:defRPr>
-            </a:pPr>
-            <a:r>
-              <a:t>Academic &amp; Industrial AI Project Series  |  Project 47 of 55</a:t>
-            </a:r>
-          </a:p>
-        </p:txBody>
-      </p:sp>
-      <p:sp>
-        <p:nvSpPr>
-          <p:cNvPr id="4" name="TextBox 3"/>
+              <a:spcAft>
+                <a:spcPts val="800"/>
+              </a:spcAft>
+            </a:pPr>
+            <a:r>
+              <a:rPr b="1" sz="1200">
+                <a:solidFill>
+                  <a:srgbClr val="06B6D4"/>
+                </a:solidFill>
+              </a:rPr>
+              <a:t>Relational Database Schema (classroom.db)</a:t>
+            </a:r>
+          </a:p>
+          <a:p>
+            <a:pPr>
+              <a:spcAft>
+                <a:spcPts val="400"/>
+              </a:spcAft>
+              <a:defRPr sz="1000"/>
+            </a:pPr>
+            <a:r>
+              <a:rPr b="1">
+                <a:solidFill>
+                  <a:srgbClr val="1E293B"/>
+                </a:solidFill>
+              </a:rPr>
+              <a:t>classroom_sessions Table: </a:t>
+            </a:r>
+            <a:r>
+              <a:rPr>
+                <a:solidFill>
+                  <a:srgbClr val="1E293B"/>
+                </a:solidFill>
+              </a:rPr>
+              <a:t>Primary key id, session_id, course_code, course_name, instructor_name, classroom_id, active flag.</a:t>
+            </a:r>
+          </a:p>
+          <a:p>
+            <a:pPr>
+              <a:spcAft>
+                <a:spcPts val="400"/>
+              </a:spcAft>
+              <a:defRPr sz="1000"/>
+            </a:pPr>
+            <a:r>
+              <a:rPr b="1">
+                <a:solidFill>
+                  <a:srgbClr val="1E293B"/>
+                </a:solidFill>
+              </a:rPr>
+              <a:t>engagement_snapshots Table: </a:t>
+            </a:r>
+            <a:r>
+              <a:rPr>
+                <a:solidFill>
+                  <a:srgbClr val="1E293B"/>
+                </a:solidFill>
+              </a:rPr>
+              <a:t>Snapshot ID, session_id, lecture_title, student_count, mean_engagement_score, attentive_pct, bored_pct, distracted_pct, drowsy_pct, head_pose_board_focus_pct, hand_raise_count, pedagogical_recommendation, drowsiness_risk_score, intervention_urgency_index, participation_rate_forecast, evidence_hash, timestamp.</a:t>
+            </a:r>
+          </a:p>
+          <a:p>
+            <a:pPr>
+              <a:spcAft>
+                <a:spcPts val="400"/>
+              </a:spcAft>
+              <a:defRPr sz="1000"/>
+            </a:pPr>
+            <a:r>
+              <a:rPr b="1">
+                <a:solidFill>
+                  <a:srgbClr val="1E293B"/>
+                </a:solidFill>
+              </a:rPr>
+              <a:t>audit_ledger Table: </a:t>
+            </a:r>
+            <a:r>
+              <a:rPr>
+                <a:solidFill>
+                  <a:srgbClr val="1E293B"/>
+                </a:solidFill>
+              </a:rPr>
+              <a:t>Block index, timestamp, action type, event details, previous hash, current block hash.</a:t>
+            </a:r>
+          </a:p>
+          <a:p>
+            <a:pPr>
+              <a:spcAft>
+                <a:spcPts val="400"/>
+              </a:spcAft>
+              <a:defRPr sz="1000"/>
+            </a:pPr>
+            <a:r>
+              <a:rPr b="1">
+                <a:solidFill>
+                  <a:srgbClr val="1E293B"/>
+                </a:solidFill>
+              </a:rPr>
+              <a:t>Performance Indices: </a:t>
+            </a:r>
+            <a:r>
+              <a:rPr>
+                <a:solidFill>
+                  <a:srgbClr val="1E293B"/>
+                </a:solidFill>
+              </a:rPr>
+              <a:t>B-tree indices on session_id, course_code, and block_index for sub-millisecond retrieval.</a:t>
+            </a:r>
+          </a:p>
+        </p:txBody>
+      </p:sp>
+      <p:sp>
+        <p:nvSpPr>
+          <p:cNvPr id="5" name="Rectangle 4"/>
+          <p:cNvSpPr/>
+          <p:nvPr/>
+        </p:nvSpPr>
+        <p:spPr>
+          <a:xfrm>
+            <a:off x="6217920" y="1371600"/>
+            <a:ext cx="5212080" cy="4937760"/>
+          </a:xfrm>
+          <a:prstGeom prst="rect">
+            <a:avLst/>
+          </a:prstGeom>
+          <a:solidFill>
+            <a:srgbClr val="FFFFFF"/>
+          </a:solidFill>
+          <a:ln w="12700">
+            <a:solidFill>
+              <a:srgbClr val="E2E8F0"/>
+            </a:solidFill>
+          </a:ln>
+        </p:spPr>
+        <p:style>
+          <a:lnRef idx="1">
+            <a:schemeClr val="accent1"/>
+          </a:lnRef>
+          <a:fillRef idx="3">
+            <a:schemeClr val="accent1"/>
+          </a:fillRef>
+          <a:effectRef idx="2">
+            <a:schemeClr val="accent1"/>
+          </a:effectRef>
+          <a:fontRef idx="minor">
+            <a:schemeClr val="lt1"/>
+          </a:fontRef>
+        </p:style>
+        <p:txBody>
+          <a:bodyPr rtlCol="0" anchor="ctr"/>
+          <a:lstStyle/>
+          <a:p>
+            <a:pPr algn="ctr"/>
+          </a:p>
+        </p:txBody>
+      </p:sp>
+      <p:sp>
+        <p:nvSpPr>
+          <p:cNvPr id="6" name="TextBox 5"/>
           <p:cNvSpPr txBox="1"/>
           <p:nvPr/>
         </p:nvSpPr>
         <p:spPr>
           <a:xfrm>
-            <a:off x="731520" y="1371600"/>
-            <a:ext cx="10698480" cy="5029200"/>
+            <a:off x="6400800" y="1554480"/>
+            <a:ext cx="4846320" cy="4572000"/>
           </a:xfrm>
           <a:prstGeom prst="rect">
             <a:avLst/>
@@ -4728,89 +8749,562 @@
           <a:noFill/>
         </p:spPr>
         <p:txBody>
-          <a:bodyPr wrap="square">
+          <a:bodyPr wrap="square" lIns="0" tIns="0" rIns="0" bIns="0">
             <a:spAutoFit/>
           </a:bodyPr>
           <a:lstStyle/>
           <a:p>
             <a:pPr>
-              <a:spcBef>
-                <a:spcPts val="1000"/>
-              </a:spcBef>
-              <a:defRPr sz="1500" b="1">
+              <a:spcAft>
+                <a:spcPts val="800"/>
+              </a:spcAft>
+            </a:pPr>
+            <a:r>
+              <a:rPr b="1" sz="1200">
+                <a:solidFill>
+                  <a:srgbClr val="06B6D4"/>
+                </a:solidFill>
+              </a:rPr>
+              <a:t>High-Concurrency Write-Ahead Logging (WAL)</a:t>
+            </a:r>
+          </a:p>
+          <a:p>
+            <a:pPr>
+              <a:spcAft>
+                <a:spcPts val="400"/>
+              </a:spcAft>
+              <a:defRPr sz="1000"/>
+            </a:pPr>
+            <a:r>
+              <a:rPr b="1">
+                <a:solidFill>
+                  <a:srgbClr val="1E293B"/>
+                </a:solidFill>
+              </a:rPr>
+              <a:t>WAL Mode Configuration: </a:t>
+            </a:r>
+            <a:r>
+              <a:rPr>
+                <a:solidFill>
+                  <a:srgbClr val="1E293B"/>
+                </a:solidFill>
+              </a:rPr>
+              <a:t>Configured via PRAGMA journal_mode=WAL ensuring concurrent reads during telemetry write bursts.</a:t>
+            </a:r>
+          </a:p>
+          <a:p>
+            <a:pPr>
+              <a:spcAft>
+                <a:spcPts val="400"/>
+              </a:spcAft>
+              <a:defRPr sz="1000"/>
+            </a:pPr>
+            <a:r>
+              <a:rPr b="1">
+                <a:solidFill>
+                  <a:srgbClr val="1E293B"/>
+                </a:solidFill>
+              </a:rPr>
+              <a:t>Synchronous Normal PRAGMA: </a:t>
+            </a:r>
+            <a:r>
+              <a:rPr>
+                <a:solidFill>
+                  <a:srgbClr val="1E293B"/>
+                </a:solidFill>
+              </a:rPr>
+              <a:t>Optimized disk synchronization guaranteeing ACID durability with minimal I/O latency.</a:t>
+            </a:r>
+          </a:p>
+          <a:p>
+            <a:pPr>
+              <a:spcAft>
+                <a:spcPts val="400"/>
+              </a:spcAft>
+              <a:defRPr sz="1000"/>
+            </a:pPr>
+            <a:r>
+              <a:rPr b="1">
+                <a:solidFill>
+                  <a:srgbClr val="1E293B"/>
+                </a:solidFill>
+              </a:rPr>
+              <a:t>Referential Integrity: </a:t>
+            </a:r>
+            <a:r>
+              <a:rPr>
+                <a:solidFill>
+                  <a:srgbClr val="1E293B"/>
+                </a:solidFill>
+              </a:rPr>
+              <a:t>PRAGMA foreign_keys=ON enforcing relational constraints across sessions and snapshots.</a:t>
+            </a:r>
+          </a:p>
+          <a:p>
+            <a:pPr>
+              <a:spcAft>
+                <a:spcPts val="400"/>
+              </a:spcAft>
+              <a:defRPr sz="1000"/>
+            </a:pPr>
+            <a:r>
+              <a:rPr b="1">
+                <a:solidFill>
+                  <a:srgbClr val="1E293B"/>
+                </a:solidFill>
+              </a:rPr>
+              <a:t>Zero Table Locking: </a:t>
+            </a:r>
+            <a:r>
+              <a:rPr>
+                <a:solidFill>
+                  <a:srgbClr val="1E293B"/>
+                </a:solidFill>
+              </a:rPr>
+              <a:t>Enables simultaneous 60 FPS WebSocket streaming, background audit logging, and instructor dashboard queries.</a:t>
+            </a:r>
+          </a:p>
+        </p:txBody>
+      </p:sp>
+    </p:spTree>
+  </p:cSld>
+  <p:clrMapOvr>
+    <a:masterClrMapping/>
+  </p:clrMapOvr>
+</p:sld>
+</file>
+
+<file path=ppt/slides/slide9.xml><?xml version="1.0" encoding="utf-8"?>
+<p:sld xmlns:a="http://schemas.openxmlformats.org/drawingml/2006/main" xmlns:p="http://schemas.openxmlformats.org/presentationml/2006/main" xmlns:r="http://schemas.openxmlformats.org/officeDocument/2006/relationships">
+  <p:cSld>
+    <p:spTree>
+      <p:nvGrpSpPr>
+        <p:cNvPr id="1" name=""/>
+        <p:cNvGrpSpPr/>
+        <p:nvPr/>
+      </p:nvGrpSpPr>
+      <p:grpSpPr/>
+      <p:sp>
+        <p:nvSpPr>
+          <p:cNvPr id="2" name="TextBox 1"/>
+          <p:cNvSpPr txBox="1"/>
+          <p:nvPr/>
+        </p:nvSpPr>
+        <p:spPr>
+          <a:xfrm>
+            <a:off x="731520" y="365760"/>
+            <a:ext cx="10728655" cy="822960"/>
+          </a:xfrm>
+          <a:prstGeom prst="rect">
+            <a:avLst/>
+          </a:prstGeom>
+          <a:noFill/>
+        </p:spPr>
+        <p:txBody>
+          <a:bodyPr wrap="square" lIns="0" tIns="0" rIns="0" bIns="0">
+            <a:spAutoFit/>
+          </a:bodyPr>
+          <a:lstStyle/>
+          <a:p>
+            <a:r>
+              <a:rPr b="1" sz="1000">
+                <a:solidFill>
+                  <a:srgbClr val="06B6D4"/>
+                </a:solidFill>
+              </a:rPr>
+              <a:t>SECURITY &amp; PROVENANCE • PROJECT-047</a:t>
+            </a:r>
+          </a:p>
+          <a:p>
+            <a:r>
+              <a:rPr b="1" sz="2000">
                 <a:solidFill>
                   <a:srgbClr val="0F172A"/>
                 </a:solidFill>
-              </a:defRPr>
-            </a:pPr>
-            <a:r>
-              <a:t>■ Project Accomplishments</a:t>
-            </a:r>
-          </a:p>
-          <a:p>
-            <a:pPr>
-              <a:defRPr sz="1300">
-                <a:solidFill>
-                  <a:srgbClr val="475569"/>
-                </a:solidFill>
-              </a:defRPr>
-            </a:pPr>
-            <a:r>
-              <a:t>Engineered a robust, end-to-end prototype validating the initial abstract with reproducible experiments.</a:t>
-            </a:r>
-          </a:p>
-          <a:p>
-            <a:pPr>
-              <a:spcBef>
-                <a:spcPts val="1000"/>
-              </a:spcBef>
-              <a:defRPr sz="1500" b="1">
-                <a:solidFill>
-                  <a:srgbClr val="0F172A"/>
-                </a:solidFill>
-              </a:defRPr>
-            </a:pPr>
-            <a:r>
-              <a:t>■ Industrial Significance</a:t>
-            </a:r>
-          </a:p>
-          <a:p>
-            <a:pPr>
-              <a:defRPr sz="1300">
-                <a:solidFill>
-                  <a:srgbClr val="475569"/>
-                </a:solidFill>
-              </a:defRPr>
-            </a:pPr>
-            <a:r>
-              <a:t>Eliminates latency and manual friction while ensuring high confidence automated decision support.</a:t>
-            </a:r>
-          </a:p>
-          <a:p>
-            <a:pPr>
-              <a:spcBef>
-                <a:spcPts val="1000"/>
-              </a:spcBef>
-              <a:defRPr sz="1500" b="1">
-                <a:solidFill>
-                  <a:srgbClr val="0F172A"/>
-                </a:solidFill>
-              </a:defRPr>
-            </a:pPr>
-            <a:r>
-              <a:t>■ Future Scope &amp; Extensions</a:t>
-            </a:r>
-          </a:p>
-          <a:p>
-            <a:pPr>
-              <a:defRPr sz="1300">
-                <a:solidFill>
-                  <a:srgbClr val="475569"/>
-                </a:solidFill>
-              </a:defRPr>
-            </a:pPr>
-            <a:r>
-              <a:t>Integration with federated edge sensors, distributed multi-tenant cloud clustering, and automated active learning.</a:t>
+              </a:rPr>
+              <a:t>Cryptographic Audit Trail: SHA-256 Non-Repudiation Ledger</a:t>
+            </a:r>
+          </a:p>
+        </p:txBody>
+      </p:sp>
+      <p:sp>
+        <p:nvSpPr>
+          <p:cNvPr id="3" name="Rectangle 2"/>
+          <p:cNvSpPr/>
+          <p:nvPr/>
+        </p:nvSpPr>
+        <p:spPr>
+          <a:xfrm>
+            <a:off x="731520" y="1371600"/>
+            <a:ext cx="5212080" cy="4937760"/>
+          </a:xfrm>
+          <a:prstGeom prst="rect">
+            <a:avLst/>
+          </a:prstGeom>
+          <a:solidFill>
+            <a:srgbClr val="FFFFFF"/>
+          </a:solidFill>
+          <a:ln w="12700">
+            <a:solidFill>
+              <a:srgbClr val="E2E8F0"/>
+            </a:solidFill>
+          </a:ln>
+        </p:spPr>
+        <p:style>
+          <a:lnRef idx="1">
+            <a:schemeClr val="accent1"/>
+          </a:lnRef>
+          <a:fillRef idx="3">
+            <a:schemeClr val="accent1"/>
+          </a:fillRef>
+          <a:effectRef idx="2">
+            <a:schemeClr val="accent1"/>
+          </a:effectRef>
+          <a:fontRef idx="minor">
+            <a:schemeClr val="lt1"/>
+          </a:fontRef>
+        </p:style>
+        <p:txBody>
+          <a:bodyPr rtlCol="0" anchor="ctr"/>
+          <a:lstStyle/>
+          <a:p>
+            <a:pPr algn="ctr"/>
+          </a:p>
+        </p:txBody>
+      </p:sp>
+      <p:sp>
+        <p:nvSpPr>
+          <p:cNvPr id="4" name="TextBox 3"/>
+          <p:cNvSpPr txBox="1"/>
+          <p:nvPr/>
+        </p:nvSpPr>
+        <p:spPr>
+          <a:xfrm>
+            <a:off x="914400" y="1554480"/>
+            <a:ext cx="4846320" cy="4572000"/>
+          </a:xfrm>
+          <a:prstGeom prst="rect">
+            <a:avLst/>
+          </a:prstGeom>
+          <a:noFill/>
+        </p:spPr>
+        <p:txBody>
+          <a:bodyPr wrap="square" lIns="0" tIns="0" rIns="0" bIns="0">
+            <a:spAutoFit/>
+          </a:bodyPr>
+          <a:lstStyle/>
+          <a:p>
+            <a:pPr>
+              <a:spcAft>
+                <a:spcPts val="800"/>
+              </a:spcAft>
+            </a:pPr>
+            <a:r>
+              <a:rPr b="1" sz="1200">
+                <a:solidFill>
+                  <a:srgbClr val="06B6D4"/>
+                </a:solidFill>
+              </a:rPr>
+              <a:t>Blockchain-Inspired Audit Hash Chaining</a:t>
+            </a:r>
+          </a:p>
+          <a:p>
+            <a:pPr>
+              <a:spcAft>
+                <a:spcPts val="400"/>
+              </a:spcAft>
+              <a:defRPr sz="1000"/>
+            </a:pPr>
+            <a:r>
+              <a:rPr b="1">
+                <a:solidFill>
+                  <a:srgbClr val="1E293B"/>
+                </a:solidFill>
+              </a:rPr>
+              <a:t>Genesis Block Initialization: </a:t>
+            </a:r>
+            <a:r>
+              <a:rPr>
+                <a:solidFill>
+                  <a:srgbClr val="1E293B"/>
+                </a:solidFill>
+              </a:rPr>
+              <a:t>Block #0 initialized during startup with previous_hash set to 64 consecutive zeros.</a:t>
+            </a:r>
+          </a:p>
+          <a:p>
+            <a:pPr>
+              <a:spcAft>
+                <a:spcPts val="400"/>
+              </a:spcAft>
+              <a:defRPr sz="1000"/>
+            </a:pPr>
+            <a:r>
+              <a:rPr b="1">
+                <a:solidFill>
+                  <a:srgbClr val="1E293B"/>
+                </a:solidFill>
+              </a:rPr>
+              <a:t>Chaining Mathematical Formula: </a:t>
+            </a:r>
+            <a:r>
+              <a:rPr>
+                <a:solidFill>
+                  <a:srgbClr val="1E293B"/>
+                </a:solidFill>
+              </a:rPr>
+              <a:t>Current Hash = SHA256(Action | Details | Timestamp | Previous Hash).</a:t>
+            </a:r>
+          </a:p>
+          <a:p>
+            <a:pPr>
+              <a:spcAft>
+                <a:spcPts val="400"/>
+              </a:spcAft>
+              <a:defRPr sz="1000"/>
+            </a:pPr>
+            <a:r>
+              <a:rPr b="1">
+                <a:solidFill>
+                  <a:srgbClr val="1E293B"/>
+                </a:solidFill>
+              </a:rPr>
+              <a:t>Strict Hash Continuity: </a:t>
+            </a:r>
+            <a:r>
+              <a:rPr>
+                <a:solidFill>
+                  <a:srgbClr val="1E293B"/>
+                </a:solidFill>
+              </a:rPr>
+              <a:t>Every evaluation event mathematically seals the cryptographic hash of the preceding block.</a:t>
+            </a:r>
+          </a:p>
+          <a:p>
+            <a:pPr>
+              <a:spcAft>
+                <a:spcPts val="400"/>
+              </a:spcAft>
+              <a:defRPr sz="1000"/>
+            </a:pPr>
+            <a:r>
+              <a:rPr b="1">
+                <a:solidFill>
+                  <a:srgbClr val="1E293B"/>
+                </a:solidFill>
+              </a:rPr>
+              <a:t>Tamper Invalidation: </a:t>
+            </a:r>
+            <a:r>
+              <a:rPr>
+                <a:solidFill>
+                  <a:srgbClr val="1E293B"/>
+                </a:solidFill>
+              </a:rPr>
+              <a:t>Modifying even one numerical value in historical records breaks the hash chain at that block.</a:t>
+            </a:r>
+          </a:p>
+          <a:p>
+            <a:pPr>
+              <a:spcAft>
+                <a:spcPts val="400"/>
+              </a:spcAft>
+              <a:defRPr sz="1000"/>
+            </a:pPr>
+            <a:r>
+              <a:rPr b="1">
+                <a:solidFill>
+                  <a:srgbClr val="1E293B"/>
+                </a:solidFill>
+              </a:rPr>
+              <a:t>Audit Verification API: </a:t>
+            </a:r>
+            <a:r>
+              <a:rPr>
+                <a:solidFill>
+                  <a:srgbClr val="1E293B"/>
+                </a:solidFill>
+              </a:rPr>
+              <a:t>GET /api/engagement/audit-logs returns complete verifiable cryptographic block history.</a:t>
+            </a:r>
+          </a:p>
+        </p:txBody>
+      </p:sp>
+      <p:sp>
+        <p:nvSpPr>
+          <p:cNvPr id="5" name="Rectangle 4"/>
+          <p:cNvSpPr/>
+          <p:nvPr/>
+        </p:nvSpPr>
+        <p:spPr>
+          <a:xfrm>
+            <a:off x="6217920" y="1371600"/>
+            <a:ext cx="5212080" cy="4937760"/>
+          </a:xfrm>
+          <a:prstGeom prst="rect">
+            <a:avLst/>
+          </a:prstGeom>
+          <a:solidFill>
+            <a:srgbClr val="FFFFFF"/>
+          </a:solidFill>
+          <a:ln w="12700">
+            <a:solidFill>
+              <a:srgbClr val="E2E8F0"/>
+            </a:solidFill>
+          </a:ln>
+        </p:spPr>
+        <p:style>
+          <a:lnRef idx="1">
+            <a:schemeClr val="accent1"/>
+          </a:lnRef>
+          <a:fillRef idx="3">
+            <a:schemeClr val="accent1"/>
+          </a:fillRef>
+          <a:effectRef idx="2">
+            <a:schemeClr val="accent1"/>
+          </a:effectRef>
+          <a:fontRef idx="minor">
+            <a:schemeClr val="lt1"/>
+          </a:fontRef>
+        </p:style>
+        <p:txBody>
+          <a:bodyPr rtlCol="0" anchor="ctr"/>
+          <a:lstStyle/>
+          <a:p>
+            <a:pPr algn="ctr"/>
+          </a:p>
+        </p:txBody>
+      </p:sp>
+      <p:sp>
+        <p:nvSpPr>
+          <p:cNvPr id="6" name="TextBox 5"/>
+          <p:cNvSpPr txBox="1"/>
+          <p:nvPr/>
+        </p:nvSpPr>
+        <p:spPr>
+          <a:xfrm>
+            <a:off x="6400800" y="1554480"/>
+            <a:ext cx="4846320" cy="4572000"/>
+          </a:xfrm>
+          <a:prstGeom prst="rect">
+            <a:avLst/>
+          </a:prstGeom>
+          <a:noFill/>
+        </p:spPr>
+        <p:txBody>
+          <a:bodyPr wrap="square" lIns="0" tIns="0" rIns="0" bIns="0">
+            <a:spAutoFit/>
+          </a:bodyPr>
+          <a:lstStyle/>
+          <a:p>
+            <a:pPr>
+              <a:spcAft>
+                <a:spcPts val="800"/>
+              </a:spcAft>
+            </a:pPr>
+            <a:r>
+              <a:rPr b="1" sz="1200">
+                <a:solidFill>
+                  <a:srgbClr val="06B6D4"/>
+                </a:solidFill>
+              </a:rPr>
+              <a:t>Deterministic Evidence Fingerprints</a:t>
+            </a:r>
+          </a:p>
+          <a:p>
+            <a:pPr>
+              <a:spcAft>
+                <a:spcPts val="400"/>
+              </a:spcAft>
+              <a:defRPr sz="1000"/>
+            </a:pPr>
+            <a:r>
+              <a:rPr b="1">
+                <a:solidFill>
+                  <a:srgbClr val="1E293B"/>
+                </a:solidFill>
+              </a:rPr>
+              <a:t>Evidence Fingerprint Formula: </a:t>
+            </a:r>
+            <a:r>
+              <a:rPr>
+                <a:solidFill>
+                  <a:srgbClr val="1E293B"/>
+                </a:solidFill>
+              </a:rPr>
+              <a:t>SHA256(Course : Students : Score : Attentive : Bored : Distracted : Drowsy : Action : PredAtt : PredDrowsy).</a:t>
+            </a:r>
+          </a:p>
+          <a:p>
+            <a:pPr>
+              <a:spcAft>
+                <a:spcPts val="400"/>
+              </a:spcAft>
+              <a:defRPr sz="1000"/>
+            </a:pPr>
+            <a:r>
+              <a:rPr b="1">
+                <a:solidFill>
+                  <a:srgbClr val="1E293B"/>
+                </a:solidFill>
+              </a:rPr>
+              <a:t>Data Provenance &amp; Trust: </a:t>
+            </a:r>
+            <a:r>
+              <a:rPr>
+                <a:solidFill>
+                  <a:srgbClr val="1E293B"/>
+                </a:solidFill>
+              </a:rPr>
+              <a:t>Ensures engagement evaluation metrics cannot be altered or falsified retroactively.</a:t>
+            </a:r>
+          </a:p>
+          <a:p>
+            <a:pPr>
+              <a:spcAft>
+                <a:spcPts val="400"/>
+              </a:spcAft>
+              <a:defRPr sz="1000"/>
+            </a:pPr>
+            <a:r>
+              <a:rPr b="1">
+                <a:solidFill>
+                  <a:srgbClr val="1E293B"/>
+                </a:solidFill>
+              </a:rPr>
+              <a:t>Academic Research Ethics: </a:t>
+            </a:r>
+            <a:r>
+              <a:rPr>
+                <a:solidFill>
+                  <a:srgbClr val="1E293B"/>
+                </a:solidFill>
+              </a:rPr>
+              <a:t>Meets institutional review board (IRB) standards for transparent educational data provenance.</a:t>
+            </a:r>
+          </a:p>
+          <a:p>
+            <a:pPr>
+              <a:spcAft>
+                <a:spcPts val="400"/>
+              </a:spcAft>
+              <a:defRPr sz="1000"/>
+            </a:pPr>
+            <a:r>
+              <a:rPr b="1">
+                <a:solidFill>
+                  <a:srgbClr val="1E293B"/>
+                </a:solidFill>
+              </a:rPr>
+              <a:t>Automated Tamper Test: </a:t>
+            </a:r>
+            <a:r>
+              <a:rPr>
+                <a:solidFill>
+                  <a:srgbClr val="1E293B"/>
+                </a:solidFill>
+              </a:rPr>
+              <a:t>QA test suite includes bit-level tamper test verifying that modifying details causes hash mismatch.</a:t>
             </a:r>
           </a:p>
         </p:txBody>
